--- a/threadpilot/docs/presentation/ThreadPilot_Sprint1_5min.pptx
+++ b/threadpilot/docs/presentation/ThreadPilot_Sprint1_5min.pptx
@@ -11,9 +11,11 @@
     <p:sldId id="259" r:id="rId5"/>
     <p:sldId id="260" r:id="rId6"/>
     <p:sldId id="261" r:id="rId7"/>
+    <p:sldId id="262" r:id="rId8"/>
+    <p:sldId id="263" r:id="rId9"/>
   </p:sldIdLst>
   <p:notesMasterIdLst>
-    <p:notesMasterId r:id="rId8"/>
+    <p:notesMasterId r:id="rId10"/>
   </p:notesMasterIdLst>
   <p:sldSz cx="12192000" cy="6858000"/>
   <p:notesSz cx="6858000" cy="12192000"/>
@@ -112,7 +114,7 @@
   <p:extLst>
     <p:ext uri="{521415D9-36F7-43E2-AB2F-B90AF26B5E84}">
       <p14:sectionLst xmlns:p14="http://schemas.microsoft.com/office/powerpoint/2010/main">
-        <p14:section name="Sprint 1" id="{77ef7a15-b156-e0f5-160d-d29d093effd3}">
+        <p14:section name="Sprint 1" id="{1dc7600d-07be-c053-d320-467748649e4e}">
           <p14:sldIdLst>
             <p14:sldId id="256"/>
             <p14:sldId id="257"/>
@@ -120,6 +122,8 @@
             <p14:sldId id="259"/>
             <p14:sldId id="260"/>
             <p14:sldId id="261"/>
+            <p14:sldId id="262"/>
+            <p14:sldId id="263"/>
           </p14:sldIdLst>
         </p14:section>
       </p14:sectionLst>
@@ -870,8 +874,8 @@
           <a:p>
             <a:r>
               <a:rPr lang="en-US" dirty="0"/>
-              <a:t>~10 seconds. Whole talk about 4:40, leaving about 20 seconds of slack.
-ThreadPilot is a co-pilot for the general manager of a knitwear factory. The card on the right is what the manager sees first: three lines, from our briefing demo on a simulated morning, 9 April 2026.
+              <a:t>~10 seconds. Whole talk about 4:20, leaving about 40 seconds of slack.
+ThreadPilot is a co-pilot for the general manager of a knitwear factory. The picture is our real morning page on a simulated day, 9 April 2026.
 [Add before presenting: group number and the sixth team member's name.]</a:t>
             </a:r>
             <a:endParaRPr lang="en-US" dirty="0"/>
@@ -960,8 +964,10 @@
           <a:p>
             <a:r>
               <a:rPr lang="en-US" dirty="0"/>
-              <a:t>~40 seconds.
-These five questions come straight from the Track 1 brief. Today each one costs a phone call to a planner and a wait. The right-hand column is how ThreadPilot answers: a three-line briefing, ask rather than guess, estimates with assumptions, confirm before acting, and watches that fire on their own.</a:t>
+              <a:t>~35 seconds.
+This is the first thing the manager reads: three lines, outlined in orange. Yesterday's output and which stage fell below normal; the top issue; what needs a decision today.
+The top issue was not asked for. Discovery noticed that every active TrendCart order had stopped moving while later-due orders at the same stages kept moving, so the queue does not explain it. On this synthetic data that is a planted event, and discovery found 5 of 5 planted events, 1 to 5 days after each began.
+Every number opens the rows behind it. The page also has a date picker, so any previous morning can be replayed.</a:t>
             </a:r>
             <a:endParaRPr lang="en-US" dirty="0"/>
           </a:p>
@@ -1049,10 +1055,11 @@
           <a:p>
             <a:r>
               <a:rPr lang="en-US" dirty="0"/>
-              <a:t>~55 seconds.
-The brief says the centre of the track is the tool set, so we specified every tool before building it: 33 in one table, each with its limits. Five kinds are the minimum.
-Judgement is the one to remember: 'normal' is an explicit rule, the previous 8 same weekdays with Sundays closed, and the briefing, the chat and the dashboard share it. A test holds them to identical numbers. Action tools never send on their own: preview, confirmation key, audit log.
-(Reference, if asked) Stack: FastAPI, MySQL 8, a SQLite store for sessions and confirmations, the OpenAI API for understanding and wording only, and a LangChain read-only SQL agent. docs/tool_spec.md lists 15 tools for the live backend and 18 for the dashboard chat.</a:t>
+              <a:t>~45 seconds. Live demo or this walk-through. Run on 9 April (date picker, 'Simulated day 8').
+Left: a vague question. TrendCart has six active orders, so it asks which one rather than answering about the wrong order.
+Middle: multi-turn. After 'When is ORD-120 due?', the questions 'who is the customer?' and 'how many pieces?' are about ORD-120. Recording these scenarios showed six follow-ups that used to fall to the help message or answer about the whole factory; they are fixed and covered by tests.
+Right: it refuses what the data cannot answer. No prices, so no revenue. For 'why did washing drop', it gives what the log does show, 297 pieces against a usual 733, and says the log records output, not causes.
+Say clearly: this demo chat uses built-in tools, not a language model. The live backend (OpenAI model + MySQL) is the full system.</a:t>
             </a:r>
             <a:endParaRPr lang="en-US" dirty="0"/>
           </a:p>
@@ -1140,16 +1147,10 @@
           <a:p>
             <a:r>
               <a:rPr lang="en-US" dirty="0"/>
-              <a:t>~75 seconds. Live demo or screenshot walk-through.
-Run these on 9 April (date picker, 'Simulated day 8'), in this order:
-1. 'Did anything go wrong yesterday?' The three-line briefing, then Show detail.
-2. 'Which orders are high risk?'
-3. 'Should we expedite ORD-120?' The answer is 'find the blocker first': it is part of the stalled TrendCart group.
-4. 'How is the TrendCart order doing?' It asks which of the six orders you mean.
-5. 'Can we take 800 hoodies by the 25th?' A range with stated assumptions.
-6. 'What's our revenue this month?' A refusal: the data holds no prices.
-7. 'Chase ORD-120', then confirm.
-Say clearly: this demo chat is built-in tools, not a language model. The live backend (OpenAI model + MySQL) is the full system.</a:t>
+              <a:t>~35 seconds.
+The brief says the centre of the track is the tool set, so we specified every tool before building it: 33 in one table, each with its limits. Five kinds are the minimum.
+Judgement is the one to remember: 'normal' is an explicit rule, the previous 8 same weekdays with Sundays closed, and the briefing, the chat and the dashboard share it. A test holds them to identical numbers. Action tools never send on their own: preview, confirmation key, audit log.
+(Reference, if asked) Stack: FastAPI, MySQL 8, a SQLite store for sessions and confirmations, the OpenAI API for understanding and wording only, and a LangChain read-only SQL agent. docs/tool_spec.md lists 15 tools for the live backend and 18 for the dashboard chat.</a:t>
             </a:r>
             <a:endParaRPr lang="en-US" dirty="0"/>
           </a:p>
@@ -1237,10 +1238,11 @@
           <a:p>
             <a:r>
               <a:rPr lang="en-US" dirty="0"/>
-              <a:t>~60 seconds.
-36 questions, with expected answers computed from the CSV files by code that does not use the briefing. First pass, nothing fixed: 25 of 36, 69%. That is the number we stand behind. After the first fixes, 21 new held-out questions with different wording gave 18 of 21.
-Weakest first-pass areas were multi-turn, ambiguous questions and actions; unanswerable and feasibility questions passed 6 of 6. The set has 11 ambiguous-or-unanswerable and 11 feasibility-or-action questions, against the brief's minimum of 5 and 5.
-Discovery and feasibility results come from our own simulator, so they show consistency, not real-world accuracy. Not yet measured: the live OpenAI-backed system. We wrote these questions ourselves, so teammates will add their own.</a:t>
+              <a:t>~45 seconds.
+'Chase ORD-120' does not send anything. It drafts a message to the production planner, shows the worst case in plain words (one unwanted message to one colleague), and waits. Confirm, and it is logged; in this demo nothing is actually sent. The backend adds a confirmation key tied to one order and one text that expires after 15 minutes, re-reads the order before acting, and ignores a second confirmation.
+Right picture: 'Delete ORD-005' is refused. The chat reads the data; it never changes an order.
+On alerts: the manager gets one briefing at 07:00. The things that can reach them between briefings are only the watches they set themselves ('tell me if ORD-120 hasn't moved by Friday') and a stage that missed its target three days running. The thresholds and ranking rules are listed in docs/alert_triggers.md, and a test checks that page against the code.
+(Backup slide 8 shows the watch firing.)</a:t>
             </a:r>
             <a:endParaRPr lang="en-US" dirty="0"/>
           </a:p>
@@ -1329,9 +1331,9 @@
             <a:r>
               <a:rPr lang="en-US" dirty="0"/>
               <a:t>~40 seconds.
-Limits first. Predictions were validated against our own simulator, so they show consistency, not real-world accuracy. The order forecast is no better than repeating the last period, and the dashboard says so. The data holds about 29 working days of work in progress against 12 to 30 allowed, so nearly every order is late.
-Next: run the live-model evaluation once, add teammates' questions, move the briefing onto the live MySQL data, and bring Morning Briefing into the team's cloud site. Sprint 2 is Friday 30 October, Sprint 3 Friday 13 November, final zip Sunday 15 November.
-[Add before presenting: what Sprint 2 and Sprint 3 will deliver, and who owns each part.]</a:t>
+36 questions, with expected answers computed from the CSV files by code that does not use the briefing. First pass, nothing fixed: 25 of 36, 69%. That is the number we stand behind. After the first fixes, 21 new held-out questions with different wording gave 18 of 21.
+Weakest first-pass areas were multi-turn, ambiguous questions and actions; unanswerable and feasibility questions passed 6 of 6. The set has 11 ambiguous-or-unanswerable and 11 feasibility-or-action questions, against the brief's minimum of 5 and 5. (After later fixes the same questions pass 36 of 36, but that is not first-pass and we do not quote it as accuracy.)
+Discovery and feasibility results come from our own simulator, so they show consistency, not real-world accuracy. The live OpenAI-backed system was checked on 45 scripted turns: 36 passed on the first full batch, 7 turns hit rate limits. It has not yet been run on these 36 questions. We wrote these questions ourselves, so teammates will add their own.</a:t>
             </a:r>
             <a:endParaRPr lang="en-US" dirty="0"/>
           </a:p>
@@ -1355,6 +1357,187 @@
             <a:fld id="{F7021451-1387-4CA6-816F-3879F97B5CBC}" type="slidenum">
               <a:rPr lang="en-US"/>
               <a:t>6</a:t>
+            </a:fld>
+            <a:endParaRPr lang="en-US"/>
+          </a:p>
+        </p:txBody>
+      </p:sp>
+    </p:spTree>
+    <p:extLst>
+      <p:ext uri="{BB962C8B-B14F-4D97-AF65-F5344CB8AC3E}">
+        <p14:creationId xmlns:p14="http://schemas.microsoft.com/office/powerpoint/2010/main" val="1024086991"/>
+      </p:ext>
+    </p:extLst>
+  </p:cSld>
+  <p:clrMapOvr>
+    <a:masterClrMapping/>
+  </p:clrMapOvr>
+</p:notes>
+</file>
+
+<file path=ppt/notesSlides/notesSlide7.xml><?xml version="1.0" encoding="utf-8"?>
+<p:notes xmlns:a="http://schemas.openxmlformats.org/drawingml/2006/main" xmlns:r="http://schemas.openxmlformats.org/officeDocument/2006/relationships" xmlns:p="http://schemas.openxmlformats.org/presentationml/2006/main">
+  <p:cSld>
+    <p:spTree>
+      <p:nvGrpSpPr>
+        <p:cNvPr id="1" name=""/>
+        <p:cNvGrpSpPr/>
+        <p:nvPr/>
+      </p:nvGrpSpPr>
+      <p:grpSpPr>
+        <a:xfrm>
+          <a:off x="0" y="0"/>
+          <a:ext cx="0" cy="0"/>
+          <a:chOff x="0" y="0"/>
+          <a:chExt cx="0" cy="0"/>
+        </a:xfrm>
+      </p:grpSpPr>
+      <p:sp>
+        <p:nvSpPr>
+          <p:cNvPr id="2" name="Slide Image Placeholder 1"/>
+          <p:cNvSpPr>
+            <a:spLocks noGrp="1" noRot="1" noChangeAspect="1"/>
+          </p:cNvSpPr>
+          <p:nvPr>
+            <p:ph type="sldImg"/>
+          </p:nvPr>
+        </p:nvSpPr>
+        <p:spPr/>
+      </p:sp>
+      <p:sp>
+        <p:nvSpPr>
+          <p:cNvPr id="3" name="Notes Placeholder 2"/>
+          <p:cNvSpPr>
+            <a:spLocks noGrp="1"/>
+          </p:cNvSpPr>
+          <p:nvPr>
+            <p:ph type="body" idx="1"/>
+          </p:nvPr>
+        </p:nvSpPr>
+        <p:spPr/>
+        <p:txBody>
+          <a:bodyPr/>
+          <a:lstStyle/>
+          <a:p>
+            <a:r>
+              <a:rPr lang="en-US" dirty="0"/>
+              <a:t>~30 seconds.
+Limits first. Predictions were validated against our own simulator, so they show consistency, not real-world accuracy. The order forecast is no better than repeating the last period, and the dashboard says so. The data holds about 29 working days of work in progress against 12 to 30 allowed, so 27 of 34 orders are at risk and 6 are late. No real manager has used it yet.
+Next: run the live-model evaluation once, add teammates' questions, move the briefing onto the live MySQL data, and bring Morning Briefing into the team's cloud site. Sprint 2 is Friday 30 October, Sprint 3 Friday 13 November, final zip Sunday 15 November.
+[Add before presenting: what Sprint 2 and Sprint 3 will deliver, and who owns each part.]</a:t>
+            </a:r>
+            <a:endParaRPr lang="en-US" dirty="0"/>
+          </a:p>
+        </p:txBody>
+      </p:sp>
+      <p:sp>
+        <p:nvSpPr>
+          <p:cNvPr id="4" name="Slide Number Placeholder 3"/>
+          <p:cNvSpPr>
+            <a:spLocks noGrp="1"/>
+          </p:cNvSpPr>
+          <p:nvPr>
+            <p:ph type="sldNum" sz="quarter" idx="10"/>
+          </p:nvPr>
+        </p:nvSpPr>
+        <p:spPr/>
+        <p:txBody>
+          <a:bodyPr/>
+          <a:lstStyle/>
+          <a:p>
+            <a:fld id="{F7021451-1387-4CA6-816F-3879F97B5CBC}" type="slidenum">
+              <a:rPr lang="en-US"/>
+              <a:t>7</a:t>
+            </a:fld>
+            <a:endParaRPr lang="en-US"/>
+          </a:p>
+        </p:txBody>
+      </p:sp>
+    </p:spTree>
+    <p:extLst>
+      <p:ext uri="{BB962C8B-B14F-4D97-AF65-F5344CB8AC3E}">
+        <p14:creationId xmlns:p14="http://schemas.microsoft.com/office/powerpoint/2010/main" val="1024086991"/>
+      </p:ext>
+    </p:extLst>
+  </p:cSld>
+  <p:clrMapOvr>
+    <a:masterClrMapping/>
+  </p:clrMapOvr>
+</p:notes>
+</file>
+
+<file path=ppt/notesSlides/notesSlide8.xml><?xml version="1.0" encoding="utf-8"?>
+<p:notes xmlns:a="http://schemas.openxmlformats.org/drawingml/2006/main" xmlns:r="http://schemas.openxmlformats.org/officeDocument/2006/relationships" xmlns:p="http://schemas.openxmlformats.org/presentationml/2006/main">
+  <p:cSld>
+    <p:spTree>
+      <p:nvGrpSpPr>
+        <p:cNvPr id="1" name=""/>
+        <p:cNvGrpSpPr/>
+        <p:nvPr/>
+      </p:nvGrpSpPr>
+      <p:grpSpPr>
+        <a:xfrm>
+          <a:off x="0" y="0"/>
+          <a:ext cx="0" cy="0"/>
+          <a:chOff x="0" y="0"/>
+          <a:chExt cx="0" cy="0"/>
+        </a:xfrm>
+      </p:grpSpPr>
+      <p:sp>
+        <p:nvSpPr>
+          <p:cNvPr id="2" name="Slide Image Placeholder 1"/>
+          <p:cNvSpPr>
+            <a:spLocks noGrp="1" noRot="1" noChangeAspect="1"/>
+          </p:cNvSpPr>
+          <p:nvPr>
+            <p:ph type="sldImg"/>
+          </p:nvPr>
+        </p:nvSpPr>
+        <p:spPr/>
+      </p:sp>
+      <p:sp>
+        <p:nvSpPr>
+          <p:cNvPr id="3" name="Notes Placeholder 2"/>
+          <p:cNvSpPr>
+            <a:spLocks noGrp="1"/>
+          </p:cNvSpPr>
+          <p:nvPr>
+            <p:ph type="body" idx="1"/>
+          </p:nvPr>
+        </p:nvSpPr>
+        <p:spPr/>
+        <p:txBody>
+          <a:bodyPr/>
+          <a:lstStyle/>
+          <a:p>
+            <a:r>
+              <a:rPr lang="en-US" dirty="0"/>
+              <a:t>Backup. Use if asked about estimates or alerts.
+Feasibility never answers a plain yes: it gives a date range, the bottleneck stage and the assumptions, and a follow-up like 'What about 400 pieces?' changes one input. A missing date or quantity is asked for.
+Watches: confirmed with a card, evaluated once each morning against that morning's data, logged either way (fired or cleared). If the condition is no longer true, the watch clears itself. Backend reminders (scenario 3.3) run on a 30-second loop and store one in-app notification when the condition is unmet; they send nothing outside the system.</a:t>
+            </a:r>
+            <a:endParaRPr lang="en-US" dirty="0"/>
+          </a:p>
+        </p:txBody>
+      </p:sp>
+      <p:sp>
+        <p:nvSpPr>
+          <p:cNvPr id="4" name="Slide Number Placeholder 3"/>
+          <p:cNvSpPr>
+            <a:spLocks noGrp="1"/>
+          </p:cNvSpPr>
+          <p:nvPr>
+            <p:ph type="sldNum" sz="quarter" idx="10"/>
+          </p:nvPr>
+        </p:nvSpPr>
+        <p:spPr/>
+        <p:txBody>
+          <a:bodyPr/>
+          <a:lstStyle/>
+          <a:p>
+            <a:fld id="{F7021451-1387-4CA6-816F-3879F97B5CBC}" type="slidenum">
+              <a:rPr lang="en-US"/>
+              <a:t>8</a:t>
             </a:fld>
             <a:endParaRPr lang="en-US"/>
           </a:p>
@@ -1489,7 +1672,7 @@
           <a:lstStyle>
             <a:lvl1pPr algn="l" indent="0" marL="0">
               <a:buNone/>
-              <a:defRPr lang="en-US" sz="3400" b="1" dirty="0">
+              <a:defRPr lang="en-US" sz="3200" b="1" dirty="0">
                 <a:solidFill>
                   <a:schemeClr val="tx2"/>
                 </a:solidFill>
@@ -1500,7 +1683,7 @@
             <a:pPr algn="l" indent="0" marL="0">
               <a:buNone/>
             </a:pPr>
-            <a:endParaRPr lang="en-US" sz="3400" dirty="0"/>
+            <a:endParaRPr lang="en-US" sz="3200" dirty="0"/>
           </a:p>
         </p:txBody>
       </p:sp>
@@ -1943,7 +2126,7 @@
         <p:spPr>
           <a:xfrm>
             <a:off x="731520" y="1188720"/>
-            <a:ext cx="6217920" cy="1097280"/>
+            <a:ext cx="5669280" cy="1097280"/>
           </a:xfrm>
           <a:prstGeom prst="rect">
             <a:avLst/>
@@ -1982,7 +2165,7 @@
         <p:spPr>
           <a:xfrm>
             <a:off x="731520" y="2331720"/>
-            <a:ext cx="6217920" cy="548640"/>
+            <a:ext cx="5669280" cy="548640"/>
           </a:xfrm>
           <a:prstGeom prst="rect">
             <a:avLst/>
@@ -2018,7 +2201,7 @@
         <p:spPr>
           <a:xfrm>
             <a:off x="731520" y="3246120"/>
-            <a:ext cx="6217920" cy="777240"/>
+            <a:ext cx="5669280" cy="777240"/>
           </a:xfrm>
           <a:prstGeom prst="rect">
             <a:avLst/>
@@ -2073,17 +2256,17 @@
         </p:nvSpPr>
         <p:spPr>
           <a:xfrm>
-            <a:off x="731520" y="4343400"/>
-            <a:ext cx="6309360" cy="365760"/>
-          </a:xfrm>
-          <a:prstGeom prst="rect">
-            <a:avLst/>
-          </a:prstGeom>
-          <a:noFill/>
-          <a:ln/>
-        </p:spPr>
-        <p:txBody>
-          <a:bodyPr wrap="square" lIns="0" tIns="0" rIns="0" bIns="0" rtlCol="0" anchor="ctr"/>
+            <a:off x="731520" y="4251960"/>
+            <a:ext cx="5669280" cy="685800"/>
+          </a:xfrm>
+          <a:prstGeom prst="rect">
+            <a:avLst/>
+          </a:prstGeom>
+          <a:noFill/>
+          <a:ln/>
+        </p:spPr>
+        <p:txBody>
+          <a:bodyPr wrap="square" lIns="0" tIns="0" rIns="0" bIns="0" rtlCol="0" anchor="t"/>
           <a:lstStyle/>
           <a:p>
             <a:pPr algn="l" indent="0" marL="0">
@@ -2095,10 +2278,24 @@
                   <a:schemeClr val="bg2"/>
                 </a:solidFill>
               </a:rPr>
-              <a:t>Matthew  ·  LIU JING  ·  Kevin Royce Thomson  ·  Anqi Lin  ·  Wendy</a:t>
+              <a:t>Matthew  ·  LIU JING  ·  Kevin Royce Thomson</a:t>
             </a:r>
             <a:endParaRPr lang="en-US" sz="1600" dirty="0"/>
           </a:p>
+          <a:p>
+            <a:pPr algn="l" indent="0" marL="0">
+              <a:buNone/>
+            </a:pPr>
+            <a:r>
+              <a:rPr lang="en-US" sz="1600" dirty="0">
+                <a:solidFill>
+                  <a:schemeClr val="bg2"/>
+                </a:solidFill>
+              </a:rPr>
+              <a:t>Anqi Lin  ·  Wendy</a:t>
+            </a:r>
+            <a:endParaRPr lang="en-US" sz="1600" dirty="0"/>
+          </a:p>
         </p:txBody>
       </p:sp>
       <p:sp>
@@ -2109,7 +2306,7 @@
         </p:nvSpPr>
         <p:spPr>
           <a:xfrm>
-            <a:off x="731520" y="4892040"/>
+            <a:off x="731520" y="5074920"/>
             <a:ext cx="5486400" cy="384048"/>
           </a:xfrm>
           <a:prstGeom prst="roundRect">
@@ -2159,24 +2356,29 @@
       </p:sp>
       <p:sp>
         <p:nvSpPr>
-          <p:cNvPr id="7" name="Briefing card"/>
+          <p:cNvPr id="7" name="Hero screenshot frame"/>
           <p:cNvSpPr/>
           <p:nvPr/>
         </p:nvSpPr>
         <p:spPr>
           <a:xfrm>
-            <a:off x="7406640" y="1188720"/>
-            <a:ext cx="4206240" cy="3611880"/>
+            <a:off x="6675120" y="1371600"/>
+            <a:ext cx="5120640" cy="3470434"/>
           </a:xfrm>
           <a:prstGeom prst="roundRect">
             <a:avLst>
-              <a:gd name="adj" fmla="val 3038"/>
+              <a:gd name="adj" fmla="val 1581"/>
             </a:avLst>
           </a:prstGeom>
           <a:solidFill>
             <a:schemeClr val="bg1"/>
           </a:solidFill>
-          <a:ln/>
+          <a:ln w="12700">
+            <a:solidFill>
+              <a:schemeClr val="bg2"/>
+            </a:solidFill>
+            <a:prstDash val="solid"/>
+          </a:ln>
           <a:effectLst>
             <a:outerShdw sx="100000" sy="100000" kx="0" ky="0" algn="bl" rotWithShape="0" blurRad="101600" dist="25400" dir="5400000">
               <a:srgbClr val="000000">
@@ -2186,400 +2388,61 @@
           </a:effectLst>
         </p:spPr>
       </p:sp>
-      <p:sp>
-        <p:nvSpPr>
-          <p:cNvPr id="8" name="Text 6"/>
-          <p:cNvSpPr txBox="1"/>
-          <p:nvPr/>
-        </p:nvSpPr>
-        <p:spPr>
-          <a:xfrm>
-            <a:off x="7680960" y="1371600"/>
-            <a:ext cx="2377440" cy="365760"/>
-          </a:xfrm>
-          <a:prstGeom prst="rect">
-            <a:avLst/>
-          </a:prstGeom>
-          <a:noFill/>
-          <a:ln/>
-        </p:spPr>
-        <p:txBody>
-          <a:bodyPr wrap="square" lIns="0" tIns="0" rIns="0" bIns="0" rtlCol="0" anchor="ctr"/>
-          <a:lstStyle/>
-          <a:p>
-            <a:pPr algn="l" indent="0" marL="0">
-              <a:buNone/>
-            </a:pPr>
-            <a:r>
-              <a:rPr lang="en-US" sz="1800" b="1" dirty="0">
-                <a:solidFill>
-                  <a:schemeClr val="tx2"/>
-                </a:solidFill>
-              </a:rPr>
-              <a:t>Morning summary</a:t>
-            </a:r>
-            <a:endParaRPr lang="en-US" sz="1800" dirty="0"/>
-          </a:p>
-        </p:txBody>
-      </p:sp>
-      <p:sp>
-        <p:nvSpPr>
-          <p:cNvPr id="9" name="Text 7"/>
-          <p:cNvSpPr txBox="1"/>
-          <p:nvPr/>
-        </p:nvSpPr>
-        <p:spPr>
-          <a:xfrm>
-            <a:off x="9692640" y="1371600"/>
-            <a:ext cx="1645920" cy="365760"/>
-          </a:xfrm>
-          <a:prstGeom prst="rect">
-            <a:avLst/>
-          </a:prstGeom>
-          <a:noFill/>
-          <a:ln/>
-        </p:spPr>
-        <p:txBody>
-          <a:bodyPr wrap="square" lIns="0" tIns="0" rIns="0" bIns="0" rtlCol="0" anchor="ctr"/>
-          <a:lstStyle/>
-          <a:p>
-            <a:pPr algn="r" indent="0" marL="0">
+      <p:pic>
+        <p:nvPicPr>
+          <p:cNvPr id="8" name="Hero screenshot" descr="The ThreadPilot morning page on Thursday 9 April 2026: three-line summary, order health and KPI cards">    </p:cNvPr>
+          <p:cNvPicPr>
+            <a:picLocks noChangeAspect="1"/>
+          </p:cNvPicPr>
+          <p:nvPr/>
+        </p:nvPicPr>
+        <p:blipFill>
+          <a:blip r:embed="rId1"/>
+          <a:stretch>
+            <a:fillRect/>
+          </a:stretch>
+        </p:blipFill>
+        <p:spPr>
+          <a:xfrm>
+            <a:off x="6720840" y="1417320"/>
+            <a:ext cx="5029200" cy="3378994"/>
+          </a:xfrm>
+          <a:prstGeom prst="rect">
+            <a:avLst/>
+          </a:prstGeom>
+        </p:spPr>
+      </p:pic>
+      <p:sp>
+        <p:nvSpPr>
+          <p:cNvPr id="9" name="Screenshot caption"/>
+          <p:cNvSpPr txBox="1"/>
+          <p:nvPr/>
+        </p:nvSpPr>
+        <p:spPr>
+          <a:xfrm>
+            <a:off x="6720840" y="4960906"/>
+            <a:ext cx="5029200" cy="292608"/>
+          </a:xfrm>
+          <a:prstGeom prst="rect">
+            <a:avLst/>
+          </a:prstGeom>
+          <a:noFill/>
+          <a:ln/>
+        </p:spPr>
+        <p:txBody>
+          <a:bodyPr wrap="square" lIns="0" tIns="0" rIns="0" bIns="0" rtlCol="0" anchor="t"/>
+          <a:lstStyle/>
+          <a:p>
+            <a:pPr algn="l" indent="0" marL="0">
               <a:buNone/>
             </a:pPr>
             <a:r>
               <a:rPr lang="en-US" sz="1200" dirty="0">
                 <a:solidFill>
-                  <a:schemeClr val="accent5"/>
-                </a:solidFill>
-              </a:rPr>
-              <a:t>Generated 07:00</a:t>
-            </a:r>
-            <a:endParaRPr lang="en-US" sz="1200" dirty="0"/>
-          </a:p>
-        </p:txBody>
-      </p:sp>
-      <p:sp>
-        <p:nvSpPr>
-          <p:cNvPr id="10" name="Shape 8"/>
-          <p:cNvSpPr/>
-          <p:nvPr/>
-        </p:nvSpPr>
-        <p:spPr>
-          <a:xfrm>
-            <a:off x="7680960" y="1911096"/>
-            <a:ext cx="3657600" cy="10973"/>
-          </a:xfrm>
-          <a:prstGeom prst="rect">
-            <a:avLst/>
-          </a:prstGeom>
-          <a:solidFill>
-            <a:schemeClr val="bg2"/>
-          </a:solidFill>
-          <a:ln w="6350">
-            <a:solidFill>
-              <a:schemeClr val="bg2"/>
-            </a:solidFill>
-            <a:prstDash val="solid"/>
-          </a:ln>
-        </p:spPr>
-      </p:sp>
-      <p:sp>
-        <p:nvSpPr>
-          <p:cNvPr id="11" name="Text 9"/>
-          <p:cNvSpPr txBox="1"/>
-          <p:nvPr/>
-        </p:nvSpPr>
-        <p:spPr>
-          <a:xfrm>
-            <a:off x="7680960" y="2002536"/>
-            <a:ext cx="3657600" cy="256032"/>
-          </a:xfrm>
-          <a:prstGeom prst="rect">
-            <a:avLst/>
-          </a:prstGeom>
-          <a:noFill/>
-          <a:ln/>
-        </p:spPr>
-        <p:txBody>
-          <a:bodyPr wrap="square" lIns="0" tIns="0" rIns="0" bIns="0" rtlCol="0" anchor="ctr"/>
-          <a:lstStyle/>
-          <a:p>
-            <a:pPr algn="l" indent="0" marL="0">
-              <a:buNone/>
-            </a:pPr>
-            <a:r>
-              <a:rPr lang="en-US" sz="1200" b="1" dirty="0">
-                <a:solidFill>
-                  <a:schemeClr val="accent5"/>
-                </a:solidFill>
-              </a:rPr>
-              <a:t>Yesterday</a:t>
-            </a:r>
-            <a:endParaRPr lang="en-US" sz="1200" dirty="0"/>
-          </a:p>
-        </p:txBody>
-      </p:sp>
-      <p:sp>
-        <p:nvSpPr>
-          <p:cNvPr id="12" name="Text 10"/>
-          <p:cNvSpPr txBox="1"/>
-          <p:nvPr/>
-        </p:nvSpPr>
-        <p:spPr>
-          <a:xfrm>
-            <a:off x="7680960" y="2258568"/>
-            <a:ext cx="3657600" cy="566928"/>
-          </a:xfrm>
-          <a:prstGeom prst="rect">
-            <a:avLst/>
-          </a:prstGeom>
-          <a:noFill/>
-          <a:ln/>
-        </p:spPr>
-        <p:txBody>
-          <a:bodyPr wrap="square" lIns="0" tIns="0" rIns="0" bIns="0" rtlCol="0" anchor="t"/>
-          <a:lstStyle/>
-          <a:p>
-            <a:pPr algn="l" indent="0" marL="0">
-              <a:buNone/>
-            </a:pPr>
-            <a:r>
-              <a:rPr lang="en-US" sz="1600" dirty="0">
-                <a:solidFill>
-                  <a:schemeClr val="tx1"/>
-                </a:solidFill>
-              </a:rPr>
-              <a:t>2,567 pieces across four stages; Washing below normal.</a:t>
-            </a:r>
-            <a:endParaRPr lang="en-US" sz="1600" dirty="0"/>
-          </a:p>
-        </p:txBody>
-      </p:sp>
-      <p:sp>
-        <p:nvSpPr>
-          <p:cNvPr id="13" name="Shape 11"/>
-          <p:cNvSpPr/>
-          <p:nvPr/>
-        </p:nvSpPr>
-        <p:spPr>
-          <a:xfrm>
-            <a:off x="7680960" y="2898648"/>
-            <a:ext cx="3657600" cy="10973"/>
-          </a:xfrm>
-          <a:prstGeom prst="rect">
-            <a:avLst/>
-          </a:prstGeom>
-          <a:solidFill>
-            <a:schemeClr val="bg2"/>
-          </a:solidFill>
-          <a:ln w="6350">
-            <a:solidFill>
-              <a:schemeClr val="bg2"/>
-            </a:solidFill>
-            <a:prstDash val="solid"/>
-          </a:ln>
-        </p:spPr>
-      </p:sp>
-      <p:sp>
-        <p:nvSpPr>
-          <p:cNvPr id="14" name="Text 12"/>
-          <p:cNvSpPr txBox="1"/>
-          <p:nvPr/>
-        </p:nvSpPr>
-        <p:spPr>
-          <a:xfrm>
-            <a:off x="7680960" y="2990088"/>
-            <a:ext cx="3657600" cy="256032"/>
-          </a:xfrm>
-          <a:prstGeom prst="rect">
-            <a:avLst/>
-          </a:prstGeom>
-          <a:noFill/>
-          <a:ln/>
-        </p:spPr>
-        <p:txBody>
-          <a:bodyPr wrap="square" lIns="0" tIns="0" rIns="0" bIns="0" rtlCol="0" anchor="ctr"/>
-          <a:lstStyle/>
-          <a:p>
-            <a:pPr algn="l" indent="0" marL="0">
-              <a:buNone/>
-            </a:pPr>
-            <a:r>
-              <a:rPr lang="en-US" sz="1200" b="1" dirty="0">
-                <a:solidFill>
-                  <a:schemeClr val="accent5"/>
-                </a:solidFill>
-              </a:rPr>
-              <a:t>Top issue</a:t>
-            </a:r>
-            <a:endParaRPr lang="en-US" sz="1200" dirty="0"/>
-          </a:p>
-        </p:txBody>
-      </p:sp>
-      <p:sp>
-        <p:nvSpPr>
-          <p:cNvPr id="15" name="Text 13"/>
-          <p:cNvSpPr txBox="1"/>
-          <p:nvPr/>
-        </p:nvSpPr>
-        <p:spPr>
-          <a:xfrm>
-            <a:off x="7680960" y="3246120"/>
-            <a:ext cx="3657600" cy="566928"/>
-          </a:xfrm>
-          <a:prstGeom prst="rect">
-            <a:avLst/>
-          </a:prstGeom>
-          <a:noFill/>
-          <a:ln/>
-        </p:spPr>
-        <p:txBody>
-          <a:bodyPr wrap="square" lIns="0" tIns="0" rIns="0" bIns="0" rtlCol="0" anchor="t"/>
-          <a:lstStyle/>
-          <a:p>
-            <a:pPr algn="l" indent="0" marL="0">
-              <a:buNone/>
-            </a:pPr>
-            <a:r>
-              <a:rPr lang="en-US" sz="1600" dirty="0">
-                <a:solidFill>
-                  <a:schemeClr val="tx1"/>
-                </a:solidFill>
-              </a:rPr>
-              <a:t>Still open: All 6 active TrendCart orders have stopped moving.</a:t>
-            </a:r>
-            <a:endParaRPr lang="en-US" sz="1600" dirty="0"/>
-          </a:p>
-        </p:txBody>
-      </p:sp>
-      <p:sp>
-        <p:nvSpPr>
-          <p:cNvPr id="16" name="Shape 14"/>
-          <p:cNvSpPr/>
-          <p:nvPr/>
-        </p:nvSpPr>
-        <p:spPr>
-          <a:xfrm>
-            <a:off x="7680960" y="3886200"/>
-            <a:ext cx="3657600" cy="10973"/>
-          </a:xfrm>
-          <a:prstGeom prst="rect">
-            <a:avLst/>
-          </a:prstGeom>
-          <a:solidFill>
-            <a:schemeClr val="bg2"/>
-          </a:solidFill>
-          <a:ln w="6350">
-            <a:solidFill>
-              <a:schemeClr val="bg2"/>
-            </a:solidFill>
-            <a:prstDash val="solid"/>
-          </a:ln>
-        </p:spPr>
-      </p:sp>
-      <p:sp>
-        <p:nvSpPr>
-          <p:cNvPr id="17" name="Text 15"/>
-          <p:cNvSpPr txBox="1"/>
-          <p:nvPr/>
-        </p:nvSpPr>
-        <p:spPr>
-          <a:xfrm>
-            <a:off x="7680960" y="3977640"/>
-            <a:ext cx="3657600" cy="256032"/>
-          </a:xfrm>
-          <a:prstGeom prst="rect">
-            <a:avLst/>
-          </a:prstGeom>
-          <a:noFill/>
-          <a:ln/>
-        </p:spPr>
-        <p:txBody>
-          <a:bodyPr wrap="square" lIns="0" tIns="0" rIns="0" bIns="0" rtlCol="0" anchor="ctr"/>
-          <a:lstStyle/>
-          <a:p>
-            <a:pPr algn="l" indent="0" marL="0">
-              <a:buNone/>
-            </a:pPr>
-            <a:r>
-              <a:rPr lang="en-US" sz="1200" b="1" dirty="0">
-                <a:solidFill>
-                  <a:schemeClr val="accent5"/>
-                </a:solidFill>
-              </a:rPr>
-              <a:t>Decide</a:t>
-            </a:r>
-            <a:endParaRPr lang="en-US" sz="1200" dirty="0"/>
-          </a:p>
-        </p:txBody>
-      </p:sp>
-      <p:sp>
-        <p:nvSpPr>
-          <p:cNvPr id="18" name="Text 16"/>
-          <p:cNvSpPr txBox="1"/>
-          <p:nvPr/>
-        </p:nvSpPr>
-        <p:spPr>
-          <a:xfrm>
-            <a:off x="7680960" y="4233672"/>
-            <a:ext cx="3657600" cy="566928"/>
-          </a:xfrm>
-          <a:prstGeom prst="rect">
-            <a:avLst/>
-          </a:prstGeom>
-          <a:noFill/>
-          <a:ln/>
-        </p:spPr>
-        <p:txBody>
-          <a:bodyPr wrap="square" lIns="0" tIns="0" rIns="0" bIns="0" rtlCol="0" anchor="t"/>
-          <a:lstStyle/>
-          <a:p>
-            <a:pPr algn="l" indent="0" marL="0">
-              <a:buNone/>
-            </a:pPr>
-            <a:r>
-              <a:rPr lang="en-US" sz="1600" dirty="0">
-                <a:solidFill>
-                  <a:schemeClr val="tx1"/>
-                </a:solidFill>
-              </a:rPr>
-              <a:t>6 overdue, 9 due this week.</a:t>
-            </a:r>
-            <a:endParaRPr lang="en-US" sz="1600" dirty="0"/>
-          </a:p>
-        </p:txBody>
-      </p:sp>
-      <p:sp>
-        <p:nvSpPr>
-          <p:cNvPr id="19" name="Card caption"/>
-          <p:cNvSpPr txBox="1"/>
-          <p:nvPr/>
-        </p:nvSpPr>
-        <p:spPr>
-          <a:xfrm>
-            <a:off x="7406640" y="4937760"/>
-            <a:ext cx="4206240" cy="320040"/>
-          </a:xfrm>
-          <a:prstGeom prst="rect">
-            <a:avLst/>
-          </a:prstGeom>
-          <a:noFill/>
-          <a:ln/>
-        </p:spPr>
-        <p:txBody>
-          <a:bodyPr wrap="square" lIns="0" tIns="0" rIns="0" bIns="0" rtlCol="0" anchor="t"/>
-          <a:lstStyle/>
-          <a:p>
-            <a:pPr algn="l" indent="0" marL="0">
-              <a:buNone/>
-            </a:pPr>
-            <a:r>
-              <a:rPr lang="en-US" sz="1200" dirty="0">
-                <a:solidFill>
                   <a:schemeClr val="bg2"/>
                 </a:solidFill>
               </a:rPr>
-              <a:t>Real output of our briefing demo (simulated, 9 April 2026)</a:t>
+              <a:t>The real morning page (simulated day, Thursday 9 April 2026)</a:t>
             </a:r>
             <a:endParaRPr lang="en-US" sz="1200" dirty="0"/>
           </a:p>
@@ -2637,133 +2500,97 @@
               <a:buNone/>
             </a:pPr>
             <a:r>
-              <a:rPr lang="en-US" sz="3400" b="1" dirty="0">
+              <a:rPr lang="en-US" sz="3200" b="1" dirty="0">
                 <a:solidFill>
                   <a:schemeClr val="tx2"/>
                 </a:solidFill>
               </a:rPr>
-              <a:t>A GM's questions don't stop at 7 a.m.</a:t>
-            </a:r>
-            <a:endParaRPr lang="en-US" sz="3400" dirty="0"/>
-          </a:p>
-        </p:txBody>
-      </p:sp>
-      <p:sp>
-        <p:nvSpPr>
-          <p:cNvPr id="3" name="Row 7:00"/>
+              <a:t>What happened, what is at risk, what to decide</a:t>
+            </a:r>
+            <a:endParaRPr lang="en-US" sz="3200" dirty="0"/>
+          </a:p>
+        </p:txBody>
+      </p:sp>
+      <p:sp>
+        <p:nvSpPr>
+          <p:cNvPr id="3" name="Morning page screenshot frame"/>
           <p:cNvSpPr/>
           <p:nvPr/>
         </p:nvSpPr>
         <p:spPr>
           <a:xfrm>
-            <a:off x="548640" y="1371600"/>
-            <a:ext cx="11091672" cy="841248"/>
+            <a:off x="502920" y="1280160"/>
+            <a:ext cx="7132320" cy="4822031"/>
           </a:xfrm>
           <a:prstGeom prst="roundRect">
             <a:avLst>
-              <a:gd name="adj" fmla="val 8696"/>
+              <a:gd name="adj" fmla="val 1138"/>
             </a:avLst>
           </a:prstGeom>
           <a:solidFill>
-            <a:schemeClr val="bg2"/>
+            <a:schemeClr val="bg1"/>
           </a:solidFill>
-          <a:ln/>
-        </p:spPr>
-      </p:sp>
-      <p:sp>
-        <p:nvSpPr>
-          <p:cNvPr id="4" name="Time 7:00"/>
-          <p:cNvSpPr txBox="1"/>
-          <p:nvPr/>
-        </p:nvSpPr>
-        <p:spPr>
-          <a:xfrm>
-            <a:off x="777240" y="1591056"/>
-            <a:ext cx="960120" cy="402336"/>
+          <a:ln w="12700">
+            <a:solidFill>
+              <a:schemeClr val="bg2"/>
+            </a:solidFill>
+            <a:prstDash val="solid"/>
+          </a:ln>
+          <a:effectLst>
+            <a:outerShdw sx="100000" sy="100000" kx="0" ky="0" algn="bl" rotWithShape="0" blurRad="101600" dist="25400" dir="5400000">
+              <a:srgbClr val="000000">
+                <a:alpha val="16000"/>
+              </a:srgbClr>
+            </a:outerShdw>
+          </a:effectLst>
+        </p:spPr>
+      </p:sp>
+      <p:pic>
+        <p:nvPicPr>
+          <p:cNvPr id="4" name="Morning page screenshot" descr="ThreadPilot morning page: Morning summary with three lines, Order health bar and five KPI cards">    </p:cNvPr>
+          <p:cNvPicPr>
+            <a:picLocks noChangeAspect="1"/>
+          </p:cNvPicPr>
+          <p:nvPr/>
+        </p:nvPicPr>
+        <p:blipFill>
+          <a:blip r:embed="rId1"/>
+          <a:stretch>
+            <a:fillRect/>
+          </a:stretch>
+        </p:blipFill>
+        <p:spPr>
+          <a:xfrm>
+            <a:off x="548640" y="1325880"/>
+            <a:ext cx="7040880" cy="4730591"/>
+          </a:xfrm>
+          <a:prstGeom prst="rect">
+            <a:avLst/>
+          </a:prstGeom>
+        </p:spPr>
+      </p:pic>
+      <p:sp>
+        <p:nvSpPr>
+          <p:cNvPr id="5" name="Summary highlight"/>
+          <p:cNvSpPr/>
+          <p:nvPr/>
+        </p:nvSpPr>
+        <p:spPr>
+          <a:xfrm>
+            <a:off x="680657" y="2194989"/>
+            <a:ext cx="4488561" cy="1529191"/>
           </a:xfrm>
           <a:prstGeom prst="roundRect">
             <a:avLst>
-              <a:gd name="adj" fmla="val 45455"/>
+              <a:gd name="adj" fmla="val 2990"/>
             </a:avLst>
           </a:prstGeom>
           <a:solidFill>
-            <a:schemeClr val="accent1"/>
+            <a:schemeClr val="accent2">
+              <a:alpha val="0"/>
+            </a:schemeClr>
           </a:solidFill>
-          <a:ln/>
-        </p:spPr>
-        <p:txBody>
-          <a:bodyPr wrap="square" lIns="0" tIns="0" rIns="0" bIns="0" rtlCol="0" anchor="ctr"/>
-          <a:lstStyle/>
-          <a:p>
-            <a:pPr algn="ctr" indent="0" marL="0">
-              <a:buNone/>
-            </a:pPr>
-            <a:r>
-              <a:rPr lang="en-US" sz="1600" b="1" dirty="0">
-                <a:solidFill>
-                  <a:schemeClr val="bg1"/>
-                </a:solidFill>
-              </a:rPr>
-              <a:t>7:00</a:t>
-            </a:r>
-            <a:endParaRPr lang="en-US" sz="1600" dirty="0"/>
-          </a:p>
-        </p:txBody>
-      </p:sp>
-      <p:sp>
-        <p:nvSpPr>
-          <p:cNvPr id="5" name="Text 3"/>
-          <p:cNvSpPr txBox="1"/>
-          <p:nvPr/>
-        </p:nvSpPr>
-        <p:spPr>
-          <a:xfrm>
-            <a:off x="1965960" y="1371600"/>
-            <a:ext cx="4114800" cy="841248"/>
-          </a:xfrm>
-          <a:prstGeom prst="rect">
-            <a:avLst/>
-          </a:prstGeom>
-          <a:noFill/>
-          <a:ln/>
-        </p:spPr>
-        <p:txBody>
-          <a:bodyPr wrap="square" lIns="0" tIns="0" rIns="0" bIns="0" rtlCol="0" anchor="ctr"/>
-          <a:lstStyle/>
-          <a:p>
-            <a:pPr algn="l" indent="0" marL="0">
-              <a:buNone/>
-            </a:pPr>
-            <a:r>
-              <a:rPr lang="en-US" sz="1700" i="1" dirty="0">
-                <a:solidFill>
-                  <a:schemeClr val="tx1"/>
-                </a:solidFill>
-              </a:rPr>
-              <a:t>“Did anything go wrong yesterday?”</a:t>
-            </a:r>
-            <a:endParaRPr lang="en-US" sz="1700" dirty="0"/>
-          </a:p>
-        </p:txBody>
-      </p:sp>
-      <p:sp>
-        <p:nvSpPr>
-          <p:cNvPr id="6" name="Arrow"/>
-          <p:cNvSpPr/>
-          <p:nvPr/>
-        </p:nvSpPr>
-        <p:spPr>
-          <a:xfrm>
-            <a:off x="6263640" y="1645920"/>
-            <a:ext cx="457200" cy="292608"/>
-          </a:xfrm>
-          <a:prstGeom prst="rightArrow">
-            <a:avLst/>
-          </a:prstGeom>
-          <a:solidFill>
-            <a:schemeClr val="accent2"/>
-          </a:solidFill>
-          <a:ln w="6350">
+          <a:ln w="28575">
             <a:solidFill>
               <a:schemeClr val="accent2"/>
             </a:solidFill>
@@ -2773,756 +2600,367 @@
       </p:sp>
       <p:sp>
         <p:nvSpPr>
-          <p:cNvPr id="7" name="Text 5"/>
-          <p:cNvSpPr txBox="1"/>
-          <p:nvPr/>
-        </p:nvSpPr>
-        <p:spPr>
-          <a:xfrm>
-            <a:off x="6995160" y="1371600"/>
-            <a:ext cx="4480560" cy="841248"/>
-          </a:xfrm>
-          <a:prstGeom prst="rect">
-            <a:avLst/>
-          </a:prstGeom>
-          <a:noFill/>
-          <a:ln/>
-        </p:spPr>
-        <p:txBody>
-          <a:bodyPr wrap="square" lIns="0" tIns="0" rIns="0" bIns="0" rtlCol="0" anchor="ctr"/>
-          <a:lstStyle/>
-          <a:p>
-            <a:pPr algn="l" indent="0" marL="0">
-              <a:buNone/>
-            </a:pPr>
-            <a:r>
-              <a:rPr lang="en-US" sz="1600" b="1" dirty="0">
-                <a:solidFill>
-                  <a:schemeClr val="tx1"/>
-                </a:solidFill>
-              </a:rPr>
-              <a:t>Morning briefing in three lines:</a:t>
-            </a:r>
-            <a:pPr algn="l" indent="0" marL="0">
-              <a:buNone/>
-            </a:pPr>
-            <a:r>
-              <a:rPr lang="en-US" sz="1600" dirty="0">
-                <a:solidFill>
-                  <a:schemeClr val="tx1"/>
-                </a:solidFill>
-              </a:rPr>
-              <a:t> what happened, what is at risk, what needs a decision</a:t>
-            </a:r>
-            <a:endParaRPr lang="en-US" sz="1600" dirty="0"/>
-          </a:p>
-        </p:txBody>
-      </p:sp>
-      <p:sp>
-        <p:nvSpPr>
-          <p:cNvPr id="8" name="Row 9:40"/>
-          <p:cNvSpPr/>
-          <p:nvPr/>
-        </p:nvSpPr>
-        <p:spPr>
-          <a:xfrm>
-            <a:off x="548640" y="2322576"/>
-            <a:ext cx="11091672" cy="841248"/>
-          </a:xfrm>
-          <a:prstGeom prst="roundRect">
-            <a:avLst>
-              <a:gd name="adj" fmla="val 8696"/>
-            </a:avLst>
-          </a:prstGeom>
-          <a:solidFill>
-            <a:schemeClr val="bg2"/>
-          </a:solidFill>
-          <a:ln/>
-        </p:spPr>
-      </p:sp>
-      <p:sp>
-        <p:nvSpPr>
-          <p:cNvPr id="9" name="Time 9:40"/>
-          <p:cNvSpPr txBox="1"/>
-          <p:nvPr/>
-        </p:nvSpPr>
-        <p:spPr>
-          <a:xfrm>
-            <a:off x="777240" y="2542032"/>
-            <a:ext cx="960120" cy="402336"/>
-          </a:xfrm>
-          <a:prstGeom prst="roundRect">
-            <a:avLst>
-              <a:gd name="adj" fmla="val 45455"/>
-            </a:avLst>
-          </a:prstGeom>
-          <a:solidFill>
-            <a:schemeClr val="accent1"/>
-          </a:solidFill>
-          <a:ln/>
-        </p:spPr>
-        <p:txBody>
-          <a:bodyPr wrap="square" lIns="0" tIns="0" rIns="0" bIns="0" rtlCol="0" anchor="ctr"/>
-          <a:lstStyle/>
-          <a:p>
-            <a:pPr algn="ctr" indent="0" marL="0">
-              <a:buNone/>
-            </a:pPr>
-            <a:r>
-              <a:rPr lang="en-US" sz="1600" b="1" dirty="0">
-                <a:solidFill>
-                  <a:schemeClr val="bg1"/>
-                </a:solidFill>
-              </a:rPr>
-              <a:t>9:40</a:t>
-            </a:r>
-            <a:endParaRPr lang="en-US" sz="1600" dirty="0"/>
-          </a:p>
-        </p:txBody>
-      </p:sp>
-      <p:sp>
-        <p:nvSpPr>
-          <p:cNvPr id="10" name="Text 8"/>
-          <p:cNvSpPr txBox="1"/>
-          <p:nvPr/>
-        </p:nvSpPr>
-        <p:spPr>
-          <a:xfrm>
-            <a:off x="1965960" y="2322576"/>
-            <a:ext cx="4114800" cy="841248"/>
-          </a:xfrm>
-          <a:prstGeom prst="rect">
-            <a:avLst/>
-          </a:prstGeom>
-          <a:noFill/>
-          <a:ln/>
-        </p:spPr>
-        <p:txBody>
-          <a:bodyPr wrap="square" lIns="0" tIns="0" rIns="0" bIns="0" rtlCol="0" anchor="ctr"/>
-          <a:lstStyle/>
-          <a:p>
-            <a:pPr algn="l" indent="0" marL="0">
-              <a:buNone/>
-            </a:pPr>
-            <a:r>
-              <a:rPr lang="en-US" sz="1700" i="1" dirty="0">
-                <a:solidFill>
-                  <a:schemeClr val="tx1"/>
-                </a:solidFill>
-              </a:rPr>
-              <a:t>“How is the TrendCart order doing?”</a:t>
-            </a:r>
-            <a:endParaRPr lang="en-US" sz="1700" dirty="0"/>
-          </a:p>
-        </p:txBody>
-      </p:sp>
-      <p:sp>
-        <p:nvSpPr>
-          <p:cNvPr id="11" name="Arrow"/>
-          <p:cNvSpPr/>
-          <p:nvPr/>
-        </p:nvSpPr>
-        <p:spPr>
-          <a:xfrm>
-            <a:off x="6263640" y="2596896"/>
-            <a:ext cx="457200" cy="292608"/>
-          </a:xfrm>
-          <a:prstGeom prst="rightArrow">
+          <p:cNvPr id="6" name="Screenshot caption"/>
+          <p:cNvSpPr txBox="1"/>
+          <p:nvPr/>
+        </p:nvSpPr>
+        <p:spPr>
+          <a:xfrm>
+            <a:off x="548640" y="6221063"/>
+            <a:ext cx="7040880" cy="274320"/>
+          </a:xfrm>
+          <a:prstGeom prst="rect">
+            <a:avLst/>
+          </a:prstGeom>
+          <a:noFill/>
+          <a:ln/>
+        </p:spPr>
+        <p:txBody>
+          <a:bodyPr wrap="square" lIns="0" tIns="0" rIns="0" bIns="0" rtlCol="0" anchor="t"/>
+          <a:lstStyle/>
+          <a:p>
+            <a:pPr algn="l" indent="0" marL="0">
+              <a:buNone/>
+            </a:pPr>
+            <a:r>
+              <a:rPr lang="en-US" sz="1100" dirty="0">
+                <a:solidFill>
+                  <a:schemeClr val="accent5"/>
+                </a:solidFill>
+              </a:rPr>
+              <a:t>Real screenshot of the briefing demo, simulated morning of Thursday 9 April 2026 (day 8).</a:t>
+            </a:r>
+            <a:endParaRPr lang="en-US" sz="1100" dirty="0"/>
+          </a:p>
+        </p:txBody>
+      </p:sp>
+      <p:sp>
+        <p:nvSpPr>
+          <p:cNvPr id="7" name="Step 1"/>
+          <p:cNvSpPr txBox="1"/>
+          <p:nvPr/>
+        </p:nvSpPr>
+        <p:spPr>
+          <a:xfrm>
+            <a:off x="8001000" y="1371600"/>
+            <a:ext cx="457200" cy="457200"/>
+          </a:xfrm>
+          <a:prstGeom prst="ellipse">
             <a:avLst/>
           </a:prstGeom>
           <a:solidFill>
             <a:schemeClr val="accent2"/>
           </a:solidFill>
-          <a:ln w="6350">
-            <a:solidFill>
-              <a:schemeClr val="accent2"/>
-            </a:solidFill>
-            <a:prstDash val="solid"/>
-          </a:ln>
-        </p:spPr>
-      </p:sp>
-      <p:sp>
-        <p:nvSpPr>
-          <p:cNvPr id="12" name="Text 10"/>
-          <p:cNvSpPr txBox="1"/>
-          <p:nvPr/>
-        </p:nvSpPr>
-        <p:spPr>
-          <a:xfrm>
-            <a:off x="6995160" y="2322576"/>
-            <a:ext cx="4480560" cy="841248"/>
-          </a:xfrm>
-          <a:prstGeom prst="rect">
-            <a:avLst/>
-          </a:prstGeom>
-          <a:noFill/>
           <a:ln/>
         </p:spPr>
         <p:txBody>
           <a:bodyPr wrap="square" lIns="0" tIns="0" rIns="0" bIns="0" rtlCol="0" anchor="ctr"/>
           <a:lstStyle/>
           <a:p>
-            <a:pPr algn="l" indent="0" marL="0">
-              <a:buNone/>
-            </a:pPr>
-            <a:r>
-              <a:rPr lang="en-US" sz="1600" b="1" dirty="0">
+            <a:pPr algn="ctr" indent="0" marL="0">
+              <a:buNone/>
+            </a:pPr>
+            <a:r>
+              <a:rPr lang="en-US" sz="1800" b="1" dirty="0">
+                <a:solidFill>
+                  <a:schemeClr val="bg1"/>
+                </a:solidFill>
+              </a:rPr>
+              <a:t>1</a:t>
+            </a:r>
+            <a:endParaRPr lang="en-US" sz="1800" dirty="0"/>
+          </a:p>
+        </p:txBody>
+      </p:sp>
+      <p:sp>
+        <p:nvSpPr>
+          <p:cNvPr id="8" name="Label"/>
+          <p:cNvSpPr txBox="1"/>
+          <p:nvPr/>
+        </p:nvSpPr>
+        <p:spPr>
+          <a:xfrm>
+            <a:off x="8595360" y="1371600"/>
+            <a:ext cx="3044952" cy="457200"/>
+          </a:xfrm>
+          <a:prstGeom prst="rect">
+            <a:avLst/>
+          </a:prstGeom>
+          <a:noFill/>
+          <a:ln/>
+        </p:spPr>
+        <p:txBody>
+          <a:bodyPr wrap="square" lIns="0" tIns="0" rIns="0" bIns="0" rtlCol="0" anchor="ctr"/>
+          <a:lstStyle/>
+          <a:p>
+            <a:pPr algn="l" indent="0" marL="0">
+              <a:buNone/>
+            </a:pPr>
+            <a:r>
+              <a:rPr lang="en-US" sz="1800" b="1" dirty="0">
+                <a:solidFill>
+                  <a:schemeClr val="tx2"/>
+                </a:solidFill>
+              </a:rPr>
+              <a:t>Three lines first</a:t>
+            </a:r>
+            <a:endParaRPr lang="en-US" sz="1800" dirty="0"/>
+          </a:p>
+        </p:txBody>
+      </p:sp>
+      <p:sp>
+        <p:nvSpPr>
+          <p:cNvPr id="9" name="Note"/>
+          <p:cNvSpPr txBox="1"/>
+          <p:nvPr/>
+        </p:nvSpPr>
+        <p:spPr>
+          <a:xfrm>
+            <a:off x="8595360" y="1874520"/>
+            <a:ext cx="3044952" cy="960120"/>
+          </a:xfrm>
+          <a:prstGeom prst="rect">
+            <a:avLst/>
+          </a:prstGeom>
+          <a:noFill/>
+          <a:ln/>
+        </p:spPr>
+        <p:txBody>
+          <a:bodyPr wrap="square" lIns="0" tIns="0" rIns="0" bIns="0" rtlCol="0" anchor="t"/>
+          <a:lstStyle/>
+          <a:p>
+            <a:pPr algn="l" indent="0" marL="0">
+              <a:buNone/>
+            </a:pPr>
+            <a:r>
+              <a:rPr lang="en-US" sz="1400" dirty="0">
                 <a:solidFill>
                   <a:schemeClr val="tx1"/>
                 </a:solidFill>
               </a:rPr>
-              <a:t>Asks which one.</a:t>
-            </a:r>
-            <a:pPr algn="l" indent="0" marL="0">
-              <a:buNone/>
-            </a:pPr>
-            <a:r>
-              <a:rPr lang="en-US" sz="1600" dirty="0">
-                <a:solidFill>
-                  <a:schemeClr val="tx1"/>
-                </a:solidFill>
-              </a:rPr>
-              <a:t> TrendCart has six orders; it does not guess</a:t>
-            </a:r>
-            <a:endParaRPr lang="en-US" sz="1600" dirty="0"/>
-          </a:p>
-        </p:txBody>
-      </p:sp>
-      <p:sp>
-        <p:nvSpPr>
-          <p:cNvPr id="13" name="Row 11:15"/>
-          <p:cNvSpPr/>
-          <p:nvPr/>
-        </p:nvSpPr>
-        <p:spPr>
-          <a:xfrm>
-            <a:off x="548640" y="3273552"/>
-            <a:ext cx="11091672" cy="841248"/>
-          </a:xfrm>
-          <a:prstGeom prst="roundRect">
-            <a:avLst>
-              <a:gd name="adj" fmla="val 8696"/>
-            </a:avLst>
-          </a:prstGeom>
-          <a:solidFill>
-            <a:schemeClr val="bg2"/>
-          </a:solidFill>
-          <a:ln/>
-        </p:spPr>
-      </p:sp>
-      <p:sp>
-        <p:nvSpPr>
-          <p:cNvPr id="14" name="Time 11:15"/>
-          <p:cNvSpPr txBox="1"/>
-          <p:nvPr/>
-        </p:nvSpPr>
-        <p:spPr>
-          <a:xfrm>
-            <a:off x="777240" y="3493008"/>
-            <a:ext cx="960120" cy="402336"/>
-          </a:xfrm>
-          <a:prstGeom prst="roundRect">
-            <a:avLst>
-              <a:gd name="adj" fmla="val 45455"/>
-            </a:avLst>
-          </a:prstGeom>
-          <a:solidFill>
-            <a:schemeClr val="accent1"/>
-          </a:solidFill>
-          <a:ln/>
-        </p:spPr>
-        <p:txBody>
-          <a:bodyPr wrap="square" lIns="0" tIns="0" rIns="0" bIns="0" rtlCol="0" anchor="ctr"/>
-          <a:lstStyle/>
-          <a:p>
-            <a:pPr algn="ctr" indent="0" marL="0">
-              <a:buNone/>
-            </a:pPr>
-            <a:r>
-              <a:rPr lang="en-US" sz="1600" b="1" dirty="0">
-                <a:solidFill>
-                  <a:schemeClr val="bg1"/>
-                </a:solidFill>
-              </a:rPr>
-              <a:t>11:15</a:t>
-            </a:r>
-            <a:endParaRPr lang="en-US" sz="1600" dirty="0"/>
-          </a:p>
-        </p:txBody>
-      </p:sp>
-      <p:sp>
-        <p:nvSpPr>
-          <p:cNvPr id="15" name="Text 13"/>
-          <p:cNvSpPr txBox="1"/>
-          <p:nvPr/>
-        </p:nvSpPr>
-        <p:spPr>
-          <a:xfrm>
-            <a:off x="1965960" y="3273552"/>
-            <a:ext cx="4114800" cy="841248"/>
-          </a:xfrm>
-          <a:prstGeom prst="rect">
-            <a:avLst/>
-          </a:prstGeom>
-          <a:noFill/>
-          <a:ln/>
-        </p:spPr>
-        <p:txBody>
-          <a:bodyPr wrap="square" lIns="0" tIns="0" rIns="0" bIns="0" rtlCol="0" anchor="ctr"/>
-          <a:lstStyle/>
-          <a:p>
-            <a:pPr algn="l" indent="0" marL="0">
-              <a:buNone/>
-            </a:pPr>
-            <a:r>
-              <a:rPr lang="en-US" sz="1700" i="1" dirty="0">
-                <a:solidFill>
-                  <a:schemeClr val="tx1"/>
-                </a:solidFill>
-              </a:rPr>
-              <a:t>“Can we take 800 hoodies by the 25th?”</a:t>
-            </a:r>
-            <a:endParaRPr lang="en-US" sz="1700" dirty="0"/>
-          </a:p>
-        </p:txBody>
-      </p:sp>
-      <p:sp>
-        <p:nvSpPr>
-          <p:cNvPr id="16" name="Arrow"/>
-          <p:cNvSpPr/>
-          <p:nvPr/>
-        </p:nvSpPr>
-        <p:spPr>
-          <a:xfrm>
-            <a:off x="6263640" y="3547872"/>
-            <a:ext cx="457200" cy="292608"/>
-          </a:xfrm>
-          <a:prstGeom prst="rightArrow">
+              <a:t>Yesterday, top issue, decide: readable in ten seconds, generated at 07:00 from the data up to the last working day.</a:t>
+            </a:r>
+            <a:endParaRPr lang="en-US" sz="1400" dirty="0"/>
+          </a:p>
+        </p:txBody>
+      </p:sp>
+      <p:sp>
+        <p:nvSpPr>
+          <p:cNvPr id="10" name="Step 2"/>
+          <p:cNvSpPr txBox="1"/>
+          <p:nvPr/>
+        </p:nvSpPr>
+        <p:spPr>
+          <a:xfrm>
+            <a:off x="8001000" y="2944368"/>
+            <a:ext cx="457200" cy="457200"/>
+          </a:xfrm>
+          <a:prstGeom prst="ellipse">
             <a:avLst/>
           </a:prstGeom>
           <a:solidFill>
             <a:schemeClr val="accent2"/>
           </a:solidFill>
-          <a:ln w="6350">
-            <a:solidFill>
-              <a:schemeClr val="accent2"/>
-            </a:solidFill>
-            <a:prstDash val="solid"/>
-          </a:ln>
-        </p:spPr>
-      </p:sp>
-      <p:sp>
-        <p:nvSpPr>
-          <p:cNvPr id="17" name="Text 15"/>
-          <p:cNvSpPr txBox="1"/>
-          <p:nvPr/>
-        </p:nvSpPr>
-        <p:spPr>
-          <a:xfrm>
-            <a:off x="6995160" y="3273552"/>
-            <a:ext cx="4480560" cy="841248"/>
-          </a:xfrm>
-          <a:prstGeom prst="rect">
-            <a:avLst/>
-          </a:prstGeom>
-          <a:noFill/>
           <a:ln/>
         </p:spPr>
         <p:txBody>
           <a:bodyPr wrap="square" lIns="0" tIns="0" rIns="0" bIns="0" rtlCol="0" anchor="ctr"/>
           <a:lstStyle/>
           <a:p>
-            <a:pPr algn="l" indent="0" marL="0">
-              <a:buNone/>
-            </a:pPr>
-            <a:r>
-              <a:rPr lang="en-US" sz="1600" b="1" dirty="0">
+            <a:pPr algn="ctr" indent="0" marL="0">
+              <a:buNone/>
+            </a:pPr>
+            <a:r>
+              <a:rPr lang="en-US" sz="1800" b="1" dirty="0">
+                <a:solidFill>
+                  <a:schemeClr val="bg1"/>
+                </a:solidFill>
+              </a:rPr>
+              <a:t>2</a:t>
+            </a:r>
+            <a:endParaRPr lang="en-US" sz="1800" dirty="0"/>
+          </a:p>
+        </p:txBody>
+      </p:sp>
+      <p:sp>
+        <p:nvSpPr>
+          <p:cNvPr id="11" name="Label"/>
+          <p:cNvSpPr txBox="1"/>
+          <p:nvPr/>
+        </p:nvSpPr>
+        <p:spPr>
+          <a:xfrm>
+            <a:off x="8595360" y="2944368"/>
+            <a:ext cx="3044952" cy="457200"/>
+          </a:xfrm>
+          <a:prstGeom prst="rect">
+            <a:avLst/>
+          </a:prstGeom>
+          <a:noFill/>
+          <a:ln/>
+        </p:spPr>
+        <p:txBody>
+          <a:bodyPr wrap="square" lIns="0" tIns="0" rIns="0" bIns="0" rtlCol="0" anchor="ctr"/>
+          <a:lstStyle/>
+          <a:p>
+            <a:pPr algn="l" indent="0" marL="0">
+              <a:buNone/>
+            </a:pPr>
+            <a:r>
+              <a:rPr lang="en-US" sz="1800" b="1" dirty="0">
+                <a:solidFill>
+                  <a:schemeClr val="tx2"/>
+                </a:solidFill>
+              </a:rPr>
+              <a:t>It finds the problem itself</a:t>
+            </a:r>
+            <a:endParaRPr lang="en-US" sz="1800" dirty="0"/>
+          </a:p>
+        </p:txBody>
+      </p:sp>
+      <p:sp>
+        <p:nvSpPr>
+          <p:cNvPr id="12" name="Note"/>
+          <p:cNvSpPr txBox="1"/>
+          <p:nvPr/>
+        </p:nvSpPr>
+        <p:spPr>
+          <a:xfrm>
+            <a:off x="8595360" y="3447288"/>
+            <a:ext cx="3044952" cy="960120"/>
+          </a:xfrm>
+          <a:prstGeom prst="rect">
+            <a:avLst/>
+          </a:prstGeom>
+          <a:noFill/>
+          <a:ln/>
+        </p:spPr>
+        <p:txBody>
+          <a:bodyPr wrap="square" lIns="0" tIns="0" rIns="0" bIns="0" rtlCol="0" anchor="t"/>
+          <a:lstStyle/>
+          <a:p>
+            <a:pPr algn="l" indent="0" marL="0">
+              <a:buNone/>
+            </a:pPr>
+            <a:r>
+              <a:rPr lang="en-US" sz="1400" dirty="0">
                 <a:solidFill>
                   <a:schemeClr val="tx1"/>
                 </a:solidFill>
               </a:rPr>
-              <a:t>A date range with its assumptions,</a:t>
-            </a:r>
-            <a:pPr algn="l" indent="0" marL="0">
-              <a:buNone/>
-            </a:pPr>
-            <a:r>
-              <a:rPr lang="en-US" sz="1600" dirty="0">
-                <a:solidFill>
-                  <a:schemeClr val="tx1"/>
-                </a:solidFill>
-              </a:rPr>
-              <a:t> never a plain yes</a:t>
-            </a:r>
-            <a:endParaRPr lang="en-US" sz="1600" dirty="0"/>
-          </a:p>
-        </p:txBody>
-      </p:sp>
-      <p:sp>
-        <p:nvSpPr>
-          <p:cNvPr id="18" name="Row 14:30"/>
-          <p:cNvSpPr/>
-          <p:nvPr/>
-        </p:nvSpPr>
-        <p:spPr>
-          <a:xfrm>
-            <a:off x="548640" y="4224528"/>
-            <a:ext cx="11091672" cy="841248"/>
-          </a:xfrm>
-          <a:prstGeom prst="roundRect">
-            <a:avLst>
-              <a:gd name="adj" fmla="val 8696"/>
-            </a:avLst>
-          </a:prstGeom>
-          <a:solidFill>
-            <a:schemeClr val="bg2"/>
-          </a:solidFill>
-          <a:ln/>
-        </p:spPr>
-      </p:sp>
-      <p:sp>
-        <p:nvSpPr>
-          <p:cNvPr id="19" name="Time 14:30"/>
-          <p:cNvSpPr txBox="1"/>
-          <p:nvPr/>
-        </p:nvSpPr>
-        <p:spPr>
-          <a:xfrm>
-            <a:off x="777240" y="4443984"/>
-            <a:ext cx="960120" cy="402336"/>
-          </a:xfrm>
-          <a:prstGeom prst="roundRect">
-            <a:avLst>
-              <a:gd name="adj" fmla="val 45455"/>
-            </a:avLst>
-          </a:prstGeom>
-          <a:solidFill>
-            <a:schemeClr val="accent1"/>
-          </a:solidFill>
-          <a:ln/>
-        </p:spPr>
-        <p:txBody>
-          <a:bodyPr wrap="square" lIns="0" tIns="0" rIns="0" bIns="0" rtlCol="0" anchor="ctr"/>
-          <a:lstStyle/>
-          <a:p>
-            <a:pPr algn="ctr" indent="0" marL="0">
-              <a:buNone/>
-            </a:pPr>
-            <a:r>
-              <a:rPr lang="en-US" sz="1600" b="1" dirty="0">
-                <a:solidFill>
-                  <a:schemeClr val="bg1"/>
-                </a:solidFill>
-              </a:rPr>
-              <a:t>14:30</a:t>
-            </a:r>
-            <a:endParaRPr lang="en-US" sz="1600" dirty="0"/>
-          </a:p>
-        </p:txBody>
-      </p:sp>
-      <p:sp>
-        <p:nvSpPr>
-          <p:cNvPr id="20" name="Text 18"/>
-          <p:cNvSpPr txBox="1"/>
-          <p:nvPr/>
-        </p:nvSpPr>
-        <p:spPr>
-          <a:xfrm>
-            <a:off x="1965960" y="4224528"/>
-            <a:ext cx="4114800" cy="841248"/>
-          </a:xfrm>
-          <a:prstGeom prst="rect">
-            <a:avLst/>
-          </a:prstGeom>
-          <a:noFill/>
-          <a:ln/>
-        </p:spPr>
-        <p:txBody>
-          <a:bodyPr wrap="square" lIns="0" tIns="0" rIns="0" bIns="0" rtlCol="0" anchor="ctr"/>
-          <a:lstStyle/>
-          <a:p>
-            <a:pPr algn="l" indent="0" marL="0">
-              <a:buNone/>
-            </a:pPr>
-            <a:r>
-              <a:rPr lang="en-US" sz="1700" i="1" dirty="0">
-                <a:solidFill>
-                  <a:schemeClr val="tx1"/>
-                </a:solidFill>
-              </a:rPr>
-              <a:t>“That order hasn't moved in a week.</a:t>
-            </a:r>
-            <a:endParaRPr lang="en-US" sz="1700" dirty="0"/>
-          </a:p>
-          <a:p>
-            <a:pPr algn="l" indent="0" marL="0">
-              <a:buNone/>
-            </a:pPr>
-            <a:r>
-              <a:rPr lang="en-US" sz="1700" i="1" dirty="0">
-                <a:solidFill>
-                  <a:schemeClr val="tx1"/>
-                </a:solidFill>
-              </a:rPr>
-              <a:t>Chase it up.”</a:t>
-            </a:r>
-            <a:endParaRPr lang="en-US" sz="1700" dirty="0"/>
-          </a:p>
-        </p:txBody>
-      </p:sp>
-      <p:sp>
-        <p:nvSpPr>
-          <p:cNvPr id="21" name="Arrow"/>
-          <p:cNvSpPr/>
-          <p:nvPr/>
-        </p:nvSpPr>
-        <p:spPr>
-          <a:xfrm>
-            <a:off x="6263640" y="4498848"/>
-            <a:ext cx="457200" cy="292608"/>
-          </a:xfrm>
-          <a:prstGeom prst="rightArrow">
+              <a:t>“All 6 active TrendCart orders have stopped moving”: a shared cause, not the queue. Nobody asked it to look.</a:t>
+            </a:r>
+            <a:endParaRPr lang="en-US" sz="1400" dirty="0"/>
+          </a:p>
+        </p:txBody>
+      </p:sp>
+      <p:sp>
+        <p:nvSpPr>
+          <p:cNvPr id="13" name="Step 3"/>
+          <p:cNvSpPr txBox="1"/>
+          <p:nvPr/>
+        </p:nvSpPr>
+        <p:spPr>
+          <a:xfrm>
+            <a:off x="8001000" y="4517136"/>
+            <a:ext cx="457200" cy="457200"/>
+          </a:xfrm>
+          <a:prstGeom prst="ellipse">
             <a:avLst/>
           </a:prstGeom>
           <a:solidFill>
             <a:schemeClr val="accent2"/>
           </a:solidFill>
-          <a:ln w="6350">
-            <a:solidFill>
-              <a:schemeClr val="accent2"/>
-            </a:solidFill>
-            <a:prstDash val="solid"/>
-          </a:ln>
-        </p:spPr>
-      </p:sp>
-      <p:sp>
-        <p:nvSpPr>
-          <p:cNvPr id="22" name="Text 20"/>
-          <p:cNvSpPr txBox="1"/>
-          <p:nvPr/>
-        </p:nvSpPr>
-        <p:spPr>
-          <a:xfrm>
-            <a:off x="6995160" y="4224528"/>
-            <a:ext cx="4480560" cy="841248"/>
-          </a:xfrm>
-          <a:prstGeom prst="rect">
-            <a:avLst/>
-          </a:prstGeom>
-          <a:noFill/>
           <a:ln/>
         </p:spPr>
         <p:txBody>
           <a:bodyPr wrap="square" lIns="0" tIns="0" rIns="0" bIns="0" rtlCol="0" anchor="ctr"/>
           <a:lstStyle/>
           <a:p>
-            <a:pPr algn="l" indent="0" marL="0">
-              <a:buNone/>
-            </a:pPr>
-            <a:r>
-              <a:rPr lang="en-US" sz="1600" b="1" dirty="0">
+            <a:pPr algn="ctr" indent="0" marL="0">
+              <a:buNone/>
+            </a:pPr>
+            <a:r>
+              <a:rPr lang="en-US" sz="1800" b="1" dirty="0">
+                <a:solidFill>
+                  <a:schemeClr val="bg1"/>
+                </a:solidFill>
+              </a:rPr>
+              <a:t>3</a:t>
+            </a:r>
+            <a:endParaRPr lang="en-US" sz="1800" dirty="0"/>
+          </a:p>
+        </p:txBody>
+      </p:sp>
+      <p:sp>
+        <p:nvSpPr>
+          <p:cNvPr id="14" name="Label"/>
+          <p:cNvSpPr txBox="1"/>
+          <p:nvPr/>
+        </p:nvSpPr>
+        <p:spPr>
+          <a:xfrm>
+            <a:off x="8595360" y="4517136"/>
+            <a:ext cx="3044952" cy="457200"/>
+          </a:xfrm>
+          <a:prstGeom prst="rect">
+            <a:avLst/>
+          </a:prstGeom>
+          <a:noFill/>
+          <a:ln/>
+        </p:spPr>
+        <p:txBody>
+          <a:bodyPr wrap="square" lIns="0" tIns="0" rIns="0" bIns="0" rtlCol="0" anchor="ctr"/>
+          <a:lstStyle/>
+          <a:p>
+            <a:pPr algn="l" indent="0" marL="0">
+              <a:buNone/>
+            </a:pPr>
+            <a:r>
+              <a:rPr lang="en-US" sz="1800" b="1" dirty="0">
+                <a:solidFill>
+                  <a:schemeClr val="tx2"/>
+                </a:solidFill>
+              </a:rPr>
+              <a:t>Decide today</a:t>
+            </a:r>
+            <a:endParaRPr lang="en-US" sz="1800" dirty="0"/>
+          </a:p>
+        </p:txBody>
+      </p:sp>
+      <p:sp>
+        <p:nvSpPr>
+          <p:cNvPr id="15" name="Note"/>
+          <p:cNvSpPr txBox="1"/>
+          <p:nvPr/>
+        </p:nvSpPr>
+        <p:spPr>
+          <a:xfrm>
+            <a:off x="8595360" y="5020056"/>
+            <a:ext cx="3044952" cy="960120"/>
+          </a:xfrm>
+          <a:prstGeom prst="rect">
+            <a:avLst/>
+          </a:prstGeom>
+          <a:noFill/>
+          <a:ln/>
+        </p:spPr>
+        <p:txBody>
+          <a:bodyPr wrap="square" lIns="0" tIns="0" rIns="0" bIns="0" rtlCol="0" anchor="t"/>
+          <a:lstStyle/>
+          <a:p>
+            <a:pPr algn="l" indent="0" marL="0">
+              <a:buNone/>
+            </a:pPr>
+            <a:r>
+              <a:rPr lang="en-US" sz="1400" dirty="0">
                 <a:solidFill>
                   <a:schemeClr val="tx1"/>
                 </a:solidFill>
               </a:rPr>
-              <a:t>Drafts the chase-up;</a:t>
-            </a:r>
-            <a:pPr algn="l" indent="0" marL="0">
-              <a:buNone/>
-            </a:pPr>
-            <a:r>
-              <a:rPr lang="en-US" sz="1600" dirty="0">
-                <a:solidFill>
-                  <a:schemeClr val="tx1"/>
-                </a:solidFill>
-              </a:rPr>
-              <a:t> sends only after you confirm, then logs it</a:t>
-            </a:r>
-            <a:endParaRPr lang="en-US" sz="1600" dirty="0"/>
-          </a:p>
-        </p:txBody>
-      </p:sp>
-      <p:sp>
-        <p:nvSpPr>
-          <p:cNvPr id="23" name="Row 17:00"/>
-          <p:cNvSpPr/>
-          <p:nvPr/>
-        </p:nvSpPr>
-        <p:spPr>
-          <a:xfrm>
-            <a:off x="548640" y="5175504"/>
-            <a:ext cx="11091672" cy="841248"/>
-          </a:xfrm>
-          <a:prstGeom prst="roundRect">
-            <a:avLst>
-              <a:gd name="adj" fmla="val 8696"/>
-            </a:avLst>
-          </a:prstGeom>
-          <a:solidFill>
-            <a:schemeClr val="bg2"/>
-          </a:solidFill>
-          <a:ln/>
-        </p:spPr>
-      </p:sp>
-      <p:sp>
-        <p:nvSpPr>
-          <p:cNvPr id="24" name="Time 17:00"/>
-          <p:cNvSpPr txBox="1"/>
-          <p:nvPr/>
-        </p:nvSpPr>
-        <p:spPr>
-          <a:xfrm>
-            <a:off x="777240" y="5394960"/>
-            <a:ext cx="960120" cy="402336"/>
-          </a:xfrm>
-          <a:prstGeom prst="roundRect">
-            <a:avLst>
-              <a:gd name="adj" fmla="val 45455"/>
-            </a:avLst>
-          </a:prstGeom>
-          <a:solidFill>
-            <a:schemeClr val="accent1"/>
-          </a:solidFill>
-          <a:ln/>
-        </p:spPr>
-        <p:txBody>
-          <a:bodyPr wrap="square" lIns="0" tIns="0" rIns="0" bIns="0" rtlCol="0" anchor="ctr"/>
-          <a:lstStyle/>
-          <a:p>
-            <a:pPr algn="ctr" indent="0" marL="0">
-              <a:buNone/>
-            </a:pPr>
-            <a:r>
-              <a:rPr lang="en-US" sz="1600" b="1" dirty="0">
-                <a:solidFill>
-                  <a:schemeClr val="bg1"/>
-                </a:solidFill>
-              </a:rPr>
-              <a:t>17:00</a:t>
-            </a:r>
-            <a:endParaRPr lang="en-US" sz="1600" dirty="0"/>
-          </a:p>
-        </p:txBody>
-      </p:sp>
-      <p:sp>
-        <p:nvSpPr>
-          <p:cNvPr id="25" name="Text 23"/>
-          <p:cNvSpPr txBox="1"/>
-          <p:nvPr/>
-        </p:nvSpPr>
-        <p:spPr>
-          <a:xfrm>
-            <a:off x="1965960" y="5175504"/>
-            <a:ext cx="4114800" cy="841248"/>
-          </a:xfrm>
-          <a:prstGeom prst="rect">
-            <a:avLst/>
-          </a:prstGeom>
-          <a:noFill/>
-          <a:ln/>
-        </p:spPr>
-        <p:txBody>
-          <a:bodyPr wrap="square" lIns="0" tIns="0" rIns="0" bIns="0" rtlCol="0" anchor="ctr"/>
-          <a:lstStyle/>
-          <a:p>
-            <a:pPr algn="l" indent="0" marL="0">
-              <a:buNone/>
-            </a:pPr>
-            <a:r>
-              <a:rPr lang="en-US" sz="1700" i="1" dirty="0">
-                <a:solidFill>
-                  <a:schemeClr val="tx1"/>
-                </a:solidFill>
-              </a:rPr>
-              <a:t>“Remind me tomorrow if</a:t>
-            </a:r>
-            <a:endParaRPr lang="en-US" sz="1700" dirty="0"/>
-          </a:p>
-          <a:p>
-            <a:pPr algn="l" indent="0" marL="0">
-              <a:buNone/>
-            </a:pPr>
-            <a:r>
-              <a:rPr lang="en-US" sz="1700" i="1" dirty="0">
-                <a:solidFill>
-                  <a:schemeClr val="tx1"/>
-                </a:solidFill>
-              </a:rPr>
-              <a:t>packing is still behind.”</a:t>
-            </a:r>
-            <a:endParaRPr lang="en-US" sz="1700" dirty="0"/>
-          </a:p>
-        </p:txBody>
-      </p:sp>
-      <p:sp>
-        <p:nvSpPr>
-          <p:cNvPr id="26" name="Arrow"/>
-          <p:cNvSpPr/>
-          <p:nvPr/>
-        </p:nvSpPr>
-        <p:spPr>
-          <a:xfrm>
-            <a:off x="6263640" y="5449824"/>
-            <a:ext cx="457200" cy="292608"/>
-          </a:xfrm>
-          <a:prstGeom prst="rightArrow">
-            <a:avLst/>
-          </a:prstGeom>
-          <a:solidFill>
-            <a:schemeClr val="accent2"/>
-          </a:solidFill>
-          <a:ln w="6350">
-            <a:solidFill>
-              <a:schemeClr val="accent2"/>
-            </a:solidFill>
-            <a:prstDash val="solid"/>
-          </a:ln>
-        </p:spPr>
-      </p:sp>
-      <p:sp>
-        <p:nvSpPr>
-          <p:cNvPr id="27" name="Text 25"/>
-          <p:cNvSpPr txBox="1"/>
-          <p:nvPr/>
-        </p:nvSpPr>
-        <p:spPr>
-          <a:xfrm>
-            <a:off x="6995160" y="5175504"/>
-            <a:ext cx="4480560" cy="841248"/>
-          </a:xfrm>
-          <a:prstGeom prst="rect">
-            <a:avLst/>
-          </a:prstGeom>
-          <a:noFill/>
-          <a:ln/>
-        </p:spPr>
-        <p:txBody>
-          <a:bodyPr wrap="square" lIns="0" tIns="0" rIns="0" bIns="0" rtlCol="0" anchor="ctr"/>
-          <a:lstStyle/>
-          <a:p>
-            <a:pPr algn="l" indent="0" marL="0">
-              <a:buNone/>
-            </a:pPr>
-            <a:r>
-              <a:rPr lang="en-US" sz="1600" b="1" dirty="0">
-                <a:solidFill>
-                  <a:schemeClr val="tx1"/>
-                </a:solidFill>
-              </a:rPr>
-              <a:t>A standing watch</a:t>
-            </a:r>
-            <a:pPr algn="l" indent="0" marL="0">
-              <a:buNone/>
-            </a:pPr>
-            <a:r>
-              <a:rPr lang="en-US" sz="1600" dirty="0">
-                <a:solidFill>
-                  <a:schemeClr val="tx1"/>
-                </a:solidFill>
-              </a:rPr>
-              <a:t> that checks the data and alerts on its own</a:t>
-            </a:r>
-            <a:endParaRPr lang="en-US" sz="1600" dirty="0"/>
+              <a:t>6 overdue and 9 due this week; 27 of 34 orders in progress are at risk. Every number opens the rows behind it.</a:t>
+            </a:r>
+            <a:endParaRPr lang="en-US" sz="1400" dirty="0"/>
           </a:p>
         </p:txBody>
       </p:sp>
@@ -3623,27 +3061,27 @@
               <a:buNone/>
             </a:pPr>
             <a:r>
-              <a:rPr lang="en-US" sz="3400" b="1" dirty="0">
+              <a:rPr lang="en-US" sz="3200" b="1" dirty="0">
                 <a:solidFill>
                   <a:schemeClr val="tx2"/>
                 </a:solidFill>
               </a:rPr>
-              <a:t>A designed tool set, not a chat window</a:t>
-            </a:r>
-            <a:endParaRPr lang="en-US" sz="3400" dirty="0"/>
-          </a:p>
-        </p:txBody>
-      </p:sp>
-      <p:sp>
-        <p:nvSpPr>
-          <p:cNvPr id="3" name="Text 1"/>
-          <p:cNvSpPr txBox="1"/>
-          <p:nvPr/>
-        </p:nvSpPr>
-        <p:spPr>
-          <a:xfrm>
-            <a:off x="1280160" y="1298448"/>
-            <a:ext cx="3657600" cy="274320"/>
+              <a:t>It asks, remembers, and admits what it can't know</a:t>
+            </a:r>
+            <a:endParaRPr lang="en-US" sz="3200" dirty="0"/>
+          </a:p>
+        </p:txBody>
+      </p:sp>
+      <p:sp>
+        <p:nvSpPr>
+          <p:cNvPr id="3" name="Label"/>
+          <p:cNvSpPr txBox="1"/>
+          <p:nvPr/>
+        </p:nvSpPr>
+        <p:spPr>
+          <a:xfrm>
+            <a:off x="717144" y="1234440"/>
+            <a:ext cx="4276800" cy="411480"/>
           </a:xfrm>
           <a:prstGeom prst="rect">
             <a:avLst/>
@@ -3659,139 +3097,54 @@
               <a:buNone/>
             </a:pPr>
             <a:r>
-              <a:rPr lang="en-US" sz="1200" b="1" spc="100" kern="0" dirty="0">
-                <a:solidFill>
-                  <a:schemeClr val="accent5"/>
-                </a:solidFill>
-              </a:rPr>
-              <a:t>TOOL KIND</a:t>
-            </a:r>
-            <a:endParaRPr lang="en-US" sz="1200" dirty="0"/>
-          </a:p>
-        </p:txBody>
-      </p:sp>
-      <p:sp>
-        <p:nvSpPr>
-          <p:cNvPr id="4" name="Text 2"/>
-          <p:cNvSpPr txBox="1"/>
-          <p:nvPr/>
-        </p:nvSpPr>
-        <p:spPr>
-          <a:xfrm>
-            <a:off x="3017520" y="1298448"/>
-            <a:ext cx="3657600" cy="274320"/>
-          </a:xfrm>
-          <a:prstGeom prst="rect">
-            <a:avLst/>
-          </a:prstGeom>
-          <a:noFill/>
-          <a:ln/>
-        </p:spPr>
-        <p:txBody>
-          <a:bodyPr wrap="square" lIns="0" tIns="0" rIns="0" bIns="0" rtlCol="0" anchor="ctr"/>
-          <a:lstStyle/>
-          <a:p>
-            <a:pPr algn="l" indent="0" marL="0">
-              <a:buNone/>
-            </a:pPr>
-            <a:r>
-              <a:rPr lang="en-US" sz="1200" b="1" spc="100" kern="0" dirty="0">
-                <a:solidFill>
-                  <a:schemeClr val="accent5"/>
-                </a:solidFill>
-              </a:rPr>
-              <a:t>WHAT OURS DOES</a:t>
-            </a:r>
-            <a:endParaRPr lang="en-US" sz="1200" dirty="0"/>
-          </a:p>
-        </p:txBody>
-      </p:sp>
-      <p:sp>
-        <p:nvSpPr>
-          <p:cNvPr id="5" name="Text 3"/>
-          <p:cNvSpPr txBox="1"/>
-          <p:nvPr/>
-        </p:nvSpPr>
-        <p:spPr>
-          <a:xfrm>
-            <a:off x="8412480" y="1298448"/>
-            <a:ext cx="3657600" cy="274320"/>
-          </a:xfrm>
-          <a:prstGeom prst="rect">
-            <a:avLst/>
-          </a:prstGeom>
-          <a:noFill/>
-          <a:ln/>
-        </p:spPr>
-        <p:txBody>
-          <a:bodyPr wrap="square" lIns="0" tIns="0" rIns="0" bIns="0" rtlCol="0" anchor="ctr"/>
-          <a:lstStyle/>
-          <a:p>
-            <a:pPr algn="l" indent="0" marL="0">
-              <a:buNone/>
-            </a:pPr>
-            <a:r>
-              <a:rPr lang="en-US" sz="1200" b="1" spc="100" kern="0" dirty="0">
-                <a:solidFill>
-                  <a:schemeClr val="accent5"/>
-                </a:solidFill>
-              </a:rPr>
-              <a:t>DELIBERATELY DOES NOT</a:t>
-            </a:r>
-            <a:endParaRPr lang="en-US" sz="1200" dirty="0"/>
-          </a:p>
-        </p:txBody>
-      </p:sp>
-      <p:sp>
-        <p:nvSpPr>
-          <p:cNvPr id="6" name="Row Retrieval"/>
+              <a:rPr lang="en-US" sz="1700" b="1" dirty="0">
+                <a:solidFill>
+                  <a:schemeClr val="tx2"/>
+                </a:solidFill>
+              </a:rPr>
+              <a:t>A vague question: it asks</a:t>
+            </a:r>
+            <a:endParaRPr lang="en-US" sz="1700" dirty="0"/>
+          </a:p>
+        </p:txBody>
+      </p:sp>
+      <p:sp>
+        <p:nvSpPr>
+          <p:cNvPr id="4" name="Chat screenshot 1 frame"/>
           <p:cNvSpPr/>
           <p:nvPr/>
         </p:nvSpPr>
         <p:spPr>
           <a:xfrm>
-            <a:off x="548640" y="1645920"/>
-            <a:ext cx="11091672" cy="713232"/>
+            <a:off x="671424" y="1691640"/>
+            <a:ext cx="4368240" cy="3794760"/>
           </a:xfrm>
           <a:prstGeom prst="roundRect">
             <a:avLst>
-              <a:gd name="adj" fmla="val 10256"/>
+              <a:gd name="adj" fmla="val 1446"/>
             </a:avLst>
           </a:prstGeom>
           <a:solidFill>
-            <a:schemeClr val="bg2"/>
+            <a:schemeClr val="bg1"/>
           </a:solidFill>
-          <a:ln/>
-        </p:spPr>
-      </p:sp>
-      <p:sp>
-        <p:nvSpPr>
-          <p:cNvPr id="7" name="Icon disc Retrieval"/>
-          <p:cNvSpPr/>
-          <p:nvPr/>
-        </p:nvSpPr>
-        <p:spPr>
-          <a:xfrm>
-            <a:off x="713232" y="1773936"/>
-            <a:ext cx="457200" cy="457200"/>
-          </a:xfrm>
-          <a:prstGeom prst="ellipse">
-            <a:avLst/>
-          </a:prstGeom>
-          <a:solidFill>
-            <a:schemeClr val="accent1"/>
-          </a:solidFill>
-          <a:ln w="6350">
+          <a:ln w="12700">
             <a:solidFill>
-              <a:schemeClr val="accent1"/>
+              <a:schemeClr val="bg2"/>
             </a:solidFill>
             <a:prstDash val="solid"/>
           </a:ln>
+          <a:effectLst>
+            <a:outerShdw sx="100000" sy="100000" kx="0" ky="0" algn="bl" rotWithShape="0" blurRad="101600" dist="25400" dir="5400000">
+              <a:srgbClr val="000000">
+                <a:alpha val="16000"/>
+              </a:srgbClr>
+            </a:outerShdw>
+          </a:effectLst>
         </p:spPr>
       </p:sp>
       <p:pic>
         <p:nvPicPr>
-          <p:cNvPr id="8" name="Image 0" descr="Retrieval icon">    </p:cNvPr>
+          <p:cNvPr id="5" name="Chat screenshot 1" descr="Chat: “How is the TrendCart order doing?” answered with a question and six choices">    </p:cNvPr>
           <p:cNvPicPr>
             <a:picLocks noChangeAspect="1"/>
           </p:cNvPicPr>
@@ -3805,8 +3158,8 @@
         </p:blipFill>
         <p:spPr>
           <a:xfrm>
-            <a:off x="822960" y="1883664"/>
-            <a:ext cx="237744" cy="237744"/>
+            <a:off x="717144" y="1737360"/>
+            <a:ext cx="4276800" cy="3703320"/>
           </a:xfrm>
           <a:prstGeom prst="rect">
             <a:avLst/>
@@ -3815,14 +3168,50 @@
       </p:pic>
       <p:sp>
         <p:nvSpPr>
-          <p:cNvPr id="9" name="Text 6"/>
-          <p:cNvSpPr txBox="1"/>
-          <p:nvPr/>
-        </p:nvSpPr>
-        <p:spPr>
-          <a:xfrm>
-            <a:off x="1280160" y="1645920"/>
-            <a:ext cx="1645920" cy="713232"/>
+          <p:cNvPr id="6" name="Note"/>
+          <p:cNvSpPr txBox="1"/>
+          <p:nvPr/>
+        </p:nvSpPr>
+        <p:spPr>
+          <a:xfrm>
+            <a:off x="717144" y="5577840"/>
+            <a:ext cx="4276800" cy="457200"/>
+          </a:xfrm>
+          <a:prstGeom prst="rect">
+            <a:avLst/>
+          </a:prstGeom>
+          <a:noFill/>
+          <a:ln/>
+        </p:spPr>
+        <p:txBody>
+          <a:bodyPr wrap="square" lIns="0" tIns="0" rIns="0" bIns="0" rtlCol="0" anchor="t"/>
+          <a:lstStyle/>
+          <a:p>
+            <a:pPr algn="l" indent="0" marL="0">
+              <a:buNone/>
+            </a:pPr>
+            <a:r>
+              <a:rPr lang="en-US" sz="1200" dirty="0">
+                <a:solidFill>
+                  <a:schemeClr val="tx1"/>
+                </a:solidFill>
+              </a:rPr>
+              <a:t>“The TrendCart order” could be any of six, so it asks.</a:t>
+            </a:r>
+            <a:endParaRPr lang="en-US" sz="1200" dirty="0"/>
+          </a:p>
+        </p:txBody>
+      </p:sp>
+      <p:sp>
+        <p:nvSpPr>
+          <p:cNvPr id="7" name="Label"/>
+          <p:cNvSpPr txBox="1"/>
+          <p:nvPr/>
+        </p:nvSpPr>
+        <p:spPr>
+          <a:xfrm>
+            <a:off x="5359704" y="1234440"/>
+            <a:ext cx="2799761" cy="411480"/>
           </a:xfrm>
           <a:prstGeom prst="rect">
             <a:avLst/>
@@ -3838,139 +3227,54 @@
               <a:buNone/>
             </a:pPr>
             <a:r>
-              <a:rPr lang="en-US" sz="1800" b="1" dirty="0">
+              <a:rPr lang="en-US" sz="1700" b="1" dirty="0">
                 <a:solidFill>
                   <a:schemeClr val="tx2"/>
                 </a:solidFill>
               </a:rPr>
-              <a:t>Retrieval</a:t>
-            </a:r>
-            <a:endParaRPr lang="en-US" sz="1800" dirty="0"/>
-          </a:p>
-        </p:txBody>
-      </p:sp>
-      <p:sp>
-        <p:nvSpPr>
-          <p:cNvPr id="10" name="Text 7"/>
-          <p:cNvSpPr txBox="1"/>
-          <p:nvPr/>
-        </p:nvSpPr>
-        <p:spPr>
-          <a:xfrm>
-            <a:off x="3017520" y="1645920"/>
-            <a:ext cx="5212080" cy="713232"/>
-          </a:xfrm>
-          <a:prstGeom prst="rect">
-            <a:avLst/>
-          </a:prstGeom>
-          <a:noFill/>
-          <a:ln/>
-        </p:spPr>
-        <p:txBody>
-          <a:bodyPr wrap="square" lIns="0" tIns="0" rIns="0" bIns="0" rtlCol="0" anchor="ctr"/>
-          <a:lstStyle/>
-          <a:p>
-            <a:pPr algn="l" indent="0" marL="0">
-              <a:buNone/>
-            </a:pPr>
-            <a:r>
-              <a:rPr lang="en-US" sz="1400" dirty="0">
-                <a:solidFill>
-                  <a:schemeClr val="tx1"/>
-                </a:solidFill>
-              </a:rPr>
-              <a:t>Typed order look-ups, plus a read-only SQL agent (SELECT only) for everything else</a:t>
-            </a:r>
-            <a:endParaRPr lang="en-US" sz="1400" dirty="0"/>
-          </a:p>
-        </p:txBody>
-      </p:sp>
-      <p:sp>
-        <p:nvSpPr>
-          <p:cNvPr id="11" name="Text 8"/>
-          <p:cNvSpPr txBox="1"/>
-          <p:nvPr/>
-        </p:nvSpPr>
-        <p:spPr>
-          <a:xfrm>
-            <a:off x="8412480" y="1645920"/>
-            <a:ext cx="3108960" cy="713232"/>
-          </a:xfrm>
-          <a:prstGeom prst="rect">
-            <a:avLst/>
-          </a:prstGeom>
-          <a:noFill/>
-          <a:ln/>
-        </p:spPr>
-        <p:txBody>
-          <a:bodyPr wrap="square" lIns="0" tIns="0" rIns="0" bIns="0" rtlCol="0" anchor="ctr"/>
-          <a:lstStyle/>
-          <a:p>
-            <a:pPr algn="l" indent="0" marL="0">
-              <a:buNone/>
-            </a:pPr>
-            <a:r>
-              <a:rPr lang="en-US" sz="1400" dirty="0">
-                <a:solidFill>
-                  <a:schemeClr val="tx1"/>
-                </a:solidFill>
-              </a:rPr>
-              <a:t>Pick the first match when several fit</a:t>
-            </a:r>
-            <a:endParaRPr lang="en-US" sz="1400" dirty="0"/>
-          </a:p>
-        </p:txBody>
-      </p:sp>
-      <p:sp>
-        <p:nvSpPr>
-          <p:cNvPr id="12" name="Row Judgement"/>
+              <a:t>A follow-up: it remembers</a:t>
+            </a:r>
+            <a:endParaRPr lang="en-US" sz="1700" dirty="0"/>
+          </a:p>
+        </p:txBody>
+      </p:sp>
+      <p:sp>
+        <p:nvSpPr>
+          <p:cNvPr id="8" name="Chat screenshot 2 frame"/>
           <p:cNvSpPr/>
           <p:nvPr/>
         </p:nvSpPr>
         <p:spPr>
           <a:xfrm>
-            <a:off x="548640" y="2432304"/>
-            <a:ext cx="11091672" cy="713232"/>
+            <a:off x="5313984" y="1691640"/>
+            <a:ext cx="2891201" cy="3794760"/>
           </a:xfrm>
           <a:prstGeom prst="roundRect">
             <a:avLst>
-              <a:gd name="adj" fmla="val 10256"/>
+              <a:gd name="adj" fmla="val 1898"/>
             </a:avLst>
           </a:prstGeom>
           <a:solidFill>
-            <a:schemeClr val="bg2"/>
+            <a:schemeClr val="bg1"/>
           </a:solidFill>
-          <a:ln/>
-        </p:spPr>
-      </p:sp>
-      <p:sp>
-        <p:nvSpPr>
-          <p:cNvPr id="13" name="Icon disc Judgement"/>
-          <p:cNvSpPr/>
-          <p:nvPr/>
-        </p:nvSpPr>
-        <p:spPr>
-          <a:xfrm>
-            <a:off x="713232" y="2560320"/>
-            <a:ext cx="457200" cy="457200"/>
-          </a:xfrm>
-          <a:prstGeom prst="ellipse">
-            <a:avLst/>
-          </a:prstGeom>
-          <a:solidFill>
-            <a:schemeClr val="accent1"/>
-          </a:solidFill>
-          <a:ln w="6350">
+          <a:ln w="12700">
             <a:solidFill>
-              <a:schemeClr val="accent1"/>
+              <a:schemeClr val="bg2"/>
             </a:solidFill>
             <a:prstDash val="solid"/>
           </a:ln>
+          <a:effectLst>
+            <a:outerShdw sx="100000" sy="100000" kx="0" ky="0" algn="bl" rotWithShape="0" blurRad="101600" dist="25400" dir="5400000">
+              <a:srgbClr val="000000">
+                <a:alpha val="16000"/>
+              </a:srgbClr>
+            </a:outerShdw>
+          </a:effectLst>
         </p:spPr>
       </p:sp>
       <p:pic>
         <p:nvPicPr>
-          <p:cNvPr id="14" name="Image 1" descr="Judgement icon">    </p:cNvPr>
+          <p:cNvPr id="9" name="Chat screenshot 2" descr="Chat: three short follow-up questions about ORD-120, each answered about that order">    </p:cNvPr>
           <p:cNvPicPr>
             <a:picLocks noChangeAspect="1"/>
           </p:cNvPicPr>
@@ -3984,8 +3288,8 @@
         </p:blipFill>
         <p:spPr>
           <a:xfrm>
-            <a:off x="822960" y="2670048"/>
-            <a:ext cx="237744" cy="237744"/>
+            <a:off x="5359704" y="1737360"/>
+            <a:ext cx="2799761" cy="3703320"/>
           </a:xfrm>
           <a:prstGeom prst="rect">
             <a:avLst/>
@@ -3994,14 +3298,50 @@
       </p:pic>
       <p:sp>
         <p:nvSpPr>
-          <p:cNvPr id="15" name="Text 11"/>
-          <p:cNvSpPr txBox="1"/>
-          <p:nvPr/>
-        </p:nvSpPr>
-        <p:spPr>
-          <a:xfrm>
-            <a:off x="1280160" y="2432304"/>
-            <a:ext cx="1645920" cy="713232"/>
+          <p:cNvPr id="10" name="Note"/>
+          <p:cNvSpPr txBox="1"/>
+          <p:nvPr/>
+        </p:nvSpPr>
+        <p:spPr>
+          <a:xfrm>
+            <a:off x="5359704" y="5577840"/>
+            <a:ext cx="2799761" cy="457200"/>
+          </a:xfrm>
+          <a:prstGeom prst="rect">
+            <a:avLst/>
+          </a:prstGeom>
+          <a:noFill/>
+          <a:ln/>
+        </p:spPr>
+        <p:txBody>
+          <a:bodyPr wrap="square" lIns="0" tIns="0" rIns="0" bIns="0" rtlCol="0" anchor="t"/>
+          <a:lstStyle/>
+          <a:p>
+            <a:pPr algn="l" indent="0" marL="0">
+              <a:buNone/>
+            </a:pPr>
+            <a:r>
+              <a:rPr lang="en-US" sz="1200" dirty="0">
+                <a:solidFill>
+                  <a:schemeClr val="tx1"/>
+                </a:solidFill>
+              </a:rPr>
+              <a:t>“Who is the customer?” needs no order number.</a:t>
+            </a:r>
+            <a:endParaRPr lang="en-US" sz="1200" dirty="0"/>
+          </a:p>
+        </p:txBody>
+      </p:sp>
+      <p:sp>
+        <p:nvSpPr>
+          <p:cNvPr id="11" name="Label"/>
+          <p:cNvSpPr txBox="1"/>
+          <p:nvPr/>
+        </p:nvSpPr>
+        <p:spPr>
+          <a:xfrm>
+            <a:off x="8525225" y="1234440"/>
+            <a:ext cx="2946584" cy="411480"/>
           </a:xfrm>
           <a:prstGeom prst="rect">
             <a:avLst/>
@@ -4017,139 +3357,54 @@
               <a:buNone/>
             </a:pPr>
             <a:r>
-              <a:rPr lang="en-US" sz="1800" b="1" dirty="0">
+              <a:rPr lang="en-US" sz="1700" b="1" dirty="0">
                 <a:solidFill>
                   <a:schemeClr val="tx2"/>
                 </a:solidFill>
               </a:rPr>
-              <a:t>Judgement</a:t>
-            </a:r>
-            <a:endParaRPr lang="en-US" sz="1800" dirty="0"/>
-          </a:p>
-        </p:txBody>
-      </p:sp>
-      <p:sp>
-        <p:nvSpPr>
-          <p:cNvPr id="16" name="Text 12"/>
-          <p:cNvSpPr txBox="1"/>
-          <p:nvPr/>
-        </p:nvSpPr>
-        <p:spPr>
-          <a:xfrm>
-            <a:off x="3017520" y="2432304"/>
-            <a:ext cx="5212080" cy="713232"/>
-          </a:xfrm>
-          <a:prstGeom prst="rect">
-            <a:avLst/>
-          </a:prstGeom>
-          <a:noFill/>
-          <a:ln/>
-        </p:spPr>
-        <p:txBody>
-          <a:bodyPr wrap="square" lIns="0" tIns="0" rIns="0" bIns="0" rtlCol="0" anchor="ctr"/>
-          <a:lstStyle/>
-          <a:p>
-            <a:pPr algn="l" indent="0" marL="0">
-              <a:buNone/>
-            </a:pPr>
-            <a:r>
-              <a:rPr lang="en-US" sz="1400" dirty="0">
-                <a:solidFill>
-                  <a:schemeClr val="tx1"/>
-                </a:solidFill>
-              </a:rPr>
-              <a:t>“Normal” = mean of the previous 8 same weekdays ± the larger of 1.5 SD or 5%; Sundays closed</a:t>
-            </a:r>
-            <a:endParaRPr lang="en-US" sz="1400" dirty="0"/>
-          </a:p>
-        </p:txBody>
-      </p:sp>
-      <p:sp>
-        <p:nvSpPr>
-          <p:cNvPr id="17" name="Text 13"/>
-          <p:cNvSpPr txBox="1"/>
-          <p:nvPr/>
-        </p:nvSpPr>
-        <p:spPr>
-          <a:xfrm>
-            <a:off x="8412480" y="2432304"/>
-            <a:ext cx="3108960" cy="713232"/>
-          </a:xfrm>
-          <a:prstGeom prst="rect">
-            <a:avLst/>
-          </a:prstGeom>
-          <a:noFill/>
-          <a:ln/>
-        </p:spPr>
-        <p:txBody>
-          <a:bodyPr wrap="square" lIns="0" tIns="0" rIns="0" bIns="0" rtlCol="0" anchor="ctr"/>
-          <a:lstStyle/>
-          <a:p>
-            <a:pPr algn="l" indent="0" marL="0">
-              <a:buNone/>
-            </a:pPr>
-            <a:r>
-              <a:rPr lang="en-US" sz="1400" dirty="0">
-                <a:solidFill>
-                  <a:schemeClr val="tx1"/>
-                </a:solidFill>
-              </a:rPr>
-              <a:t>Treat one low day as proof of a fault</a:t>
-            </a:r>
-            <a:endParaRPr lang="en-US" sz="1400" dirty="0"/>
-          </a:p>
-        </p:txBody>
-      </p:sp>
-      <p:sp>
-        <p:nvSpPr>
-          <p:cNvPr id="18" name="Row Tracing"/>
+              <a:t>No data: it says so</a:t>
+            </a:r>
+            <a:endParaRPr lang="en-US" sz="1700" dirty="0"/>
+          </a:p>
+        </p:txBody>
+      </p:sp>
+      <p:sp>
+        <p:nvSpPr>
+          <p:cNvPr id="12" name="Chat screenshot 3 frame"/>
           <p:cNvSpPr/>
           <p:nvPr/>
         </p:nvSpPr>
         <p:spPr>
           <a:xfrm>
-            <a:off x="548640" y="3218688"/>
-            <a:ext cx="11091672" cy="713232"/>
+            <a:off x="8479505" y="1691640"/>
+            <a:ext cx="3038024" cy="3794760"/>
           </a:xfrm>
           <a:prstGeom prst="roundRect">
             <a:avLst>
-              <a:gd name="adj" fmla="val 10256"/>
+              <a:gd name="adj" fmla="val 1806"/>
             </a:avLst>
           </a:prstGeom>
           <a:solidFill>
-            <a:schemeClr val="bg2"/>
+            <a:schemeClr val="bg1"/>
           </a:solidFill>
-          <a:ln/>
-        </p:spPr>
-      </p:sp>
-      <p:sp>
-        <p:nvSpPr>
-          <p:cNvPr id="19" name="Icon disc Tracing"/>
-          <p:cNvSpPr/>
-          <p:nvPr/>
-        </p:nvSpPr>
-        <p:spPr>
-          <a:xfrm>
-            <a:off x="713232" y="3346704"/>
-            <a:ext cx="457200" cy="457200"/>
-          </a:xfrm>
-          <a:prstGeom prst="ellipse">
-            <a:avLst/>
-          </a:prstGeom>
-          <a:solidFill>
-            <a:schemeClr val="accent1"/>
-          </a:solidFill>
-          <a:ln w="6350">
+          <a:ln w="12700">
             <a:solidFill>
-              <a:schemeClr val="accent1"/>
+              <a:schemeClr val="bg2"/>
             </a:solidFill>
             <a:prstDash val="solid"/>
           </a:ln>
+          <a:effectLst>
+            <a:outerShdw sx="100000" sy="100000" kx="0" ky="0" algn="bl" rotWithShape="0" blurRad="101600" dist="25400" dir="5400000">
+              <a:srgbClr val="000000">
+                <a:alpha val="16000"/>
+              </a:srgbClr>
+            </a:outerShdw>
+          </a:effectLst>
         </p:spPr>
       </p:sp>
       <p:pic>
         <p:nvPicPr>
-          <p:cNvPr id="20" name="Image 2" descr="Tracing icon">    </p:cNvPr>
+          <p:cNvPr id="13" name="Chat screenshot 3" descr="Chat: a refusal for revenue, and the size of the washing drop with a note that the log holds no causes">    </p:cNvPr>
           <p:cNvPicPr>
             <a:picLocks noChangeAspect="1"/>
           </p:cNvPicPr>
@@ -4163,8 +3418,8 @@
         </p:blipFill>
         <p:spPr>
           <a:xfrm>
-            <a:off x="822960" y="3456432"/>
-            <a:ext cx="237744" cy="237744"/>
+            <a:off x="8525225" y="1737360"/>
+            <a:ext cx="2946584" cy="3703320"/>
           </a:xfrm>
           <a:prstGeom prst="rect">
             <a:avLst/>
@@ -4173,14 +3428,50 @@
       </p:pic>
       <p:sp>
         <p:nvSpPr>
-          <p:cNvPr id="21" name="Text 16"/>
-          <p:cNvSpPr txBox="1"/>
-          <p:nvPr/>
-        </p:nvSpPr>
-        <p:spPr>
-          <a:xfrm>
-            <a:off x="1280160" y="3218688"/>
-            <a:ext cx="1645920" cy="713232"/>
+          <p:cNvPr id="14" name="Note"/>
+          <p:cNvSpPr txBox="1"/>
+          <p:nvPr/>
+        </p:nvSpPr>
+        <p:spPr>
+          <a:xfrm>
+            <a:off x="8525225" y="5577840"/>
+            <a:ext cx="2946584" cy="457200"/>
+          </a:xfrm>
+          <a:prstGeom prst="rect">
+            <a:avLst/>
+          </a:prstGeom>
+          <a:noFill/>
+          <a:ln/>
+        </p:spPr>
+        <p:txBody>
+          <a:bodyPr wrap="square" lIns="0" tIns="0" rIns="0" bIns="0" rtlCol="0" anchor="t"/>
+          <a:lstStyle/>
+          <a:p>
+            <a:pPr algn="l" indent="0" marL="0">
+              <a:buNone/>
+            </a:pPr>
+            <a:r>
+              <a:rPr lang="en-US" sz="1200" dirty="0">
+                <a:solidFill>
+                  <a:schemeClr val="tx1"/>
+                </a:solidFill>
+              </a:rPr>
+              <a:t>Revenue: refused. Washing drop: the size, no invented cause.</a:t>
+            </a:r>
+            <a:endParaRPr lang="en-US" sz="1200" dirty="0"/>
+          </a:p>
+        </p:txBody>
+      </p:sp>
+      <p:sp>
+        <p:nvSpPr>
+          <p:cNvPr id="15" name="Found by recording"/>
+          <p:cNvSpPr txBox="1"/>
+          <p:nvPr/>
+        </p:nvSpPr>
+        <p:spPr>
+          <a:xfrm>
+            <a:off x="548640" y="6053328"/>
+            <a:ext cx="11091672" cy="274320"/>
           </a:xfrm>
           <a:prstGeom prst="rect">
             <a:avLst/>
@@ -4196,524 +3487,25 @@
               <a:buNone/>
             </a:pPr>
             <a:r>
-              <a:rPr lang="en-US" sz="1800" b="1" dirty="0">
-                <a:solidFill>
-                  <a:schemeClr val="tx2"/>
-                </a:solidFill>
-              </a:rPr>
-              <a:t>Tracing</a:t>
-            </a:r>
-            <a:endParaRPr lang="en-US" sz="1800" dirty="0"/>
-          </a:p>
-        </p:txBody>
-      </p:sp>
-      <p:sp>
-        <p:nvSpPr>
-          <p:cNvPr id="22" name="Text 17"/>
-          <p:cNvSpPr txBox="1"/>
-          <p:nvPr/>
-        </p:nvSpPr>
-        <p:spPr>
-          <a:xfrm>
-            <a:off x="3017520" y="3218688"/>
-            <a:ext cx="5212080" cy="713232"/>
-          </a:xfrm>
-          <a:prstGeom prst="rect">
-            <a:avLst/>
-          </a:prstGeom>
-          <a:noFill/>
-          <a:ln/>
-        </p:spPr>
-        <p:txBody>
-          <a:bodyPr wrap="square" lIns="0" tIns="0" rIns="0" bIns="0" rtlCol="0" anchor="ctr"/>
-          <a:lstStyle/>
-          <a:p>
-            <a:pPr algn="l" indent="0" marL="0">
-              <a:buNone/>
-            </a:pPr>
-            <a:r>
-              <a:rPr lang="en-US" sz="1400" dirty="0">
+              <a:rPr lang="en-US" sz="1200" b="1" dirty="0">
+                <a:solidFill>
+                  <a:schemeClr val="accent2"/>
+                </a:solidFill>
+              </a:rPr>
+              <a:t>Found by recording: </a:t>
+            </a:r>
+            <a:pPr algn="l" indent="0" marL="0">
+              <a:buNone/>
+            </a:pPr>
+            <a:r>
+              <a:rPr lang="en-US" sz="1200" dirty="0">
                 <a:solidFill>
                   <a:schemeClr val="tx1"/>
                 </a:solidFill>
               </a:rPr>
-              <a:t>Every number links to the source file and row behind it</a:t>
-            </a:r>
-            <a:endParaRPr lang="en-US" sz="1400" dirty="0"/>
-          </a:p>
-        </p:txBody>
-      </p:sp>
-      <p:sp>
-        <p:nvSpPr>
-          <p:cNvPr id="23" name="Text 18"/>
-          <p:cNvSpPr txBox="1"/>
-          <p:nvPr/>
-        </p:nvSpPr>
-        <p:spPr>
-          <a:xfrm>
-            <a:off x="8412480" y="3218688"/>
-            <a:ext cx="3108960" cy="713232"/>
-          </a:xfrm>
-          <a:prstGeom prst="rect">
-            <a:avLst/>
-          </a:prstGeom>
-          <a:noFill/>
-          <a:ln/>
-        </p:spPr>
-        <p:txBody>
-          <a:bodyPr wrap="square" lIns="0" tIns="0" rIns="0" bIns="0" rtlCol="0" anchor="ctr"/>
-          <a:lstStyle/>
-          <a:p>
-            <a:pPr algn="l" indent="0" marL="0">
-              <a:buNone/>
-            </a:pPr>
-            <a:r>
-              <a:rPr lang="en-US" sz="1400" dirty="0">
-                <a:solidFill>
-                  <a:schemeClr val="tx1"/>
-                </a:solidFill>
-              </a:rPr>
-              <a:t>Explain causes the data does not hold</a:t>
-            </a:r>
-            <a:endParaRPr lang="en-US" sz="1400" dirty="0"/>
-          </a:p>
-        </p:txBody>
-      </p:sp>
-      <p:sp>
-        <p:nvSpPr>
-          <p:cNvPr id="24" name="Row Discovery"/>
-          <p:cNvSpPr/>
-          <p:nvPr/>
-        </p:nvSpPr>
-        <p:spPr>
-          <a:xfrm>
-            <a:off x="548640" y="4005072"/>
-            <a:ext cx="11091672" cy="713232"/>
-          </a:xfrm>
-          <a:prstGeom prst="roundRect">
-            <a:avLst>
-              <a:gd name="adj" fmla="val 10256"/>
-            </a:avLst>
-          </a:prstGeom>
-          <a:solidFill>
-            <a:schemeClr val="bg2"/>
-          </a:solidFill>
-          <a:ln/>
-        </p:spPr>
-      </p:sp>
-      <p:sp>
-        <p:nvSpPr>
-          <p:cNvPr id="25" name="Icon disc Discovery"/>
-          <p:cNvSpPr/>
-          <p:nvPr/>
-        </p:nvSpPr>
-        <p:spPr>
-          <a:xfrm>
-            <a:off x="713232" y="4133088"/>
-            <a:ext cx="457200" cy="457200"/>
-          </a:xfrm>
-          <a:prstGeom prst="ellipse">
-            <a:avLst/>
-          </a:prstGeom>
-          <a:solidFill>
-            <a:schemeClr val="accent1"/>
-          </a:solidFill>
-          <a:ln w="6350">
-            <a:solidFill>
-              <a:schemeClr val="accent1"/>
-            </a:solidFill>
-            <a:prstDash val="solid"/>
-          </a:ln>
-        </p:spPr>
-      </p:sp>
-      <p:pic>
-        <p:nvPicPr>
-          <p:cNvPr id="26" name="Image 3" descr="Discovery icon">    </p:cNvPr>
-          <p:cNvPicPr>
-            <a:picLocks noChangeAspect="1"/>
-          </p:cNvPicPr>
-          <p:nvPr/>
-        </p:nvPicPr>
-        <p:blipFill>
-          <a:blip r:embed="rId4"/>
-          <a:stretch>
-            <a:fillRect/>
-          </a:stretch>
-        </p:blipFill>
-        <p:spPr>
-          <a:xfrm>
-            <a:off x="822960" y="4242816"/>
-            <a:ext cx="237744" cy="237744"/>
-          </a:xfrm>
-          <a:prstGeom prst="rect">
-            <a:avLst/>
-          </a:prstGeom>
-        </p:spPr>
-      </p:pic>
-      <p:sp>
-        <p:nvSpPr>
-          <p:cNvPr id="27" name="Text 21"/>
-          <p:cNvSpPr txBox="1"/>
-          <p:nvPr/>
-        </p:nvSpPr>
-        <p:spPr>
-          <a:xfrm>
-            <a:off x="1280160" y="4005072"/>
-            <a:ext cx="1645920" cy="713232"/>
-          </a:xfrm>
-          <a:prstGeom prst="rect">
-            <a:avLst/>
-          </a:prstGeom>
-          <a:noFill/>
-          <a:ln/>
-        </p:spPr>
-        <p:txBody>
-          <a:bodyPr wrap="square" lIns="0" tIns="0" rIns="0" bIns="0" rtlCol="0" anchor="ctr"/>
-          <a:lstStyle/>
-          <a:p>
-            <a:pPr algn="l" indent="0" marL="0">
-              <a:buNone/>
-            </a:pPr>
-            <a:r>
-              <a:rPr lang="en-US" sz="1800" b="1" dirty="0">
-                <a:solidFill>
-                  <a:schemeClr val="tx2"/>
-                </a:solidFill>
-              </a:rPr>
-              <a:t>Discovery</a:t>
-            </a:r>
-            <a:endParaRPr lang="en-US" sz="1800" dirty="0"/>
-          </a:p>
-        </p:txBody>
-      </p:sp>
-      <p:sp>
-        <p:nvSpPr>
-          <p:cNvPr id="28" name="Text 22"/>
-          <p:cNvSpPr txBox="1"/>
-          <p:nvPr/>
-        </p:nvSpPr>
-        <p:spPr>
-          <a:xfrm>
-            <a:off x="3017520" y="4005072"/>
-            <a:ext cx="5212080" cy="713232"/>
-          </a:xfrm>
-          <a:prstGeom prst="rect">
-            <a:avLst/>
-          </a:prstGeom>
-          <a:noFill/>
-          <a:ln/>
-        </p:spPr>
-        <p:txBody>
-          <a:bodyPr wrap="square" lIns="0" tIns="0" rIns="0" bIns="0" rtlCol="0" anchor="ctr"/>
-          <a:lstStyle/>
-          <a:p>
-            <a:pPr algn="l" indent="0" marL="0">
-              <a:buNone/>
-            </a:pPr>
-            <a:r>
-              <a:rPr lang="en-US" sz="1400" dirty="0">
-                <a:solidFill>
-                  <a:schemeClr val="tx1"/>
-                </a:solidFill>
-              </a:rPr>
-              <a:t>Ranks stalled customers, quiet orders and stages below normal; the top five make the page</a:t>
-            </a:r>
-            <a:endParaRPr lang="en-US" sz="1400" dirty="0"/>
-          </a:p>
-        </p:txBody>
-      </p:sp>
-      <p:sp>
-        <p:nvSpPr>
-          <p:cNvPr id="29" name="Text 23"/>
-          <p:cNvSpPr txBox="1"/>
-          <p:nvPr/>
-        </p:nvSpPr>
-        <p:spPr>
-          <a:xfrm>
-            <a:off x="8412480" y="4005072"/>
-            <a:ext cx="3108960" cy="713232"/>
-          </a:xfrm>
-          <a:prstGeom prst="rect">
-            <a:avLst/>
-          </a:prstGeom>
-          <a:noFill/>
-          <a:ln/>
-        </p:spPr>
-        <p:txBody>
-          <a:bodyPr wrap="square" lIns="0" tIns="0" rIns="0" bIns="0" rtlCol="0" anchor="ctr"/>
-          <a:lstStyle/>
-          <a:p>
-            <a:pPr algn="l" indent="0" marL="0">
-              <a:buNone/>
-            </a:pPr>
-            <a:r>
-              <a:rPr lang="en-US" sz="1400" dirty="0">
-                <a:solidFill>
-                  <a:schemeClr val="tx1"/>
-                </a:solidFill>
-              </a:rPr>
-              <a:t>List every finding</a:t>
-            </a:r>
-            <a:endParaRPr lang="en-US" sz="1400" dirty="0"/>
-          </a:p>
-        </p:txBody>
-      </p:sp>
-      <p:sp>
-        <p:nvSpPr>
-          <p:cNvPr id="30" name="Row Action"/>
-          <p:cNvSpPr/>
-          <p:nvPr/>
-        </p:nvSpPr>
-        <p:spPr>
-          <a:xfrm>
-            <a:off x="548640" y="4791456"/>
-            <a:ext cx="11091672" cy="713232"/>
-          </a:xfrm>
-          <a:prstGeom prst="roundRect">
-            <a:avLst>
-              <a:gd name="adj" fmla="val 10256"/>
-            </a:avLst>
-          </a:prstGeom>
-          <a:solidFill>
-            <a:schemeClr val="bg2"/>
-          </a:solidFill>
-          <a:ln/>
-        </p:spPr>
-      </p:sp>
-      <p:sp>
-        <p:nvSpPr>
-          <p:cNvPr id="31" name="Icon disc Action"/>
-          <p:cNvSpPr/>
-          <p:nvPr/>
-        </p:nvSpPr>
-        <p:spPr>
-          <a:xfrm>
-            <a:off x="713232" y="4919472"/>
-            <a:ext cx="457200" cy="457200"/>
-          </a:xfrm>
-          <a:prstGeom prst="ellipse">
-            <a:avLst/>
-          </a:prstGeom>
-          <a:solidFill>
-            <a:schemeClr val="accent1"/>
-          </a:solidFill>
-          <a:ln w="6350">
-            <a:solidFill>
-              <a:schemeClr val="accent1"/>
-            </a:solidFill>
-            <a:prstDash val="solid"/>
-          </a:ln>
-        </p:spPr>
-      </p:sp>
-      <p:pic>
-        <p:nvPicPr>
-          <p:cNvPr id="32" name="Image 4" descr="Action icon">    </p:cNvPr>
-          <p:cNvPicPr>
-            <a:picLocks noChangeAspect="1"/>
-          </p:cNvPicPr>
-          <p:nvPr/>
-        </p:nvPicPr>
-        <p:blipFill>
-          <a:blip r:embed="rId5"/>
-          <a:stretch>
-            <a:fillRect/>
-          </a:stretch>
-        </p:blipFill>
-        <p:spPr>
-          <a:xfrm>
-            <a:off x="822960" y="5029200"/>
-            <a:ext cx="237744" cy="237744"/>
-          </a:xfrm>
-          <a:prstGeom prst="rect">
-            <a:avLst/>
-          </a:prstGeom>
-        </p:spPr>
-      </p:pic>
-      <p:sp>
-        <p:nvSpPr>
-          <p:cNvPr id="33" name="Text 26"/>
-          <p:cNvSpPr txBox="1"/>
-          <p:nvPr/>
-        </p:nvSpPr>
-        <p:spPr>
-          <a:xfrm>
-            <a:off x="1280160" y="4791456"/>
-            <a:ext cx="1645920" cy="713232"/>
-          </a:xfrm>
-          <a:prstGeom prst="rect">
-            <a:avLst/>
-          </a:prstGeom>
-          <a:noFill/>
-          <a:ln/>
-        </p:spPr>
-        <p:txBody>
-          <a:bodyPr wrap="square" lIns="0" tIns="0" rIns="0" bIns="0" rtlCol="0" anchor="ctr"/>
-          <a:lstStyle/>
-          <a:p>
-            <a:pPr algn="l" indent="0" marL="0">
-              <a:buNone/>
-            </a:pPr>
-            <a:r>
-              <a:rPr lang="en-US" sz="1800" b="1" dirty="0">
-                <a:solidFill>
-                  <a:schemeClr val="tx2"/>
-                </a:solidFill>
-              </a:rPr>
-              <a:t>Action</a:t>
-            </a:r>
-            <a:endParaRPr lang="en-US" sz="1800" dirty="0"/>
-          </a:p>
-        </p:txBody>
-      </p:sp>
-      <p:sp>
-        <p:nvSpPr>
-          <p:cNvPr id="34" name="Text 27"/>
-          <p:cNvSpPr txBox="1"/>
-          <p:nvPr/>
-        </p:nvSpPr>
-        <p:spPr>
-          <a:xfrm>
-            <a:off x="3017520" y="4791456"/>
-            <a:ext cx="5212080" cy="713232"/>
-          </a:xfrm>
-          <a:prstGeom prst="rect">
-            <a:avLst/>
-          </a:prstGeom>
-          <a:noFill/>
-          <a:ln/>
-        </p:spPr>
-        <p:txBody>
-          <a:bodyPr wrap="square" lIns="0" tIns="0" rIns="0" bIns="0" rtlCol="0" anchor="ctr"/>
-          <a:lstStyle/>
-          <a:p>
-            <a:pPr algn="l" indent="0" marL="0">
-              <a:buNone/>
-            </a:pPr>
-            <a:r>
-              <a:rPr lang="en-US" sz="1400" dirty="0">
-                <a:solidFill>
-                  <a:schemeClr val="tx1"/>
-                </a:solidFill>
-              </a:rPr>
-              <a:t>Preview, then a 15-minute confirmation key; every executed action is logged</a:t>
-            </a:r>
-            <a:endParaRPr lang="en-US" sz="1400" dirty="0"/>
-          </a:p>
-        </p:txBody>
-      </p:sp>
-      <p:sp>
-        <p:nvSpPr>
-          <p:cNvPr id="35" name="Text 28"/>
-          <p:cNvSpPr txBox="1"/>
-          <p:nvPr/>
-        </p:nvSpPr>
-        <p:spPr>
-          <a:xfrm>
-            <a:off x="8412480" y="4791456"/>
-            <a:ext cx="3108960" cy="713232"/>
-          </a:xfrm>
-          <a:prstGeom prst="rect">
-            <a:avLst/>
-          </a:prstGeom>
-          <a:noFill/>
-          <a:ln/>
-        </p:spPr>
-        <p:txBody>
-          <a:bodyPr wrap="square" lIns="0" tIns="0" rIns="0" bIns="0" rtlCol="0" anchor="ctr"/>
-          <a:lstStyle/>
-          <a:p>
-            <a:pPr algn="l" indent="0" marL="0">
-              <a:buNone/>
-            </a:pPr>
-            <a:r>
-              <a:rPr lang="en-US" sz="1400" dirty="0">
-                <a:solidFill>
-                  <a:schemeClr val="tx1"/>
-                </a:solidFill>
-              </a:rPr>
-              <a:t>Send without a matching, unexpired key</a:t>
-            </a:r>
-            <a:endParaRPr lang="en-US" sz="1400" dirty="0"/>
-          </a:p>
-        </p:txBody>
-      </p:sp>
-      <p:sp>
-        <p:nvSpPr>
-          <p:cNvPr id="36" name="Banner"/>
-          <p:cNvSpPr/>
-          <p:nvPr/>
-        </p:nvSpPr>
-        <p:spPr>
-          <a:xfrm>
-            <a:off x="548640" y="5669280"/>
-            <a:ext cx="11091672" cy="566928"/>
-          </a:xfrm>
-          <a:prstGeom prst="roundRect">
-            <a:avLst>
-              <a:gd name="adj" fmla="val 12903"/>
-            </a:avLst>
-          </a:prstGeom>
-          <a:solidFill>
-            <a:schemeClr val="tx2"/>
-          </a:solidFill>
-          <a:ln/>
-        </p:spPr>
-      </p:sp>
-      <p:sp>
-        <p:nvSpPr>
-          <p:cNvPr id="37" name="Text 30"/>
-          <p:cNvSpPr txBox="1"/>
-          <p:nvPr/>
-        </p:nvSpPr>
-        <p:spPr>
-          <a:xfrm>
-            <a:off x="777240" y="5669280"/>
-            <a:ext cx="10698480" cy="566928"/>
-          </a:xfrm>
-          <a:prstGeom prst="rect">
-            <a:avLst/>
-          </a:prstGeom>
-          <a:noFill/>
-          <a:ln/>
-        </p:spPr>
-        <p:txBody>
-          <a:bodyPr wrap="square" lIns="0" tIns="0" rIns="0" bIns="0" rtlCol="0" anchor="ctr"/>
-          <a:lstStyle/>
-          <a:p>
-            <a:pPr algn="l" indent="0" marL="0">
-              <a:buNone/>
-            </a:pPr>
-            <a:r>
-              <a:rPr lang="en-US" sz="1400" b="1" dirty="0">
-                <a:solidFill>
-                  <a:schemeClr val="accent3"/>
-                </a:solidFill>
-              </a:rPr>
-              <a:t>33 tools</a:t>
-            </a:r>
-            <a:pPr algn="l" indent="0" marL="0">
-              <a:buNone/>
-            </a:pPr>
-            <a:r>
-              <a:rPr lang="en-US" sz="1400" dirty="0">
-                <a:solidFill>
-                  <a:schemeClr val="bg1"/>
-                </a:solidFill>
-              </a:rPr>
-              <a:t> specified in one table: input, output, purpose, non-goals, failure mode.   </a:t>
-            </a:r>
-            <a:pPr algn="l" indent="0" marL="0">
-              <a:buNone/>
-            </a:pPr>
-            <a:r>
-              <a:rPr lang="en-US" sz="1400" b="1" dirty="0">
-                <a:solidFill>
-                  <a:schemeClr val="bg1"/>
-                </a:solidFill>
-              </a:rPr>
-              <a:t>The language model never does the arithmetic.</a:t>
-            </a:r>
-            <a:endParaRPr lang="en-US" sz="1400" dirty="0"/>
+              <a:t>turning nine scenarios into scripts exposed six follow-ups that lost the thread. They are fixed, and a test re-records the scenarios on every run.</a:t>
+            </a:r>
+            <a:endParaRPr lang="en-US" sz="1200" dirty="0"/>
           </a:p>
         </p:txBody>
       </p:sp>
@@ -4814,20 +3606,175 @@
               <a:buNone/>
             </a:pPr>
             <a:r>
-              <a:rPr lang="en-US" sz="3400" b="1" dirty="0">
+              <a:rPr lang="en-US" sz="3200" b="1" dirty="0">
                 <a:solidFill>
                   <a:schemeClr val="tx2"/>
                 </a:solidFill>
               </a:rPr>
-              <a:t>Concise first, evidence one click away</a:t>
-            </a:r>
-            <a:endParaRPr lang="en-US" sz="3400" dirty="0"/>
-          </a:p>
-        </p:txBody>
+              <a:t>A designed tool set, not a chat window</a:t>
+            </a:r>
+            <a:endParaRPr lang="en-US" sz="3200" dirty="0"/>
+          </a:p>
+        </p:txBody>
+      </p:sp>
+      <p:sp>
+        <p:nvSpPr>
+          <p:cNvPr id="3" name="Text 1"/>
+          <p:cNvSpPr txBox="1"/>
+          <p:nvPr/>
+        </p:nvSpPr>
+        <p:spPr>
+          <a:xfrm>
+            <a:off x="1280160" y="1298448"/>
+            <a:ext cx="3657600" cy="274320"/>
+          </a:xfrm>
+          <a:prstGeom prst="rect">
+            <a:avLst/>
+          </a:prstGeom>
+          <a:noFill/>
+          <a:ln/>
+        </p:spPr>
+        <p:txBody>
+          <a:bodyPr wrap="square" lIns="0" tIns="0" rIns="0" bIns="0" rtlCol="0" anchor="ctr"/>
+          <a:lstStyle/>
+          <a:p>
+            <a:pPr algn="l" indent="0" marL="0">
+              <a:buNone/>
+            </a:pPr>
+            <a:r>
+              <a:rPr lang="en-US" sz="1200" b="1" spc="100" kern="0" dirty="0">
+                <a:solidFill>
+                  <a:schemeClr val="accent5"/>
+                </a:solidFill>
+              </a:rPr>
+              <a:t>TOOL KIND</a:t>
+            </a:r>
+            <a:endParaRPr lang="en-US" sz="1200" dirty="0"/>
+          </a:p>
+        </p:txBody>
+      </p:sp>
+      <p:sp>
+        <p:nvSpPr>
+          <p:cNvPr id="4" name="Text 2"/>
+          <p:cNvSpPr txBox="1"/>
+          <p:nvPr/>
+        </p:nvSpPr>
+        <p:spPr>
+          <a:xfrm>
+            <a:off x="3017520" y="1298448"/>
+            <a:ext cx="3657600" cy="274320"/>
+          </a:xfrm>
+          <a:prstGeom prst="rect">
+            <a:avLst/>
+          </a:prstGeom>
+          <a:noFill/>
+          <a:ln/>
+        </p:spPr>
+        <p:txBody>
+          <a:bodyPr wrap="square" lIns="0" tIns="0" rIns="0" bIns="0" rtlCol="0" anchor="ctr"/>
+          <a:lstStyle/>
+          <a:p>
+            <a:pPr algn="l" indent="0" marL="0">
+              <a:buNone/>
+            </a:pPr>
+            <a:r>
+              <a:rPr lang="en-US" sz="1200" b="1" spc="100" kern="0" dirty="0">
+                <a:solidFill>
+                  <a:schemeClr val="accent5"/>
+                </a:solidFill>
+              </a:rPr>
+              <a:t>WHAT OURS DOES</a:t>
+            </a:r>
+            <a:endParaRPr lang="en-US" sz="1200" dirty="0"/>
+          </a:p>
+        </p:txBody>
+      </p:sp>
+      <p:sp>
+        <p:nvSpPr>
+          <p:cNvPr id="5" name="Text 3"/>
+          <p:cNvSpPr txBox="1"/>
+          <p:nvPr/>
+        </p:nvSpPr>
+        <p:spPr>
+          <a:xfrm>
+            <a:off x="8412480" y="1298448"/>
+            <a:ext cx="3657600" cy="274320"/>
+          </a:xfrm>
+          <a:prstGeom prst="rect">
+            <a:avLst/>
+          </a:prstGeom>
+          <a:noFill/>
+          <a:ln/>
+        </p:spPr>
+        <p:txBody>
+          <a:bodyPr wrap="square" lIns="0" tIns="0" rIns="0" bIns="0" rtlCol="0" anchor="ctr"/>
+          <a:lstStyle/>
+          <a:p>
+            <a:pPr algn="l" indent="0" marL="0">
+              <a:buNone/>
+            </a:pPr>
+            <a:r>
+              <a:rPr lang="en-US" sz="1200" b="1" spc="100" kern="0" dirty="0">
+                <a:solidFill>
+                  <a:schemeClr val="accent5"/>
+                </a:solidFill>
+              </a:rPr>
+              <a:t>DELIBERATELY DOES NOT</a:t>
+            </a:r>
+            <a:endParaRPr lang="en-US" sz="1200" dirty="0"/>
+          </a:p>
+        </p:txBody>
+      </p:sp>
+      <p:sp>
+        <p:nvSpPr>
+          <p:cNvPr id="6" name="Row Retrieval"/>
+          <p:cNvSpPr/>
+          <p:nvPr/>
+        </p:nvSpPr>
+        <p:spPr>
+          <a:xfrm>
+            <a:off x="548640" y="1645920"/>
+            <a:ext cx="11091672" cy="713232"/>
+          </a:xfrm>
+          <a:prstGeom prst="roundRect">
+            <a:avLst>
+              <a:gd name="adj" fmla="val 10256"/>
+            </a:avLst>
+          </a:prstGeom>
+          <a:solidFill>
+            <a:schemeClr val="bg2"/>
+          </a:solidFill>
+          <a:ln/>
+        </p:spPr>
+      </p:sp>
+      <p:sp>
+        <p:nvSpPr>
+          <p:cNvPr id="7" name="Icon disc Retrieval"/>
+          <p:cNvSpPr/>
+          <p:nvPr/>
+        </p:nvSpPr>
+        <p:spPr>
+          <a:xfrm>
+            <a:off x="713232" y="1773936"/>
+            <a:ext cx="457200" cy="457200"/>
+          </a:xfrm>
+          <a:prstGeom prst="ellipse">
+            <a:avLst/>
+          </a:prstGeom>
+          <a:solidFill>
+            <a:schemeClr val="accent1"/>
+          </a:solidFill>
+          <a:ln w="6350">
+            <a:solidFill>
+              <a:schemeClr val="accent1"/>
+            </a:solidFill>
+            <a:prstDash val="solid"/>
+          </a:ln>
+        </p:spPr>
       </p:sp>
       <p:pic>
         <p:nvPicPr>
-          <p:cNvPr id="3" name="Screenshot" descr="ThreadPilot dashboard with the chat panel open: the morning summary, KPI cards and an answer to 'Should we expedite ORD-008?'">    </p:cNvPr>
+          <p:cNvPr id="8" name="Image 0" descr="Retrieval icon">    </p:cNvPr>
           <p:cNvPicPr>
             <a:picLocks noChangeAspect="1"/>
           </p:cNvPicPr>
@@ -4841,8 +3788,8 @@
         </p:blipFill>
         <p:spPr>
           <a:xfrm>
-            <a:off x="548640" y="1280160"/>
-            <a:ext cx="7040880" cy="4507992"/>
+            <a:off x="822960" y="1883664"/>
+            <a:ext cx="237744" cy="237744"/>
           </a:xfrm>
           <a:prstGeom prst="rect">
             <a:avLst/>
@@ -4851,365 +3798,903 @@
       </p:pic>
       <p:sp>
         <p:nvSpPr>
-          <p:cNvPr id="4" name="Screenshot caption"/>
-          <p:cNvSpPr txBox="1"/>
-          <p:nvPr/>
-        </p:nvSpPr>
-        <p:spPr>
-          <a:xfrm>
-            <a:off x="548640" y="5897880"/>
-            <a:ext cx="7040880" cy="320040"/>
-          </a:xfrm>
-          <a:prstGeom prst="rect">
-            <a:avLst/>
-          </a:prstGeom>
-          <a:noFill/>
-          <a:ln/>
-        </p:spPr>
-        <p:txBody>
-          <a:bodyPr wrap="square" lIns="0" tIns="0" rIns="0" bIns="0" rtlCol="0" anchor="t"/>
-          <a:lstStyle/>
-          <a:p>
-            <a:pPr algn="l" indent="0" marL="0">
-              <a:buNone/>
-            </a:pPr>
-            <a:r>
-              <a:rPr lang="en-US" sz="1100" dirty="0">
-                <a:solidFill>
-                  <a:schemeClr val="accent5"/>
-                </a:solidFill>
-              </a:rPr>
-              <a:t>Briefing demo, simulated morning of 9 April 2026 (day 8). The demo chat uses built-in tools, no language model.</a:t>
-            </a:r>
-            <a:endParaRPr lang="en-US" sz="1100" dirty="0"/>
-          </a:p>
-        </p:txBody>
-      </p:sp>
-      <p:sp>
-        <p:nvSpPr>
-          <p:cNvPr id="5" name="Step 1"/>
-          <p:cNvSpPr txBox="1"/>
-          <p:nvPr/>
-        </p:nvSpPr>
-        <p:spPr>
-          <a:xfrm>
-            <a:off x="8001000" y="1371600"/>
+          <p:cNvPr id="9" name="Text 6"/>
+          <p:cNvSpPr txBox="1"/>
+          <p:nvPr/>
+        </p:nvSpPr>
+        <p:spPr>
+          <a:xfrm>
+            <a:off x="1280160" y="1645920"/>
+            <a:ext cx="1645920" cy="713232"/>
+          </a:xfrm>
+          <a:prstGeom prst="rect">
+            <a:avLst/>
+          </a:prstGeom>
+          <a:noFill/>
+          <a:ln/>
+        </p:spPr>
+        <p:txBody>
+          <a:bodyPr wrap="square" lIns="0" tIns="0" rIns="0" bIns="0" rtlCol="0" anchor="ctr"/>
+          <a:lstStyle/>
+          <a:p>
+            <a:pPr algn="l" indent="0" marL="0">
+              <a:buNone/>
+            </a:pPr>
+            <a:r>
+              <a:rPr lang="en-US" sz="1800" b="1" dirty="0">
+                <a:solidFill>
+                  <a:schemeClr val="tx2"/>
+                </a:solidFill>
+              </a:rPr>
+              <a:t>Retrieval</a:t>
+            </a:r>
+            <a:endParaRPr lang="en-US" sz="1800" dirty="0"/>
+          </a:p>
+        </p:txBody>
+      </p:sp>
+      <p:sp>
+        <p:nvSpPr>
+          <p:cNvPr id="10" name="Text 7"/>
+          <p:cNvSpPr txBox="1"/>
+          <p:nvPr/>
+        </p:nvSpPr>
+        <p:spPr>
+          <a:xfrm>
+            <a:off x="3017520" y="1645920"/>
+            <a:ext cx="5212080" cy="713232"/>
+          </a:xfrm>
+          <a:prstGeom prst="rect">
+            <a:avLst/>
+          </a:prstGeom>
+          <a:noFill/>
+          <a:ln/>
+        </p:spPr>
+        <p:txBody>
+          <a:bodyPr wrap="square" lIns="0" tIns="0" rIns="0" bIns="0" rtlCol="0" anchor="ctr"/>
+          <a:lstStyle/>
+          <a:p>
+            <a:pPr algn="l" indent="0" marL="0">
+              <a:buNone/>
+            </a:pPr>
+            <a:r>
+              <a:rPr lang="en-US" sz="1400" dirty="0">
+                <a:solidFill>
+                  <a:schemeClr val="tx1"/>
+                </a:solidFill>
+              </a:rPr>
+              <a:t>Typed order look-ups, plus a read-only SQL agent (SELECT only) for everything else</a:t>
+            </a:r>
+            <a:endParaRPr lang="en-US" sz="1400" dirty="0"/>
+          </a:p>
+        </p:txBody>
+      </p:sp>
+      <p:sp>
+        <p:nvSpPr>
+          <p:cNvPr id="11" name="Text 8"/>
+          <p:cNvSpPr txBox="1"/>
+          <p:nvPr/>
+        </p:nvSpPr>
+        <p:spPr>
+          <a:xfrm>
+            <a:off x="8412480" y="1645920"/>
+            <a:ext cx="3108960" cy="713232"/>
+          </a:xfrm>
+          <a:prstGeom prst="rect">
+            <a:avLst/>
+          </a:prstGeom>
+          <a:noFill/>
+          <a:ln/>
+        </p:spPr>
+        <p:txBody>
+          <a:bodyPr wrap="square" lIns="0" tIns="0" rIns="0" bIns="0" rtlCol="0" anchor="ctr"/>
+          <a:lstStyle/>
+          <a:p>
+            <a:pPr algn="l" indent="0" marL="0">
+              <a:buNone/>
+            </a:pPr>
+            <a:r>
+              <a:rPr lang="en-US" sz="1400" dirty="0">
+                <a:solidFill>
+                  <a:schemeClr val="tx1"/>
+                </a:solidFill>
+              </a:rPr>
+              <a:t>Pick the first match when several fit</a:t>
+            </a:r>
+            <a:endParaRPr lang="en-US" sz="1400" dirty="0"/>
+          </a:p>
+        </p:txBody>
+      </p:sp>
+      <p:sp>
+        <p:nvSpPr>
+          <p:cNvPr id="12" name="Row Judgement"/>
+          <p:cNvSpPr/>
+          <p:nvPr/>
+        </p:nvSpPr>
+        <p:spPr>
+          <a:xfrm>
+            <a:off x="548640" y="2432304"/>
+            <a:ext cx="11091672" cy="713232"/>
+          </a:xfrm>
+          <a:prstGeom prst="roundRect">
+            <a:avLst>
+              <a:gd name="adj" fmla="val 10256"/>
+            </a:avLst>
+          </a:prstGeom>
+          <a:solidFill>
+            <a:schemeClr val="bg2"/>
+          </a:solidFill>
+          <a:ln/>
+        </p:spPr>
+      </p:sp>
+      <p:sp>
+        <p:nvSpPr>
+          <p:cNvPr id="13" name="Icon disc Judgement"/>
+          <p:cNvSpPr/>
+          <p:nvPr/>
+        </p:nvSpPr>
+        <p:spPr>
+          <a:xfrm>
+            <a:off x="713232" y="2560320"/>
             <a:ext cx="457200" cy="457200"/>
           </a:xfrm>
           <a:prstGeom prst="ellipse">
             <a:avLst/>
           </a:prstGeom>
           <a:solidFill>
-            <a:schemeClr val="accent2"/>
+            <a:schemeClr val="accent1"/>
           </a:solidFill>
+          <a:ln w="6350">
+            <a:solidFill>
+              <a:schemeClr val="accent1"/>
+            </a:solidFill>
+            <a:prstDash val="solid"/>
+          </a:ln>
+        </p:spPr>
+      </p:sp>
+      <p:pic>
+        <p:nvPicPr>
+          <p:cNvPr id="14" name="Image 1" descr="Judgement icon">    </p:cNvPr>
+          <p:cNvPicPr>
+            <a:picLocks noChangeAspect="1"/>
+          </p:cNvPicPr>
+          <p:nvPr/>
+        </p:nvPicPr>
+        <p:blipFill>
+          <a:blip r:embed="rId2"/>
+          <a:stretch>
+            <a:fillRect/>
+          </a:stretch>
+        </p:blipFill>
+        <p:spPr>
+          <a:xfrm>
+            <a:off x="822960" y="2670048"/>
+            <a:ext cx="237744" cy="237744"/>
+          </a:xfrm>
+          <a:prstGeom prst="rect">
+            <a:avLst/>
+          </a:prstGeom>
+        </p:spPr>
+      </p:pic>
+      <p:sp>
+        <p:nvSpPr>
+          <p:cNvPr id="15" name="Text 11"/>
+          <p:cNvSpPr txBox="1"/>
+          <p:nvPr/>
+        </p:nvSpPr>
+        <p:spPr>
+          <a:xfrm>
+            <a:off x="1280160" y="2432304"/>
+            <a:ext cx="1645920" cy="713232"/>
+          </a:xfrm>
+          <a:prstGeom prst="rect">
+            <a:avLst/>
+          </a:prstGeom>
+          <a:noFill/>
           <a:ln/>
         </p:spPr>
         <p:txBody>
           <a:bodyPr wrap="square" lIns="0" tIns="0" rIns="0" bIns="0" rtlCol="0" anchor="ctr"/>
           <a:lstStyle/>
           <a:p>
-            <a:pPr algn="ctr" indent="0" marL="0">
+            <a:pPr algn="l" indent="0" marL="0">
               <a:buNone/>
             </a:pPr>
             <a:r>
               <a:rPr lang="en-US" sz="1800" b="1" dirty="0">
                 <a:solidFill>
+                  <a:schemeClr val="tx2"/>
+                </a:solidFill>
+              </a:rPr>
+              <a:t>Judgement</a:t>
+            </a:r>
+            <a:endParaRPr lang="en-US" sz="1800" dirty="0"/>
+          </a:p>
+        </p:txBody>
+      </p:sp>
+      <p:sp>
+        <p:nvSpPr>
+          <p:cNvPr id="16" name="Text 12"/>
+          <p:cNvSpPr txBox="1"/>
+          <p:nvPr/>
+        </p:nvSpPr>
+        <p:spPr>
+          <a:xfrm>
+            <a:off x="3017520" y="2432304"/>
+            <a:ext cx="5212080" cy="713232"/>
+          </a:xfrm>
+          <a:prstGeom prst="rect">
+            <a:avLst/>
+          </a:prstGeom>
+          <a:noFill/>
+          <a:ln/>
+        </p:spPr>
+        <p:txBody>
+          <a:bodyPr wrap="square" lIns="0" tIns="0" rIns="0" bIns="0" rtlCol="0" anchor="ctr"/>
+          <a:lstStyle/>
+          <a:p>
+            <a:pPr algn="l" indent="0" marL="0">
+              <a:buNone/>
+            </a:pPr>
+            <a:r>
+              <a:rPr lang="en-US" sz="1400" dirty="0">
+                <a:solidFill>
+                  <a:schemeClr val="tx1"/>
+                </a:solidFill>
+              </a:rPr>
+              <a:t>“Normal” = mean of the previous 8 same weekdays ± the larger of 1.5 SD or 5%; Sundays closed</a:t>
+            </a:r>
+            <a:endParaRPr lang="en-US" sz="1400" dirty="0"/>
+          </a:p>
+        </p:txBody>
+      </p:sp>
+      <p:sp>
+        <p:nvSpPr>
+          <p:cNvPr id="17" name="Text 13"/>
+          <p:cNvSpPr txBox="1"/>
+          <p:nvPr/>
+        </p:nvSpPr>
+        <p:spPr>
+          <a:xfrm>
+            <a:off x="8412480" y="2432304"/>
+            <a:ext cx="3108960" cy="713232"/>
+          </a:xfrm>
+          <a:prstGeom prst="rect">
+            <a:avLst/>
+          </a:prstGeom>
+          <a:noFill/>
+          <a:ln/>
+        </p:spPr>
+        <p:txBody>
+          <a:bodyPr wrap="square" lIns="0" tIns="0" rIns="0" bIns="0" rtlCol="0" anchor="ctr"/>
+          <a:lstStyle/>
+          <a:p>
+            <a:pPr algn="l" indent="0" marL="0">
+              <a:buNone/>
+            </a:pPr>
+            <a:r>
+              <a:rPr lang="en-US" sz="1400" dirty="0">
+                <a:solidFill>
+                  <a:schemeClr val="tx1"/>
+                </a:solidFill>
+              </a:rPr>
+              <a:t>Treat one low day as proof of a fault</a:t>
+            </a:r>
+            <a:endParaRPr lang="en-US" sz="1400" dirty="0"/>
+          </a:p>
+        </p:txBody>
+      </p:sp>
+      <p:sp>
+        <p:nvSpPr>
+          <p:cNvPr id="18" name="Row Tracing"/>
+          <p:cNvSpPr/>
+          <p:nvPr/>
+        </p:nvSpPr>
+        <p:spPr>
+          <a:xfrm>
+            <a:off x="548640" y="3218688"/>
+            <a:ext cx="11091672" cy="713232"/>
+          </a:xfrm>
+          <a:prstGeom prst="roundRect">
+            <a:avLst>
+              <a:gd name="adj" fmla="val 10256"/>
+            </a:avLst>
+          </a:prstGeom>
+          <a:solidFill>
+            <a:schemeClr val="bg2"/>
+          </a:solidFill>
+          <a:ln/>
+        </p:spPr>
+      </p:sp>
+      <p:sp>
+        <p:nvSpPr>
+          <p:cNvPr id="19" name="Icon disc Tracing"/>
+          <p:cNvSpPr/>
+          <p:nvPr/>
+        </p:nvSpPr>
+        <p:spPr>
+          <a:xfrm>
+            <a:off x="713232" y="3346704"/>
+            <a:ext cx="457200" cy="457200"/>
+          </a:xfrm>
+          <a:prstGeom prst="ellipse">
+            <a:avLst/>
+          </a:prstGeom>
+          <a:solidFill>
+            <a:schemeClr val="accent1"/>
+          </a:solidFill>
+          <a:ln w="6350">
+            <a:solidFill>
+              <a:schemeClr val="accent1"/>
+            </a:solidFill>
+            <a:prstDash val="solid"/>
+          </a:ln>
+        </p:spPr>
+      </p:sp>
+      <p:pic>
+        <p:nvPicPr>
+          <p:cNvPr id="20" name="Image 2" descr="Tracing icon">    </p:cNvPr>
+          <p:cNvPicPr>
+            <a:picLocks noChangeAspect="1"/>
+          </p:cNvPicPr>
+          <p:nvPr/>
+        </p:nvPicPr>
+        <p:blipFill>
+          <a:blip r:embed="rId3"/>
+          <a:stretch>
+            <a:fillRect/>
+          </a:stretch>
+        </p:blipFill>
+        <p:spPr>
+          <a:xfrm>
+            <a:off x="822960" y="3456432"/>
+            <a:ext cx="237744" cy="237744"/>
+          </a:xfrm>
+          <a:prstGeom prst="rect">
+            <a:avLst/>
+          </a:prstGeom>
+        </p:spPr>
+      </p:pic>
+      <p:sp>
+        <p:nvSpPr>
+          <p:cNvPr id="21" name="Text 16"/>
+          <p:cNvSpPr txBox="1"/>
+          <p:nvPr/>
+        </p:nvSpPr>
+        <p:spPr>
+          <a:xfrm>
+            <a:off x="1280160" y="3218688"/>
+            <a:ext cx="1645920" cy="713232"/>
+          </a:xfrm>
+          <a:prstGeom prst="rect">
+            <a:avLst/>
+          </a:prstGeom>
+          <a:noFill/>
+          <a:ln/>
+        </p:spPr>
+        <p:txBody>
+          <a:bodyPr wrap="square" lIns="0" tIns="0" rIns="0" bIns="0" rtlCol="0" anchor="ctr"/>
+          <a:lstStyle/>
+          <a:p>
+            <a:pPr algn="l" indent="0" marL="0">
+              <a:buNone/>
+            </a:pPr>
+            <a:r>
+              <a:rPr lang="en-US" sz="1800" b="1" dirty="0">
+                <a:solidFill>
+                  <a:schemeClr val="tx2"/>
+                </a:solidFill>
+              </a:rPr>
+              <a:t>Tracing</a:t>
+            </a:r>
+            <a:endParaRPr lang="en-US" sz="1800" dirty="0"/>
+          </a:p>
+        </p:txBody>
+      </p:sp>
+      <p:sp>
+        <p:nvSpPr>
+          <p:cNvPr id="22" name="Text 17"/>
+          <p:cNvSpPr txBox="1"/>
+          <p:nvPr/>
+        </p:nvSpPr>
+        <p:spPr>
+          <a:xfrm>
+            <a:off x="3017520" y="3218688"/>
+            <a:ext cx="5212080" cy="713232"/>
+          </a:xfrm>
+          <a:prstGeom prst="rect">
+            <a:avLst/>
+          </a:prstGeom>
+          <a:noFill/>
+          <a:ln/>
+        </p:spPr>
+        <p:txBody>
+          <a:bodyPr wrap="square" lIns="0" tIns="0" rIns="0" bIns="0" rtlCol="0" anchor="ctr"/>
+          <a:lstStyle/>
+          <a:p>
+            <a:pPr algn="l" indent="0" marL="0">
+              <a:buNone/>
+            </a:pPr>
+            <a:r>
+              <a:rPr lang="en-US" sz="1400" dirty="0">
+                <a:solidFill>
+                  <a:schemeClr val="tx1"/>
+                </a:solidFill>
+              </a:rPr>
+              <a:t>Every number links to the source file and row behind it</a:t>
+            </a:r>
+            <a:endParaRPr lang="en-US" sz="1400" dirty="0"/>
+          </a:p>
+        </p:txBody>
+      </p:sp>
+      <p:sp>
+        <p:nvSpPr>
+          <p:cNvPr id="23" name="Text 18"/>
+          <p:cNvSpPr txBox="1"/>
+          <p:nvPr/>
+        </p:nvSpPr>
+        <p:spPr>
+          <a:xfrm>
+            <a:off x="8412480" y="3218688"/>
+            <a:ext cx="3108960" cy="713232"/>
+          </a:xfrm>
+          <a:prstGeom prst="rect">
+            <a:avLst/>
+          </a:prstGeom>
+          <a:noFill/>
+          <a:ln/>
+        </p:spPr>
+        <p:txBody>
+          <a:bodyPr wrap="square" lIns="0" tIns="0" rIns="0" bIns="0" rtlCol="0" anchor="ctr"/>
+          <a:lstStyle/>
+          <a:p>
+            <a:pPr algn="l" indent="0" marL="0">
+              <a:buNone/>
+            </a:pPr>
+            <a:r>
+              <a:rPr lang="en-US" sz="1400" dirty="0">
+                <a:solidFill>
+                  <a:schemeClr val="tx1"/>
+                </a:solidFill>
+              </a:rPr>
+              <a:t>Explain causes the data does not hold</a:t>
+            </a:r>
+            <a:endParaRPr lang="en-US" sz="1400" dirty="0"/>
+          </a:p>
+        </p:txBody>
+      </p:sp>
+      <p:sp>
+        <p:nvSpPr>
+          <p:cNvPr id="24" name="Row Discovery"/>
+          <p:cNvSpPr/>
+          <p:nvPr/>
+        </p:nvSpPr>
+        <p:spPr>
+          <a:xfrm>
+            <a:off x="548640" y="4005072"/>
+            <a:ext cx="11091672" cy="713232"/>
+          </a:xfrm>
+          <a:prstGeom prst="roundRect">
+            <a:avLst>
+              <a:gd name="adj" fmla="val 10256"/>
+            </a:avLst>
+          </a:prstGeom>
+          <a:solidFill>
+            <a:schemeClr val="bg2"/>
+          </a:solidFill>
+          <a:ln/>
+        </p:spPr>
+      </p:sp>
+      <p:sp>
+        <p:nvSpPr>
+          <p:cNvPr id="25" name="Icon disc Discovery"/>
+          <p:cNvSpPr/>
+          <p:nvPr/>
+        </p:nvSpPr>
+        <p:spPr>
+          <a:xfrm>
+            <a:off x="713232" y="4133088"/>
+            <a:ext cx="457200" cy="457200"/>
+          </a:xfrm>
+          <a:prstGeom prst="ellipse">
+            <a:avLst/>
+          </a:prstGeom>
+          <a:solidFill>
+            <a:schemeClr val="accent1"/>
+          </a:solidFill>
+          <a:ln w="6350">
+            <a:solidFill>
+              <a:schemeClr val="accent1"/>
+            </a:solidFill>
+            <a:prstDash val="solid"/>
+          </a:ln>
+        </p:spPr>
+      </p:sp>
+      <p:pic>
+        <p:nvPicPr>
+          <p:cNvPr id="26" name="Image 3" descr="Discovery icon">    </p:cNvPr>
+          <p:cNvPicPr>
+            <a:picLocks noChangeAspect="1"/>
+          </p:cNvPicPr>
+          <p:nvPr/>
+        </p:nvPicPr>
+        <p:blipFill>
+          <a:blip r:embed="rId4"/>
+          <a:stretch>
+            <a:fillRect/>
+          </a:stretch>
+        </p:blipFill>
+        <p:spPr>
+          <a:xfrm>
+            <a:off x="822960" y="4242816"/>
+            <a:ext cx="237744" cy="237744"/>
+          </a:xfrm>
+          <a:prstGeom prst="rect">
+            <a:avLst/>
+          </a:prstGeom>
+        </p:spPr>
+      </p:pic>
+      <p:sp>
+        <p:nvSpPr>
+          <p:cNvPr id="27" name="Text 21"/>
+          <p:cNvSpPr txBox="1"/>
+          <p:nvPr/>
+        </p:nvSpPr>
+        <p:spPr>
+          <a:xfrm>
+            <a:off x="1280160" y="4005072"/>
+            <a:ext cx="1645920" cy="713232"/>
+          </a:xfrm>
+          <a:prstGeom prst="rect">
+            <a:avLst/>
+          </a:prstGeom>
+          <a:noFill/>
+          <a:ln/>
+        </p:spPr>
+        <p:txBody>
+          <a:bodyPr wrap="square" lIns="0" tIns="0" rIns="0" bIns="0" rtlCol="0" anchor="ctr"/>
+          <a:lstStyle/>
+          <a:p>
+            <a:pPr algn="l" indent="0" marL="0">
+              <a:buNone/>
+            </a:pPr>
+            <a:r>
+              <a:rPr lang="en-US" sz="1800" b="1" dirty="0">
+                <a:solidFill>
+                  <a:schemeClr val="tx2"/>
+                </a:solidFill>
+              </a:rPr>
+              <a:t>Discovery</a:t>
+            </a:r>
+            <a:endParaRPr lang="en-US" sz="1800" dirty="0"/>
+          </a:p>
+        </p:txBody>
+      </p:sp>
+      <p:sp>
+        <p:nvSpPr>
+          <p:cNvPr id="28" name="Text 22"/>
+          <p:cNvSpPr txBox="1"/>
+          <p:nvPr/>
+        </p:nvSpPr>
+        <p:spPr>
+          <a:xfrm>
+            <a:off x="3017520" y="4005072"/>
+            <a:ext cx="5212080" cy="713232"/>
+          </a:xfrm>
+          <a:prstGeom prst="rect">
+            <a:avLst/>
+          </a:prstGeom>
+          <a:noFill/>
+          <a:ln/>
+        </p:spPr>
+        <p:txBody>
+          <a:bodyPr wrap="square" lIns="0" tIns="0" rIns="0" bIns="0" rtlCol="0" anchor="ctr"/>
+          <a:lstStyle/>
+          <a:p>
+            <a:pPr algn="l" indent="0" marL="0">
+              <a:buNone/>
+            </a:pPr>
+            <a:r>
+              <a:rPr lang="en-US" sz="1400" dirty="0">
+                <a:solidFill>
+                  <a:schemeClr val="tx1"/>
+                </a:solidFill>
+              </a:rPr>
+              <a:t>Ranks stalled customers, quiet orders and stages below normal; the top five make the page</a:t>
+            </a:r>
+            <a:endParaRPr lang="en-US" sz="1400" dirty="0"/>
+          </a:p>
+        </p:txBody>
+      </p:sp>
+      <p:sp>
+        <p:nvSpPr>
+          <p:cNvPr id="29" name="Text 23"/>
+          <p:cNvSpPr txBox="1"/>
+          <p:nvPr/>
+        </p:nvSpPr>
+        <p:spPr>
+          <a:xfrm>
+            <a:off x="8412480" y="4005072"/>
+            <a:ext cx="3108960" cy="713232"/>
+          </a:xfrm>
+          <a:prstGeom prst="rect">
+            <a:avLst/>
+          </a:prstGeom>
+          <a:noFill/>
+          <a:ln/>
+        </p:spPr>
+        <p:txBody>
+          <a:bodyPr wrap="square" lIns="0" tIns="0" rIns="0" bIns="0" rtlCol="0" anchor="ctr"/>
+          <a:lstStyle/>
+          <a:p>
+            <a:pPr algn="l" indent="0" marL="0">
+              <a:buNone/>
+            </a:pPr>
+            <a:r>
+              <a:rPr lang="en-US" sz="1400" dirty="0">
+                <a:solidFill>
+                  <a:schemeClr val="tx1"/>
+                </a:solidFill>
+              </a:rPr>
+              <a:t>List every finding</a:t>
+            </a:r>
+            <a:endParaRPr lang="en-US" sz="1400" dirty="0"/>
+          </a:p>
+        </p:txBody>
+      </p:sp>
+      <p:sp>
+        <p:nvSpPr>
+          <p:cNvPr id="30" name="Row Action"/>
+          <p:cNvSpPr/>
+          <p:nvPr/>
+        </p:nvSpPr>
+        <p:spPr>
+          <a:xfrm>
+            <a:off x="548640" y="4791456"/>
+            <a:ext cx="11091672" cy="713232"/>
+          </a:xfrm>
+          <a:prstGeom prst="roundRect">
+            <a:avLst>
+              <a:gd name="adj" fmla="val 10256"/>
+            </a:avLst>
+          </a:prstGeom>
+          <a:solidFill>
+            <a:schemeClr val="bg2"/>
+          </a:solidFill>
+          <a:ln/>
+        </p:spPr>
+      </p:sp>
+      <p:sp>
+        <p:nvSpPr>
+          <p:cNvPr id="31" name="Icon disc Action"/>
+          <p:cNvSpPr/>
+          <p:nvPr/>
+        </p:nvSpPr>
+        <p:spPr>
+          <a:xfrm>
+            <a:off x="713232" y="4919472"/>
+            <a:ext cx="457200" cy="457200"/>
+          </a:xfrm>
+          <a:prstGeom prst="ellipse">
+            <a:avLst/>
+          </a:prstGeom>
+          <a:solidFill>
+            <a:schemeClr val="accent1"/>
+          </a:solidFill>
+          <a:ln w="6350">
+            <a:solidFill>
+              <a:schemeClr val="accent1"/>
+            </a:solidFill>
+            <a:prstDash val="solid"/>
+          </a:ln>
+        </p:spPr>
+      </p:sp>
+      <p:pic>
+        <p:nvPicPr>
+          <p:cNvPr id="32" name="Image 4" descr="Action icon">    </p:cNvPr>
+          <p:cNvPicPr>
+            <a:picLocks noChangeAspect="1"/>
+          </p:cNvPicPr>
+          <p:nvPr/>
+        </p:nvPicPr>
+        <p:blipFill>
+          <a:blip r:embed="rId5"/>
+          <a:stretch>
+            <a:fillRect/>
+          </a:stretch>
+        </p:blipFill>
+        <p:spPr>
+          <a:xfrm>
+            <a:off x="822960" y="5029200"/>
+            <a:ext cx="237744" cy="237744"/>
+          </a:xfrm>
+          <a:prstGeom prst="rect">
+            <a:avLst/>
+          </a:prstGeom>
+        </p:spPr>
+      </p:pic>
+      <p:sp>
+        <p:nvSpPr>
+          <p:cNvPr id="33" name="Text 26"/>
+          <p:cNvSpPr txBox="1"/>
+          <p:nvPr/>
+        </p:nvSpPr>
+        <p:spPr>
+          <a:xfrm>
+            <a:off x="1280160" y="4791456"/>
+            <a:ext cx="1645920" cy="713232"/>
+          </a:xfrm>
+          <a:prstGeom prst="rect">
+            <a:avLst/>
+          </a:prstGeom>
+          <a:noFill/>
+          <a:ln/>
+        </p:spPr>
+        <p:txBody>
+          <a:bodyPr wrap="square" lIns="0" tIns="0" rIns="0" bIns="0" rtlCol="0" anchor="ctr"/>
+          <a:lstStyle/>
+          <a:p>
+            <a:pPr algn="l" indent="0" marL="0">
+              <a:buNone/>
+            </a:pPr>
+            <a:r>
+              <a:rPr lang="en-US" sz="1800" b="1" dirty="0">
+                <a:solidFill>
+                  <a:schemeClr val="tx2"/>
+                </a:solidFill>
+              </a:rPr>
+              <a:t>Action</a:t>
+            </a:r>
+            <a:endParaRPr lang="en-US" sz="1800" dirty="0"/>
+          </a:p>
+        </p:txBody>
+      </p:sp>
+      <p:sp>
+        <p:nvSpPr>
+          <p:cNvPr id="34" name="Text 27"/>
+          <p:cNvSpPr txBox="1"/>
+          <p:nvPr/>
+        </p:nvSpPr>
+        <p:spPr>
+          <a:xfrm>
+            <a:off x="3017520" y="4791456"/>
+            <a:ext cx="5212080" cy="713232"/>
+          </a:xfrm>
+          <a:prstGeom prst="rect">
+            <a:avLst/>
+          </a:prstGeom>
+          <a:noFill/>
+          <a:ln/>
+        </p:spPr>
+        <p:txBody>
+          <a:bodyPr wrap="square" lIns="0" tIns="0" rIns="0" bIns="0" rtlCol="0" anchor="ctr"/>
+          <a:lstStyle/>
+          <a:p>
+            <a:pPr algn="l" indent="0" marL="0">
+              <a:buNone/>
+            </a:pPr>
+            <a:r>
+              <a:rPr lang="en-US" sz="1400" dirty="0">
+                <a:solidFill>
+                  <a:schemeClr val="tx1"/>
+                </a:solidFill>
+              </a:rPr>
+              <a:t>Preview, then a 15-minute confirmation key; every executed action is logged</a:t>
+            </a:r>
+            <a:endParaRPr lang="en-US" sz="1400" dirty="0"/>
+          </a:p>
+        </p:txBody>
+      </p:sp>
+      <p:sp>
+        <p:nvSpPr>
+          <p:cNvPr id="35" name="Text 28"/>
+          <p:cNvSpPr txBox="1"/>
+          <p:nvPr/>
+        </p:nvSpPr>
+        <p:spPr>
+          <a:xfrm>
+            <a:off x="8412480" y="4791456"/>
+            <a:ext cx="3108960" cy="713232"/>
+          </a:xfrm>
+          <a:prstGeom prst="rect">
+            <a:avLst/>
+          </a:prstGeom>
+          <a:noFill/>
+          <a:ln/>
+        </p:spPr>
+        <p:txBody>
+          <a:bodyPr wrap="square" lIns="0" tIns="0" rIns="0" bIns="0" rtlCol="0" anchor="ctr"/>
+          <a:lstStyle/>
+          <a:p>
+            <a:pPr algn="l" indent="0" marL="0">
+              <a:buNone/>
+            </a:pPr>
+            <a:r>
+              <a:rPr lang="en-US" sz="1400" dirty="0">
+                <a:solidFill>
+                  <a:schemeClr val="tx1"/>
+                </a:solidFill>
+              </a:rPr>
+              <a:t>Send without a matching, unexpired key</a:t>
+            </a:r>
+            <a:endParaRPr lang="en-US" sz="1400" dirty="0"/>
+          </a:p>
+        </p:txBody>
+      </p:sp>
+      <p:sp>
+        <p:nvSpPr>
+          <p:cNvPr id="36" name="Banner"/>
+          <p:cNvSpPr/>
+          <p:nvPr/>
+        </p:nvSpPr>
+        <p:spPr>
+          <a:xfrm>
+            <a:off x="548640" y="5669280"/>
+            <a:ext cx="11091672" cy="566928"/>
+          </a:xfrm>
+          <a:prstGeom prst="roundRect">
+            <a:avLst>
+              <a:gd name="adj" fmla="val 12903"/>
+            </a:avLst>
+          </a:prstGeom>
+          <a:solidFill>
+            <a:schemeClr val="tx2"/>
+          </a:solidFill>
+          <a:ln/>
+        </p:spPr>
+      </p:sp>
+      <p:sp>
+        <p:nvSpPr>
+          <p:cNvPr id="37" name="Text 30"/>
+          <p:cNvSpPr txBox="1"/>
+          <p:nvPr/>
+        </p:nvSpPr>
+        <p:spPr>
+          <a:xfrm>
+            <a:off x="777240" y="5669280"/>
+            <a:ext cx="10698480" cy="566928"/>
+          </a:xfrm>
+          <a:prstGeom prst="rect">
+            <a:avLst/>
+          </a:prstGeom>
+          <a:noFill/>
+          <a:ln/>
+        </p:spPr>
+        <p:txBody>
+          <a:bodyPr wrap="square" lIns="0" tIns="0" rIns="0" bIns="0" rtlCol="0" anchor="ctr"/>
+          <a:lstStyle/>
+          <a:p>
+            <a:pPr algn="l" indent="0" marL="0">
+              <a:buNone/>
+            </a:pPr>
+            <a:r>
+              <a:rPr lang="en-US" sz="1400" b="1" dirty="0">
+                <a:solidFill>
+                  <a:schemeClr val="accent3"/>
+                </a:solidFill>
+              </a:rPr>
+              <a:t>33 tools</a:t>
+            </a:r>
+            <a:pPr algn="l" indent="0" marL="0">
+              <a:buNone/>
+            </a:pPr>
+            <a:r>
+              <a:rPr lang="en-US" sz="1400" dirty="0">
+                <a:solidFill>
                   <a:schemeClr val="bg1"/>
                 </a:solidFill>
               </a:rPr>
-              <a:t>1</a:t>
-            </a:r>
-            <a:endParaRPr lang="en-US" sz="1800" dirty="0"/>
-          </a:p>
-        </p:txBody>
-      </p:sp>
-      <p:sp>
-        <p:nvSpPr>
-          <p:cNvPr id="6" name="Text 3"/>
-          <p:cNvSpPr txBox="1"/>
-          <p:nvPr/>
-        </p:nvSpPr>
-        <p:spPr>
-          <a:xfrm>
-            <a:off x="8595360" y="1371600"/>
-            <a:ext cx="3044952" cy="457200"/>
-          </a:xfrm>
-          <a:prstGeom prst="rect">
-            <a:avLst/>
-          </a:prstGeom>
-          <a:noFill/>
-          <a:ln/>
-        </p:spPr>
-        <p:txBody>
-          <a:bodyPr wrap="square" lIns="0" tIns="0" rIns="0" bIns="0" rtlCol="0" anchor="ctr"/>
-          <a:lstStyle/>
-          <a:p>
-            <a:pPr algn="l" indent="0" marL="0">
-              <a:buNone/>
-            </a:pPr>
-            <a:r>
-              <a:rPr lang="en-US" sz="1800" b="1" dirty="0">
-                <a:solidFill>
-                  <a:schemeClr val="tx2"/>
-                </a:solidFill>
-              </a:rPr>
-              <a:t>Three lines first</a:t>
-            </a:r>
-            <a:endParaRPr lang="en-US" sz="1800" dirty="0"/>
-          </a:p>
-        </p:txBody>
-      </p:sp>
-      <p:sp>
-        <p:nvSpPr>
-          <p:cNvPr id="7" name="Text 4"/>
-          <p:cNvSpPr txBox="1"/>
-          <p:nvPr/>
-        </p:nvSpPr>
-        <p:spPr>
-          <a:xfrm>
-            <a:off x="8595360" y="1874520"/>
-            <a:ext cx="3044952" cy="914400"/>
-          </a:xfrm>
-          <a:prstGeom prst="rect">
-            <a:avLst/>
-          </a:prstGeom>
-          <a:noFill/>
-          <a:ln/>
-        </p:spPr>
-        <p:txBody>
-          <a:bodyPr wrap="square" lIns="0" tIns="0" rIns="0" bIns="0" rtlCol="0" anchor="t"/>
-          <a:lstStyle/>
-          <a:p>
-            <a:pPr algn="l" indent="0" marL="0">
-              <a:buNone/>
-            </a:pPr>
-            <a:r>
-              <a:rPr lang="en-US" sz="1400" dirty="0">
-                <a:solidFill>
-                  <a:schemeClr val="tx1"/>
-                </a:solidFill>
-              </a:rPr>
-              <a:t>Yesterday, top issue, decision: readable at a glance.</a:t>
-            </a:r>
-            <a:endParaRPr lang="en-US" sz="1400" dirty="0"/>
-          </a:p>
-        </p:txBody>
-      </p:sp>
-      <p:sp>
-        <p:nvSpPr>
-          <p:cNvPr id="8" name="Step 2"/>
-          <p:cNvSpPr txBox="1"/>
-          <p:nvPr/>
-        </p:nvSpPr>
-        <p:spPr>
-          <a:xfrm>
-            <a:off x="8001000" y="2926080"/>
-            <a:ext cx="457200" cy="457200"/>
-          </a:xfrm>
-          <a:prstGeom prst="ellipse">
-            <a:avLst/>
-          </a:prstGeom>
-          <a:solidFill>
-            <a:schemeClr val="accent2"/>
-          </a:solidFill>
-          <a:ln/>
-        </p:spPr>
-        <p:txBody>
-          <a:bodyPr wrap="square" lIns="0" tIns="0" rIns="0" bIns="0" rtlCol="0" anchor="ctr"/>
-          <a:lstStyle/>
-          <a:p>
-            <a:pPr algn="ctr" indent="0" marL="0">
-              <a:buNone/>
-            </a:pPr>
-            <a:r>
-              <a:rPr lang="en-US" sz="1800" b="1" dirty="0">
+              <a:t> specified in one table: input, output, purpose, non-goals, failure mode.   </a:t>
+            </a:r>
+            <a:pPr algn="l" indent="0" marL="0">
+              <a:buNone/>
+            </a:pPr>
+            <a:r>
+              <a:rPr lang="en-US" sz="1400" b="1" dirty="0">
                 <a:solidFill>
                   <a:schemeClr val="bg1"/>
                 </a:solidFill>
               </a:rPr>
-              <a:t>2</a:t>
-            </a:r>
-            <a:endParaRPr lang="en-US" sz="1800" dirty="0"/>
-          </a:p>
-        </p:txBody>
-      </p:sp>
-      <p:sp>
-        <p:nvSpPr>
-          <p:cNvPr id="9" name="Text 6"/>
-          <p:cNvSpPr txBox="1"/>
-          <p:nvPr/>
-        </p:nvSpPr>
-        <p:spPr>
-          <a:xfrm>
-            <a:off x="8595360" y="2926080"/>
-            <a:ext cx="3044952" cy="457200"/>
-          </a:xfrm>
-          <a:prstGeom prst="rect">
-            <a:avLst/>
-          </a:prstGeom>
-          <a:noFill/>
-          <a:ln/>
-        </p:spPr>
-        <p:txBody>
-          <a:bodyPr wrap="square" lIns="0" tIns="0" rIns="0" bIns="0" rtlCol="0" anchor="ctr"/>
-          <a:lstStyle/>
-          <a:p>
-            <a:pPr algn="l" indent="0" marL="0">
-              <a:buNone/>
-            </a:pPr>
-            <a:r>
-              <a:rPr lang="en-US" sz="1800" b="1" dirty="0">
-                <a:solidFill>
-                  <a:schemeClr val="tx2"/>
-                </a:solidFill>
-              </a:rPr>
-              <a:t>Plain-words answers</a:t>
-            </a:r>
-            <a:endParaRPr lang="en-US" sz="1800" dirty="0"/>
-          </a:p>
-        </p:txBody>
-      </p:sp>
-      <p:sp>
-        <p:nvSpPr>
-          <p:cNvPr id="10" name="Text 7"/>
-          <p:cNvSpPr txBox="1"/>
-          <p:nvPr/>
-        </p:nvSpPr>
-        <p:spPr>
-          <a:xfrm>
-            <a:off x="8595360" y="3429000"/>
-            <a:ext cx="3044952" cy="914400"/>
-          </a:xfrm>
-          <a:prstGeom prst="rect">
-            <a:avLst/>
-          </a:prstGeom>
-          <a:noFill/>
-          <a:ln/>
-        </p:spPr>
-        <p:txBody>
-          <a:bodyPr wrap="square" lIns="0" tIns="0" rIns="0" bIns="0" rtlCol="0" anchor="t"/>
-          <a:lstStyle/>
-          <a:p>
-            <a:pPr algn="l" indent="0" marL="0">
-              <a:buNone/>
-            </a:pPr>
-            <a:r>
-              <a:rPr lang="en-US" sz="1400" dirty="0">
-                <a:solidFill>
-                  <a:schemeClr val="tx1"/>
-                </a:solidFill>
-              </a:rPr>
-              <a:t>“Should we expedite ORD-008?” Expedite now: saves 7 working days, adds 3 elsewhere. A projection, not a promise.</a:t>
-            </a:r>
-            <a:endParaRPr lang="en-US" sz="1400" dirty="0"/>
-          </a:p>
-        </p:txBody>
-      </p:sp>
-      <p:sp>
-        <p:nvSpPr>
-          <p:cNvPr id="11" name="Step 3"/>
-          <p:cNvSpPr txBox="1"/>
-          <p:nvPr/>
-        </p:nvSpPr>
-        <p:spPr>
-          <a:xfrm>
-            <a:off x="8001000" y="4480560"/>
-            <a:ext cx="457200" cy="457200"/>
-          </a:xfrm>
-          <a:prstGeom prst="ellipse">
-            <a:avLst/>
-          </a:prstGeom>
-          <a:solidFill>
-            <a:schemeClr val="accent2"/>
-          </a:solidFill>
-          <a:ln/>
-        </p:spPr>
-        <p:txBody>
-          <a:bodyPr wrap="square" lIns="0" tIns="0" rIns="0" bIns="0" rtlCol="0" anchor="ctr"/>
-          <a:lstStyle/>
-          <a:p>
-            <a:pPr algn="ctr" indent="0" marL="0">
-              <a:buNone/>
-            </a:pPr>
-            <a:r>
-              <a:rPr lang="en-US" sz="1800" b="1" dirty="0">
-                <a:solidFill>
-                  <a:schemeClr val="bg1"/>
-                </a:solidFill>
-              </a:rPr>
-              <a:t>3</a:t>
-            </a:r>
-            <a:endParaRPr lang="en-US" sz="1800" dirty="0"/>
-          </a:p>
-        </p:txBody>
-      </p:sp>
-      <p:sp>
-        <p:nvSpPr>
-          <p:cNvPr id="12" name="Text 9"/>
-          <p:cNvSpPr txBox="1"/>
-          <p:nvPr/>
-        </p:nvSpPr>
-        <p:spPr>
-          <a:xfrm>
-            <a:off x="8595360" y="4480560"/>
-            <a:ext cx="3044952" cy="457200"/>
-          </a:xfrm>
-          <a:prstGeom prst="rect">
-            <a:avLst/>
-          </a:prstGeom>
-          <a:noFill/>
-          <a:ln/>
-        </p:spPr>
-        <p:txBody>
-          <a:bodyPr wrap="square" lIns="0" tIns="0" rIns="0" bIns="0" rtlCol="0" anchor="ctr"/>
-          <a:lstStyle/>
-          <a:p>
-            <a:pPr algn="l" indent="0" marL="0">
-              <a:buNone/>
-            </a:pPr>
-            <a:r>
-              <a:rPr lang="en-US" sz="1800" b="1" dirty="0">
-                <a:solidFill>
-                  <a:schemeClr val="tx2"/>
-                </a:solidFill>
-              </a:rPr>
-              <a:t>One click to the rows</a:t>
-            </a:r>
-            <a:endParaRPr lang="en-US" sz="1800" dirty="0"/>
-          </a:p>
-        </p:txBody>
-      </p:sp>
-      <p:sp>
-        <p:nvSpPr>
-          <p:cNvPr id="13" name="Text 10"/>
-          <p:cNvSpPr txBox="1"/>
-          <p:nvPr/>
-        </p:nvSpPr>
-        <p:spPr>
-          <a:xfrm>
-            <a:off x="8595360" y="4983480"/>
-            <a:ext cx="3044952" cy="914400"/>
-          </a:xfrm>
-          <a:prstGeom prst="rect">
-            <a:avLst/>
-          </a:prstGeom>
-          <a:noFill/>
-          <a:ln/>
-        </p:spPr>
-        <p:txBody>
-          <a:bodyPr wrap="square" lIns="0" tIns="0" rIns="0" bIns="0" rtlCol="0" anchor="t"/>
-          <a:lstStyle/>
-          <a:p>
-            <a:pPr algn="l" indent="0" marL="0">
-              <a:buNone/>
-            </a:pPr>
-            <a:r>
-              <a:rPr lang="en-US" sz="1400" dirty="0">
-                <a:solidFill>
-                  <a:schemeClr val="tx1"/>
-                </a:solidFill>
-              </a:rPr>
-              <a:t>Show detail, Sources and the tool used sit under every answer.</a:t>
+              <a:t>The language model never does the arithmetic.</a:t>
             </a:r>
             <a:endParaRPr lang="en-US" sz="1400" dirty="0"/>
           </a:p>
@@ -5312,43 +4797,27 @@
               <a:buNone/>
             </a:pPr>
             <a:r>
-              <a:rPr lang="en-US" sz="3400" b="1" dirty="0">
+              <a:rPr lang="en-US" sz="3200" b="1" dirty="0">
                 <a:solidFill>
                   <a:schemeClr val="tx2"/>
                 </a:solidFill>
               </a:rPr>
-              <a:t>What we measured, and what we haven't</a:t>
-            </a:r>
-            <a:endParaRPr lang="en-US" sz="3400" dirty="0"/>
-          </a:p>
-        </p:txBody>
-      </p:sp>
-      <p:graphicFrame>
-        <p:nvGraphicFramePr>
-          <p:cNvPr id="3" name="Chart 0" descr=""/>
-          <p:cNvGraphicFramePr/>
-          <p:nvPr/>
-        </p:nvGraphicFramePr>
-        <p:xfrm>
-          <a:off x="548640" y="1325880"/>
-          <a:ext cx="6126480" cy="4023360"/>
-        </p:xfrm>
-        <a:graphic xmlns:a="http://schemas.openxmlformats.org/drawingml/2006/main">
-          <a:graphicData uri="http://schemas.openxmlformats.org/drawingml/2006/chart">
-            <c:chart xmlns:c="http://schemas.openxmlformats.org/drawingml/2006/chart" r:id="rId1"/>
-          </a:graphicData>
-        </a:graphic>
-      </p:graphicFrame>
-      <p:sp>
-        <p:nvSpPr>
-          <p:cNvPr id="4" name="Stat 25 / 36"/>
-          <p:cNvSpPr txBox="1"/>
-          <p:nvPr/>
-        </p:nvSpPr>
-        <p:spPr>
-          <a:xfrm>
-            <a:off x="7040880" y="1325880"/>
-            <a:ext cx="2011680" cy="822960"/>
+              <a:t>It gets things done, and only after you confirm</a:t>
+            </a:r>
+            <a:endParaRPr lang="en-US" sz="3200" dirty="0"/>
+          </a:p>
+        </p:txBody>
+      </p:sp>
+      <p:sp>
+        <p:nvSpPr>
+          <p:cNvPr id="3" name="Label"/>
+          <p:cNvSpPr txBox="1"/>
+          <p:nvPr/>
+        </p:nvSpPr>
+        <p:spPr>
+          <a:xfrm>
+            <a:off x="548640" y="1280160"/>
+            <a:ext cx="3840480" cy="411480"/>
           </a:xfrm>
           <a:prstGeom prst="rect">
             <a:avLst/>
@@ -5364,349 +4833,85 @@
               <a:buNone/>
             </a:pPr>
             <a:r>
-              <a:rPr lang="en-US" sz="3800" b="1" dirty="0">
-                <a:solidFill>
-                  <a:schemeClr val="accent1"/>
-                </a:solidFill>
-                <a:latin typeface="Cambria" pitchFamily="34" charset="0"/>
-                <a:ea typeface="Cambria" pitchFamily="34" charset="-122"/>
-                <a:cs typeface="Cambria" pitchFamily="34" charset="-120"/>
-              </a:rPr>
-              <a:t>25 / 36</a:t>
-            </a:r>
-            <a:endParaRPr lang="en-US" sz="3800" dirty="0"/>
-          </a:p>
-        </p:txBody>
-      </p:sp>
-      <p:sp>
-        <p:nvSpPr>
-          <p:cNvPr id="5" name="Text 2"/>
-          <p:cNvSpPr txBox="1"/>
-          <p:nvPr/>
-        </p:nvSpPr>
-        <p:spPr>
-          <a:xfrm>
-            <a:off x="9098280" y="1325880"/>
-            <a:ext cx="2560320" cy="822960"/>
-          </a:xfrm>
-          <a:prstGeom prst="rect">
-            <a:avLst/>
-          </a:prstGeom>
-          <a:noFill/>
-          <a:ln/>
-        </p:spPr>
-        <p:txBody>
-          <a:bodyPr wrap="square" lIns="0" tIns="0" rIns="0" bIns="0" rtlCol="0" anchor="ctr"/>
-          <a:lstStyle/>
-          <a:p>
-            <a:pPr algn="l" indent="0" marL="0">
-              <a:buNone/>
-            </a:pPr>
-            <a:r>
-              <a:rPr lang="en-US" sz="1400" dirty="0">
-                <a:solidFill>
-                  <a:schemeClr val="tx1"/>
-                </a:solidFill>
-              </a:rPr>
-              <a:t>first pass, nothing fixed yet (69%): the honest figure</a:t>
-            </a:r>
-            <a:endParaRPr lang="en-US" sz="1400" dirty="0"/>
-          </a:p>
-        </p:txBody>
-      </p:sp>
-      <p:sp>
-        <p:nvSpPr>
-          <p:cNvPr id="6" name="Stat 18 / 21"/>
-          <p:cNvSpPr txBox="1"/>
-          <p:nvPr/>
-        </p:nvSpPr>
-        <p:spPr>
-          <a:xfrm>
-            <a:off x="7040880" y="2240280"/>
-            <a:ext cx="2011680" cy="822960"/>
-          </a:xfrm>
-          <a:prstGeom prst="rect">
-            <a:avLst/>
-          </a:prstGeom>
-          <a:noFill/>
-          <a:ln/>
-        </p:spPr>
-        <p:txBody>
-          <a:bodyPr wrap="square" lIns="0" tIns="0" rIns="0" bIns="0" rtlCol="0" anchor="ctr"/>
-          <a:lstStyle/>
-          <a:p>
-            <a:pPr algn="l" indent="0" marL="0">
-              <a:buNone/>
-            </a:pPr>
-            <a:r>
-              <a:rPr lang="en-US" sz="3800" b="1" dirty="0">
-                <a:solidFill>
-                  <a:schemeClr val="accent1"/>
-                </a:solidFill>
-                <a:latin typeface="Cambria" pitchFamily="34" charset="0"/>
-                <a:ea typeface="Cambria" pitchFamily="34" charset="-122"/>
-                <a:cs typeface="Cambria" pitchFamily="34" charset="-120"/>
-              </a:rPr>
-              <a:t>18 / 21</a:t>
-            </a:r>
-            <a:endParaRPr lang="en-US" sz="3800" dirty="0"/>
-          </a:p>
-        </p:txBody>
-      </p:sp>
-      <p:sp>
-        <p:nvSpPr>
-          <p:cNvPr id="7" name="Text 4"/>
-          <p:cNvSpPr txBox="1"/>
-          <p:nvPr/>
-        </p:nvSpPr>
-        <p:spPr>
-          <a:xfrm>
-            <a:off x="9098280" y="2240280"/>
-            <a:ext cx="2560320" cy="822960"/>
-          </a:xfrm>
-          <a:prstGeom prst="rect">
-            <a:avLst/>
-          </a:prstGeom>
-          <a:noFill/>
-          <a:ln/>
-        </p:spPr>
-        <p:txBody>
-          <a:bodyPr wrap="square" lIns="0" tIns="0" rIns="0" bIns="0" rtlCol="0" anchor="ctr"/>
-          <a:lstStyle/>
-          <a:p>
-            <a:pPr algn="l" indent="0" marL="0">
-              <a:buNone/>
-            </a:pPr>
-            <a:r>
-              <a:rPr lang="en-US" sz="1400" dirty="0">
-                <a:solidFill>
-                  <a:schemeClr val="tx1"/>
-                </a:solidFill>
-              </a:rPr>
-              <a:t>held-out questions with new wording (86%)</a:t>
-            </a:r>
-            <a:endParaRPr lang="en-US" sz="1400" dirty="0"/>
-          </a:p>
-        </p:txBody>
-      </p:sp>
-      <p:sp>
-        <p:nvSpPr>
-          <p:cNvPr id="8" name="Stat 5 / 5"/>
-          <p:cNvSpPr txBox="1"/>
-          <p:nvPr/>
-        </p:nvSpPr>
-        <p:spPr>
-          <a:xfrm>
-            <a:off x="7040880" y="3154680"/>
-            <a:ext cx="2011680" cy="822960"/>
-          </a:xfrm>
-          <a:prstGeom prst="rect">
-            <a:avLst/>
-          </a:prstGeom>
-          <a:noFill/>
-          <a:ln/>
-        </p:spPr>
-        <p:txBody>
-          <a:bodyPr wrap="square" lIns="0" tIns="0" rIns="0" bIns="0" rtlCol="0" anchor="ctr"/>
-          <a:lstStyle/>
-          <a:p>
-            <a:pPr algn="l" indent="0" marL="0">
-              <a:buNone/>
-            </a:pPr>
-            <a:r>
-              <a:rPr lang="en-US" sz="3800" b="1" dirty="0">
-                <a:solidFill>
-                  <a:schemeClr val="accent4"/>
-                </a:solidFill>
-                <a:latin typeface="Cambria" pitchFamily="34" charset="0"/>
-                <a:ea typeface="Cambria" pitchFamily="34" charset="-122"/>
-                <a:cs typeface="Cambria" pitchFamily="34" charset="-120"/>
-              </a:rPr>
-              <a:t>5 / 5</a:t>
-            </a:r>
-            <a:endParaRPr lang="en-US" sz="3800" dirty="0"/>
-          </a:p>
-        </p:txBody>
-      </p:sp>
-      <p:sp>
-        <p:nvSpPr>
-          <p:cNvPr id="9" name="Text 6"/>
-          <p:cNvSpPr txBox="1"/>
-          <p:nvPr/>
-        </p:nvSpPr>
-        <p:spPr>
-          <a:xfrm>
-            <a:off x="9098280" y="3154680"/>
-            <a:ext cx="2560320" cy="822960"/>
-          </a:xfrm>
-          <a:prstGeom prst="rect">
-            <a:avLst/>
-          </a:prstGeom>
-          <a:noFill/>
-          <a:ln/>
-        </p:spPr>
-        <p:txBody>
-          <a:bodyPr wrap="square" lIns="0" tIns="0" rIns="0" bIns="0" rtlCol="0" anchor="ctr"/>
-          <a:lstStyle/>
-          <a:p>
-            <a:pPr algn="l" indent="0" marL="0">
-              <a:buNone/>
-            </a:pPr>
-            <a:r>
-              <a:rPr lang="en-US" sz="1400" dirty="0">
-                <a:solidFill>
-                  <a:schemeClr val="tx1"/>
-                </a:solidFill>
-              </a:rPr>
-              <a:t>planted events found by discovery, 1 to 5 days after each began</a:t>
-            </a:r>
-            <a:endParaRPr lang="en-US" sz="1400" dirty="0"/>
-          </a:p>
-        </p:txBody>
-      </p:sp>
-      <p:sp>
-        <p:nvSpPr>
-          <p:cNvPr id="10" name="Stat 14 / 14"/>
-          <p:cNvSpPr txBox="1"/>
-          <p:nvPr/>
-        </p:nvSpPr>
-        <p:spPr>
-          <a:xfrm>
-            <a:off x="7040880" y="4069080"/>
-            <a:ext cx="2011680" cy="822960"/>
-          </a:xfrm>
-          <a:prstGeom prst="rect">
-            <a:avLst/>
-          </a:prstGeom>
-          <a:noFill/>
-          <a:ln/>
-        </p:spPr>
-        <p:txBody>
-          <a:bodyPr wrap="square" lIns="0" tIns="0" rIns="0" bIns="0" rtlCol="0" anchor="ctr"/>
-          <a:lstStyle/>
-          <a:p>
-            <a:pPr algn="l" indent="0" marL="0">
-              <a:buNone/>
-            </a:pPr>
-            <a:r>
-              <a:rPr lang="en-US" sz="3800" b="1" dirty="0">
-                <a:solidFill>
-                  <a:schemeClr val="accent4"/>
-                </a:solidFill>
-                <a:latin typeface="Cambria" pitchFamily="34" charset="0"/>
-                <a:ea typeface="Cambria" pitchFamily="34" charset="-122"/>
-                <a:cs typeface="Cambria" pitchFamily="34" charset="-120"/>
-              </a:rPr>
-              <a:t>14 / 14</a:t>
-            </a:r>
-            <a:endParaRPr lang="en-US" sz="3800" dirty="0"/>
-          </a:p>
-        </p:txBody>
-      </p:sp>
-      <p:sp>
-        <p:nvSpPr>
-          <p:cNvPr id="11" name="Text 8"/>
-          <p:cNvSpPr txBox="1"/>
-          <p:nvPr/>
-        </p:nvSpPr>
-        <p:spPr>
-          <a:xfrm>
-            <a:off x="9098280" y="4069080"/>
-            <a:ext cx="2560320" cy="822960"/>
-          </a:xfrm>
-          <a:prstGeom prst="rect">
-            <a:avLst/>
-          </a:prstGeom>
-          <a:noFill/>
-          <a:ln/>
-        </p:spPr>
-        <p:txBody>
-          <a:bodyPr wrap="square" lIns="0" tIns="0" rIns="0" bIns="0" rtlCol="0" anchor="ctr"/>
-          <a:lstStyle/>
-          <a:p>
-            <a:pPr algn="l" indent="0" marL="0">
-              <a:buNone/>
-            </a:pPr>
-            <a:r>
-              <a:rPr lang="en-US" sz="1400" dirty="0">
-                <a:solidFill>
-                  <a:schemeClr val="tx1"/>
-                </a:solidFill>
-              </a:rPr>
-              <a:t>feasibility ranges that contained the real finish</a:t>
-            </a:r>
-            <a:endParaRPr lang="en-US" sz="1400" dirty="0"/>
-          </a:p>
-        </p:txBody>
-      </p:sp>
-      <p:sp>
-        <p:nvSpPr>
-          <p:cNvPr id="12" name="Stats caption"/>
-          <p:cNvSpPr txBox="1"/>
-          <p:nvPr/>
-        </p:nvSpPr>
-        <p:spPr>
-          <a:xfrm>
-            <a:off x="7040880" y="5029200"/>
-            <a:ext cx="4617720" cy="365760"/>
-          </a:xfrm>
-          <a:prstGeom prst="rect">
-            <a:avLst/>
-          </a:prstGeom>
-          <a:noFill/>
-          <a:ln/>
-        </p:spPr>
-        <p:txBody>
-          <a:bodyPr wrap="square" lIns="0" tIns="0" rIns="0" bIns="0" rtlCol="0" anchor="t"/>
-          <a:lstStyle/>
-          <a:p>
-            <a:pPr algn="l" indent="0" marL="0">
-              <a:buNone/>
-            </a:pPr>
-            <a:r>
-              <a:rPr lang="en-US" sz="1100" dirty="0">
-                <a:solidFill>
-                  <a:schemeClr val="accent5"/>
-                </a:solidFill>
-              </a:rPr>
-              <a:t>Dashboard chat. The last two come from our own simulator: internal consistency, not real-world accuracy.</a:t>
-            </a:r>
-            <a:endParaRPr lang="en-US" sz="1100" dirty="0"/>
-          </a:p>
-        </p:txBody>
-      </p:sp>
-      <p:sp>
-        <p:nvSpPr>
-          <p:cNvPr id="13" name="Not measured banner"/>
+              <a:rPr lang="en-US" sz="1600" b="1" dirty="0">
+                <a:solidFill>
+                  <a:schemeClr val="tx2"/>
+                </a:solidFill>
+              </a:rPr>
+              <a:t>Preview: the card states the worst case</a:t>
+            </a:r>
+            <a:endParaRPr lang="en-US" sz="1600" dirty="0"/>
+          </a:p>
+        </p:txBody>
+      </p:sp>
+      <p:sp>
+        <p:nvSpPr>
+          <p:cNvPr id="4" name="Confirmation card screenshot frame"/>
           <p:cNvSpPr/>
           <p:nvPr/>
         </p:nvSpPr>
         <p:spPr>
           <a:xfrm>
-            <a:off x="548640" y="5715000"/>
-            <a:ext cx="11091672" cy="548640"/>
+            <a:off x="502920" y="1783080"/>
+            <a:ext cx="3397207" cy="3840480"/>
           </a:xfrm>
           <a:prstGeom prst="roundRect">
             <a:avLst>
-              <a:gd name="adj" fmla="val 13333"/>
+              <a:gd name="adj" fmla="val 1615"/>
             </a:avLst>
           </a:prstGeom>
           <a:solidFill>
-            <a:schemeClr val="tx2"/>
+            <a:schemeClr val="bg1"/>
           </a:solidFill>
-          <a:ln/>
-        </p:spPr>
-      </p:sp>
-      <p:sp>
-        <p:nvSpPr>
-          <p:cNvPr id="14" name="Text 11"/>
-          <p:cNvSpPr txBox="1"/>
-          <p:nvPr/>
-        </p:nvSpPr>
-        <p:spPr>
-          <a:xfrm>
-            <a:off x="777240" y="5715000"/>
-            <a:ext cx="10698480" cy="548640"/>
+          <a:ln w="12700">
+            <a:solidFill>
+              <a:schemeClr val="bg2"/>
+            </a:solidFill>
+            <a:prstDash val="solid"/>
+          </a:ln>
+          <a:effectLst>
+            <a:outerShdw sx="100000" sy="100000" kx="0" ky="0" algn="bl" rotWithShape="0" blurRad="101600" dist="25400" dir="5400000">
+              <a:srgbClr val="000000">
+                <a:alpha val="16000"/>
+              </a:srgbClr>
+            </a:outerShdw>
+          </a:effectLst>
+        </p:spPr>
+      </p:sp>
+      <p:pic>
+        <p:nvPicPr>
+          <p:cNvPr id="5" name="Confirmation card screenshot" descr="Chat: 'Chase ORD-120' answered with a confirmation card showing the recipient, an editable message and the worst case">    </p:cNvPr>
+          <p:cNvPicPr>
+            <a:picLocks noChangeAspect="1"/>
+          </p:cNvPicPr>
+          <p:nvPr/>
+        </p:nvPicPr>
+        <p:blipFill>
+          <a:blip r:embed="rId1"/>
+          <a:stretch>
+            <a:fillRect/>
+          </a:stretch>
+        </p:blipFill>
+        <p:spPr>
+          <a:xfrm>
+            <a:off x="548640" y="1828800"/>
+            <a:ext cx="3305767" cy="3749040"/>
+          </a:xfrm>
+          <a:prstGeom prst="rect">
+            <a:avLst/>
+          </a:prstGeom>
+        </p:spPr>
+      </p:pic>
+      <p:sp>
+        <p:nvSpPr>
+          <p:cNvPr id="6" name="Label"/>
+          <p:cNvSpPr txBox="1"/>
+          <p:nvPr/>
+        </p:nvSpPr>
+        <p:spPr>
+          <a:xfrm>
+            <a:off x="4220167" y="1280160"/>
+            <a:ext cx="3840480" cy="411480"/>
           </a:xfrm>
           <a:prstGeom prst="rect">
             <a:avLst/>
@@ -5722,25 +4927,238 @@
               <a:buNone/>
             </a:pPr>
             <a:r>
-              <a:rPr lang="en-US" sz="1400" b="1" dirty="0">
-                <a:solidFill>
-                  <a:schemeClr val="accent3"/>
-                </a:solidFill>
-              </a:rPr>
-              <a:t>Not measured yet: </a:t>
-            </a:r>
-            <a:pPr algn="l" indent="0" marL="0">
-              <a:buNone/>
-            </a:pPr>
-            <a:r>
-              <a:rPr lang="en-US" sz="1400" dirty="0">
-                <a:solidFill>
-                  <a:schemeClr val="bg1"/>
-                </a:solidFill>
-              </a:rPr>
-              <a:t>accuracy of the live backend (OpenAI model + MySQL) on these questions. We will run it once and report that as first-pass.</a:t>
-            </a:r>
-            <a:endParaRPr lang="en-US" sz="1400" dirty="0"/>
+              <a:rPr lang="en-US" sz="1600" b="1" dirty="0">
+                <a:solidFill>
+                  <a:schemeClr val="tx2"/>
+                </a:solidFill>
+              </a:rPr>
+              <a:t>Then logged, and some things refused</a:t>
+            </a:r>
+            <a:endParaRPr lang="en-US" sz="1600" dirty="0"/>
+          </a:p>
+        </p:txBody>
+      </p:sp>
+      <p:sp>
+        <p:nvSpPr>
+          <p:cNvPr id="7" name="Logged and refused screenshot frame"/>
+          <p:cNvSpPr/>
+          <p:nvPr/>
+        </p:nvSpPr>
+        <p:spPr>
+          <a:xfrm>
+            <a:off x="4174447" y="1783080"/>
+            <a:ext cx="3180537" cy="3840480"/>
+          </a:xfrm>
+          <a:prstGeom prst="roundRect">
+            <a:avLst>
+              <a:gd name="adj" fmla="val 1725"/>
+            </a:avLst>
+          </a:prstGeom>
+          <a:solidFill>
+            <a:schemeClr val="bg1"/>
+          </a:solidFill>
+          <a:ln w="12700">
+            <a:solidFill>
+              <a:schemeClr val="bg2"/>
+            </a:solidFill>
+            <a:prstDash val="solid"/>
+          </a:ln>
+          <a:effectLst>
+            <a:outerShdw sx="100000" sy="100000" kx="0" ky="0" algn="bl" rotWithShape="0" blurRad="101600" dist="25400" dir="5400000">
+              <a:srgbClr val="000000">
+                <a:alpha val="16000"/>
+              </a:srgbClr>
+            </a:outerShdw>
+          </a:effectLst>
+        </p:spPr>
+      </p:sp>
+      <p:pic>
+        <p:nvPicPr>
+          <p:cNvPr id="8" name="Logged and refused screenshot" descr="Chat: the chase-up logged with 'nothing was actually sent', then 'Delete ORD-005' refused">    </p:cNvPr>
+          <p:cNvPicPr>
+            <a:picLocks noChangeAspect="1"/>
+          </p:cNvPicPr>
+          <p:nvPr/>
+        </p:nvPicPr>
+        <p:blipFill>
+          <a:blip r:embed="rId2"/>
+          <a:stretch>
+            <a:fillRect/>
+          </a:stretch>
+        </p:blipFill>
+        <p:spPr>
+          <a:xfrm>
+            <a:off x="4220167" y="1828800"/>
+            <a:ext cx="3089097" cy="3749040"/>
+          </a:xfrm>
+          <a:prstGeom prst="rect">
+            <a:avLst/>
+          </a:prstGeom>
+        </p:spPr>
+      </p:pic>
+      <p:sp>
+        <p:nvSpPr>
+          <p:cNvPr id="9" name="Label"/>
+          <p:cNvSpPr txBox="1"/>
+          <p:nvPr/>
+        </p:nvSpPr>
+        <p:spPr>
+          <a:xfrm>
+            <a:off x="7812183" y="1280160"/>
+            <a:ext cx="3828129" cy="411480"/>
+          </a:xfrm>
+          <a:prstGeom prst="rect">
+            <a:avLst/>
+          </a:prstGeom>
+          <a:noFill/>
+          <a:ln/>
+        </p:spPr>
+        <p:txBody>
+          <a:bodyPr wrap="square" lIns="0" tIns="0" rIns="0" bIns="0" rtlCol="0" anchor="ctr"/>
+          <a:lstStyle/>
+          <a:p>
+            <a:pPr algn="l" indent="0" marL="0">
+              <a:buNone/>
+            </a:pPr>
+            <a:r>
+              <a:rPr lang="en-US" sz="1800" b="1" dirty="0">
+                <a:solidFill>
+                  <a:schemeClr val="tx2"/>
+                </a:solidFill>
+              </a:rPr>
+              <a:t>Preview, confirm, log</a:t>
+            </a:r>
+            <a:endParaRPr lang="en-US" sz="1800" dirty="0"/>
+          </a:p>
+        </p:txBody>
+      </p:sp>
+      <p:sp>
+        <p:nvSpPr>
+          <p:cNvPr id="10" name="Safety rules"/>
+          <p:cNvSpPr txBox="1"/>
+          <p:nvPr/>
+        </p:nvSpPr>
+        <p:spPr>
+          <a:xfrm>
+            <a:off x="7812183" y="1783080"/>
+            <a:ext cx="3828129" cy="3931920"/>
+          </a:xfrm>
+          <a:prstGeom prst="rect">
+            <a:avLst/>
+          </a:prstGeom>
+          <a:noFill/>
+          <a:ln/>
+        </p:spPr>
+        <p:txBody>
+          <a:bodyPr wrap="square" lIns="0" tIns="0" rIns="0" bIns="0" rtlCol="0" anchor="t"/>
+          <a:lstStyle/>
+          <a:p>
+            <a:pPr algn="l" marL="203200" indent="-203200">
+              <a:spcAft>
+                <a:spcPts val="1100"/>
+              </a:spcAft>
+              <a:buSzPct val="100000"/>
+              <a:buChar char="•"/>
+            </a:pPr>
+            <a:r>
+              <a:rPr lang="en-US" sz="1500" dirty="0">
+                <a:solidFill>
+                  <a:schemeClr val="tx1"/>
+                </a:solidFill>
+              </a:rPr>
+              <a:t>Nothing is sent until you press Confirm. In the demo it is only logged.</a:t>
+            </a:r>
+            <a:endParaRPr lang="en-US" sz="1500" dirty="0"/>
+          </a:p>
+          <a:p>
+            <a:pPr algn="l" marL="203200" indent="-203200">
+              <a:spcAft>
+                <a:spcPts val="1100"/>
+              </a:spcAft>
+              <a:buSzPct val="100000"/>
+              <a:buChar char="•"/>
+            </a:pPr>
+            <a:r>
+              <a:rPr lang="en-US" sz="1500" dirty="0">
+                <a:solidFill>
+                  <a:schemeClr val="tx1"/>
+                </a:solidFill>
+              </a:rPr>
+              <a:t>A confirmation key covers one order and one text, expires in 15 minutes, and confirming twice does nothing.</a:t>
+            </a:r>
+            <a:endParaRPr lang="en-US" sz="1500" dirty="0"/>
+          </a:p>
+          <a:p>
+            <a:pPr algn="l" marL="203200" indent="-203200">
+              <a:spcAft>
+                <a:spcPts val="1100"/>
+              </a:spcAft>
+              <a:buSzPct val="100000"/>
+              <a:buChar char="•"/>
+            </a:pPr>
+            <a:r>
+              <a:rPr lang="en-US" sz="1500" dirty="0">
+                <a:solidFill>
+                  <a:schemeClr val="tx1"/>
+                </a:solidFill>
+              </a:rPr>
+              <a:t>It cannot cancel, delete or change an order, and says so.</a:t>
+            </a:r>
+            <a:endParaRPr lang="en-US" sz="1500" dirty="0"/>
+          </a:p>
+          <a:p>
+            <a:pPr algn="l" marL="203200" indent="-203200">
+              <a:spcAft>
+                <a:spcPts val="1100"/>
+              </a:spcAft>
+              <a:buSzPct val="100000"/>
+              <a:buChar char="•"/>
+            </a:pPr>
+            <a:r>
+              <a:rPr lang="en-US" sz="1500" dirty="0">
+                <a:solidFill>
+                  <a:schemeClr val="tx1"/>
+                </a:solidFill>
+              </a:rPr>
+              <a:t>It speaks first rarely: one briefing at 07:00, plus watches you set and a stage that misses its target 3 days running.</a:t>
+            </a:r>
+            <a:endParaRPr lang="en-US" sz="1500" dirty="0"/>
+          </a:p>
+        </p:txBody>
+      </p:sp>
+      <p:sp>
+        <p:nvSpPr>
+          <p:cNvPr id="11" name="Docs pointer"/>
+          <p:cNvSpPr txBox="1"/>
+          <p:nvPr/>
+        </p:nvSpPr>
+        <p:spPr>
+          <a:xfrm>
+            <a:off x="548640" y="5943600"/>
+            <a:ext cx="11091672" cy="320040"/>
+          </a:xfrm>
+          <a:prstGeom prst="rect">
+            <a:avLst/>
+          </a:prstGeom>
+          <a:noFill/>
+          <a:ln/>
+        </p:spPr>
+        <p:txBody>
+          <a:bodyPr wrap="square" lIns="0" tIns="0" rIns="0" bIns="0" rtlCol="0" anchor="t"/>
+          <a:lstStyle/>
+          <a:p>
+            <a:pPr algn="l" indent="0" marL="0">
+              <a:buNone/>
+            </a:pPr>
+            <a:r>
+              <a:rPr lang="en-US" sz="1100" dirty="0">
+                <a:solidFill>
+                  <a:schemeClr val="accent5"/>
+                </a:solidFill>
+              </a:rPr>
+              <a:t>Every action, its worst case and what it cannot do: docs/actions_and_limits.md. What may interrupt the manager: docs/alert_triggers.md.</a:t>
+            </a:r>
+            <a:endParaRPr lang="en-US" sz="1100" dirty="0"/>
           </a:p>
         </p:txBody>
       </p:sp>
@@ -5841,14 +5259,543 @@
               <a:buNone/>
             </a:pPr>
             <a:r>
-              <a:rPr lang="en-US" sz="3400" b="1" dirty="0">
+              <a:rPr lang="en-US" sz="3200" b="1" dirty="0">
                 <a:solidFill>
                   <a:schemeClr val="tx2"/>
                 </a:solidFill>
               </a:rPr>
+              <a:t>What we measured, and what we haven't</a:t>
+            </a:r>
+            <a:endParaRPr lang="en-US" sz="3200" dirty="0"/>
+          </a:p>
+        </p:txBody>
+      </p:sp>
+      <p:graphicFrame>
+        <p:nvGraphicFramePr>
+          <p:cNvPr id="3" name="Chart 0" descr=""/>
+          <p:cNvGraphicFramePr/>
+          <p:nvPr/>
+        </p:nvGraphicFramePr>
+        <p:xfrm>
+          <a:off x="548640" y="1325880"/>
+          <a:ext cx="6126480" cy="4023360"/>
+        </p:xfrm>
+        <a:graphic xmlns:a="http://schemas.openxmlformats.org/drawingml/2006/main">
+          <a:graphicData uri="http://schemas.openxmlformats.org/drawingml/2006/chart">
+            <c:chart xmlns:c="http://schemas.openxmlformats.org/drawingml/2006/chart" r:id="rId1"/>
+          </a:graphicData>
+        </a:graphic>
+      </p:graphicFrame>
+      <p:sp>
+        <p:nvSpPr>
+          <p:cNvPr id="4" name="Stat 25 / 36"/>
+          <p:cNvSpPr txBox="1"/>
+          <p:nvPr/>
+        </p:nvSpPr>
+        <p:spPr>
+          <a:xfrm>
+            <a:off x="7040880" y="1325880"/>
+            <a:ext cx="2011680" cy="822960"/>
+          </a:xfrm>
+          <a:prstGeom prst="rect">
+            <a:avLst/>
+          </a:prstGeom>
+          <a:noFill/>
+          <a:ln/>
+        </p:spPr>
+        <p:txBody>
+          <a:bodyPr wrap="square" lIns="0" tIns="0" rIns="0" bIns="0" rtlCol="0" anchor="ctr"/>
+          <a:lstStyle/>
+          <a:p>
+            <a:pPr algn="l" indent="0" marL="0">
+              <a:buNone/>
+            </a:pPr>
+            <a:r>
+              <a:rPr lang="en-US" sz="3800" b="1" dirty="0">
+                <a:solidFill>
+                  <a:schemeClr val="accent1"/>
+                </a:solidFill>
+                <a:latin typeface="Cambria" pitchFamily="34" charset="0"/>
+                <a:ea typeface="Cambria" pitchFamily="34" charset="-122"/>
+                <a:cs typeface="Cambria" pitchFamily="34" charset="-120"/>
+              </a:rPr>
+              <a:t>25 / 36</a:t>
+            </a:r>
+            <a:endParaRPr lang="en-US" sz="3800" dirty="0"/>
+          </a:p>
+        </p:txBody>
+      </p:sp>
+      <p:sp>
+        <p:nvSpPr>
+          <p:cNvPr id="5" name="Text 2"/>
+          <p:cNvSpPr txBox="1"/>
+          <p:nvPr/>
+        </p:nvSpPr>
+        <p:spPr>
+          <a:xfrm>
+            <a:off x="9098280" y="1325880"/>
+            <a:ext cx="2560320" cy="822960"/>
+          </a:xfrm>
+          <a:prstGeom prst="rect">
+            <a:avLst/>
+          </a:prstGeom>
+          <a:noFill/>
+          <a:ln/>
+        </p:spPr>
+        <p:txBody>
+          <a:bodyPr wrap="square" lIns="0" tIns="0" rIns="0" bIns="0" rtlCol="0" anchor="ctr"/>
+          <a:lstStyle/>
+          <a:p>
+            <a:pPr algn="l" indent="0" marL="0">
+              <a:buNone/>
+            </a:pPr>
+            <a:r>
+              <a:rPr lang="en-US" sz="1400" dirty="0">
+                <a:solidFill>
+                  <a:schemeClr val="tx1"/>
+                </a:solidFill>
+              </a:rPr>
+              <a:t>first pass, nothing fixed yet (69%): the honest figure</a:t>
+            </a:r>
+            <a:endParaRPr lang="en-US" sz="1400" dirty="0"/>
+          </a:p>
+        </p:txBody>
+      </p:sp>
+      <p:sp>
+        <p:nvSpPr>
+          <p:cNvPr id="6" name="Stat 18 / 21"/>
+          <p:cNvSpPr txBox="1"/>
+          <p:nvPr/>
+        </p:nvSpPr>
+        <p:spPr>
+          <a:xfrm>
+            <a:off x="7040880" y="2240280"/>
+            <a:ext cx="2011680" cy="822960"/>
+          </a:xfrm>
+          <a:prstGeom prst="rect">
+            <a:avLst/>
+          </a:prstGeom>
+          <a:noFill/>
+          <a:ln/>
+        </p:spPr>
+        <p:txBody>
+          <a:bodyPr wrap="square" lIns="0" tIns="0" rIns="0" bIns="0" rtlCol="0" anchor="ctr"/>
+          <a:lstStyle/>
+          <a:p>
+            <a:pPr algn="l" indent="0" marL="0">
+              <a:buNone/>
+            </a:pPr>
+            <a:r>
+              <a:rPr lang="en-US" sz="3800" b="1" dirty="0">
+                <a:solidFill>
+                  <a:schemeClr val="accent1"/>
+                </a:solidFill>
+                <a:latin typeface="Cambria" pitchFamily="34" charset="0"/>
+                <a:ea typeface="Cambria" pitchFamily="34" charset="-122"/>
+                <a:cs typeface="Cambria" pitchFamily="34" charset="-120"/>
+              </a:rPr>
+              <a:t>18 / 21</a:t>
+            </a:r>
+            <a:endParaRPr lang="en-US" sz="3800" dirty="0"/>
+          </a:p>
+        </p:txBody>
+      </p:sp>
+      <p:sp>
+        <p:nvSpPr>
+          <p:cNvPr id="7" name="Text 4"/>
+          <p:cNvSpPr txBox="1"/>
+          <p:nvPr/>
+        </p:nvSpPr>
+        <p:spPr>
+          <a:xfrm>
+            <a:off x="9098280" y="2240280"/>
+            <a:ext cx="2560320" cy="822960"/>
+          </a:xfrm>
+          <a:prstGeom prst="rect">
+            <a:avLst/>
+          </a:prstGeom>
+          <a:noFill/>
+          <a:ln/>
+        </p:spPr>
+        <p:txBody>
+          <a:bodyPr wrap="square" lIns="0" tIns="0" rIns="0" bIns="0" rtlCol="0" anchor="ctr"/>
+          <a:lstStyle/>
+          <a:p>
+            <a:pPr algn="l" indent="0" marL="0">
+              <a:buNone/>
+            </a:pPr>
+            <a:r>
+              <a:rPr lang="en-US" sz="1400" dirty="0">
+                <a:solidFill>
+                  <a:schemeClr val="tx1"/>
+                </a:solidFill>
+              </a:rPr>
+              <a:t>held-out questions with new wording (86%)</a:t>
+            </a:r>
+            <a:endParaRPr lang="en-US" sz="1400" dirty="0"/>
+          </a:p>
+        </p:txBody>
+      </p:sp>
+      <p:sp>
+        <p:nvSpPr>
+          <p:cNvPr id="8" name="Stat 5 / 5"/>
+          <p:cNvSpPr txBox="1"/>
+          <p:nvPr/>
+        </p:nvSpPr>
+        <p:spPr>
+          <a:xfrm>
+            <a:off x="7040880" y="3154680"/>
+            <a:ext cx="2011680" cy="822960"/>
+          </a:xfrm>
+          <a:prstGeom prst="rect">
+            <a:avLst/>
+          </a:prstGeom>
+          <a:noFill/>
+          <a:ln/>
+        </p:spPr>
+        <p:txBody>
+          <a:bodyPr wrap="square" lIns="0" tIns="0" rIns="0" bIns="0" rtlCol="0" anchor="ctr"/>
+          <a:lstStyle/>
+          <a:p>
+            <a:pPr algn="l" indent="0" marL="0">
+              <a:buNone/>
+            </a:pPr>
+            <a:r>
+              <a:rPr lang="en-US" sz="3800" b="1" dirty="0">
+                <a:solidFill>
+                  <a:schemeClr val="accent4"/>
+                </a:solidFill>
+                <a:latin typeface="Cambria" pitchFamily="34" charset="0"/>
+                <a:ea typeface="Cambria" pitchFamily="34" charset="-122"/>
+                <a:cs typeface="Cambria" pitchFamily="34" charset="-120"/>
+              </a:rPr>
+              <a:t>5 / 5</a:t>
+            </a:r>
+            <a:endParaRPr lang="en-US" sz="3800" dirty="0"/>
+          </a:p>
+        </p:txBody>
+      </p:sp>
+      <p:sp>
+        <p:nvSpPr>
+          <p:cNvPr id="9" name="Text 6"/>
+          <p:cNvSpPr txBox="1"/>
+          <p:nvPr/>
+        </p:nvSpPr>
+        <p:spPr>
+          <a:xfrm>
+            <a:off x="9098280" y="3154680"/>
+            <a:ext cx="2560320" cy="822960"/>
+          </a:xfrm>
+          <a:prstGeom prst="rect">
+            <a:avLst/>
+          </a:prstGeom>
+          <a:noFill/>
+          <a:ln/>
+        </p:spPr>
+        <p:txBody>
+          <a:bodyPr wrap="square" lIns="0" tIns="0" rIns="0" bIns="0" rtlCol="0" anchor="ctr"/>
+          <a:lstStyle/>
+          <a:p>
+            <a:pPr algn="l" indent="0" marL="0">
+              <a:buNone/>
+            </a:pPr>
+            <a:r>
+              <a:rPr lang="en-US" sz="1400" dirty="0">
+                <a:solidFill>
+                  <a:schemeClr val="tx1"/>
+                </a:solidFill>
+              </a:rPr>
+              <a:t>planted events found by discovery, 1 to 5 days after each began</a:t>
+            </a:r>
+            <a:endParaRPr lang="en-US" sz="1400" dirty="0"/>
+          </a:p>
+        </p:txBody>
+      </p:sp>
+      <p:sp>
+        <p:nvSpPr>
+          <p:cNvPr id="10" name="Stat 14 / 14"/>
+          <p:cNvSpPr txBox="1"/>
+          <p:nvPr/>
+        </p:nvSpPr>
+        <p:spPr>
+          <a:xfrm>
+            <a:off x="7040880" y="4069080"/>
+            <a:ext cx="2011680" cy="822960"/>
+          </a:xfrm>
+          <a:prstGeom prst="rect">
+            <a:avLst/>
+          </a:prstGeom>
+          <a:noFill/>
+          <a:ln/>
+        </p:spPr>
+        <p:txBody>
+          <a:bodyPr wrap="square" lIns="0" tIns="0" rIns="0" bIns="0" rtlCol="0" anchor="ctr"/>
+          <a:lstStyle/>
+          <a:p>
+            <a:pPr algn="l" indent="0" marL="0">
+              <a:buNone/>
+            </a:pPr>
+            <a:r>
+              <a:rPr lang="en-US" sz="3800" b="1" dirty="0">
+                <a:solidFill>
+                  <a:schemeClr val="accent4"/>
+                </a:solidFill>
+                <a:latin typeface="Cambria" pitchFamily="34" charset="0"/>
+                <a:ea typeface="Cambria" pitchFamily="34" charset="-122"/>
+                <a:cs typeface="Cambria" pitchFamily="34" charset="-120"/>
+              </a:rPr>
+              <a:t>14 / 14</a:t>
+            </a:r>
+            <a:endParaRPr lang="en-US" sz="3800" dirty="0"/>
+          </a:p>
+        </p:txBody>
+      </p:sp>
+      <p:sp>
+        <p:nvSpPr>
+          <p:cNvPr id="11" name="Text 8"/>
+          <p:cNvSpPr txBox="1"/>
+          <p:nvPr/>
+        </p:nvSpPr>
+        <p:spPr>
+          <a:xfrm>
+            <a:off x="9098280" y="4069080"/>
+            <a:ext cx="2560320" cy="822960"/>
+          </a:xfrm>
+          <a:prstGeom prst="rect">
+            <a:avLst/>
+          </a:prstGeom>
+          <a:noFill/>
+          <a:ln/>
+        </p:spPr>
+        <p:txBody>
+          <a:bodyPr wrap="square" lIns="0" tIns="0" rIns="0" bIns="0" rtlCol="0" anchor="ctr"/>
+          <a:lstStyle/>
+          <a:p>
+            <a:pPr algn="l" indent="0" marL="0">
+              <a:buNone/>
+            </a:pPr>
+            <a:r>
+              <a:rPr lang="en-US" sz="1400" dirty="0">
+                <a:solidFill>
+                  <a:schemeClr val="tx1"/>
+                </a:solidFill>
+              </a:rPr>
+              <a:t>feasibility ranges that contained the real finish</a:t>
+            </a:r>
+            <a:endParaRPr lang="en-US" sz="1400" dirty="0"/>
+          </a:p>
+        </p:txBody>
+      </p:sp>
+      <p:sp>
+        <p:nvSpPr>
+          <p:cNvPr id="12" name="Stats caption"/>
+          <p:cNvSpPr txBox="1"/>
+          <p:nvPr/>
+        </p:nvSpPr>
+        <p:spPr>
+          <a:xfrm>
+            <a:off x="7040880" y="5029200"/>
+            <a:ext cx="4617720" cy="365760"/>
+          </a:xfrm>
+          <a:prstGeom prst="rect">
+            <a:avLst/>
+          </a:prstGeom>
+          <a:noFill/>
+          <a:ln/>
+        </p:spPr>
+        <p:txBody>
+          <a:bodyPr wrap="square" lIns="0" tIns="0" rIns="0" bIns="0" rtlCol="0" anchor="t"/>
+          <a:lstStyle/>
+          <a:p>
+            <a:pPr algn="l" indent="0" marL="0">
+              <a:buNone/>
+            </a:pPr>
+            <a:r>
+              <a:rPr lang="en-US" sz="1100" dirty="0">
+                <a:solidFill>
+                  <a:schemeClr val="accent5"/>
+                </a:solidFill>
+              </a:rPr>
+              <a:t>Dashboard chat. The last two come from our own simulator: internal consistency, not real-world accuracy.</a:t>
+            </a:r>
+            <a:endParaRPr lang="en-US" sz="1100" dirty="0"/>
+          </a:p>
+        </p:txBody>
+      </p:sp>
+      <p:sp>
+        <p:nvSpPr>
+          <p:cNvPr id="13" name="Not measured banner"/>
+          <p:cNvSpPr/>
+          <p:nvPr/>
+        </p:nvSpPr>
+        <p:spPr>
+          <a:xfrm>
+            <a:off x="548640" y="5532120"/>
+            <a:ext cx="11091672" cy="749808"/>
+          </a:xfrm>
+          <a:prstGeom prst="roundRect">
+            <a:avLst>
+              <a:gd name="adj" fmla="val 9756"/>
+            </a:avLst>
+          </a:prstGeom>
+          <a:solidFill>
+            <a:schemeClr val="tx2"/>
+          </a:solidFill>
+          <a:ln/>
+        </p:spPr>
+      </p:sp>
+      <p:sp>
+        <p:nvSpPr>
+          <p:cNvPr id="14" name="Text 11"/>
+          <p:cNvSpPr txBox="1"/>
+          <p:nvPr/>
+        </p:nvSpPr>
+        <p:spPr>
+          <a:xfrm>
+            <a:off x="777240" y="5532120"/>
+            <a:ext cx="10698480" cy="749808"/>
+          </a:xfrm>
+          <a:prstGeom prst="rect">
+            <a:avLst/>
+          </a:prstGeom>
+          <a:noFill/>
+          <a:ln/>
+        </p:spPr>
+        <p:txBody>
+          <a:bodyPr wrap="square" lIns="0" tIns="0" rIns="0" bIns="0" rtlCol="0" anchor="ctr"/>
+          <a:lstStyle/>
+          <a:p>
+            <a:pPr algn="l" indent="0" marL="0">
+              <a:buNone/>
+            </a:pPr>
+            <a:r>
+              <a:rPr lang="en-US" sz="1400" b="1" dirty="0">
+                <a:solidFill>
+                  <a:schemeClr val="accent3"/>
+                </a:solidFill>
+              </a:rPr>
+              <a:t>Live backend (OpenAI model + MySQL): </a:t>
+            </a:r>
+            <a:pPr algn="l" indent="0" marL="0">
+              <a:buNone/>
+            </a:pPr>
+            <a:r>
+              <a:rPr lang="en-US" sz="1400" dirty="0">
+                <a:solidFill>
+                  <a:schemeClr val="bg1"/>
+                </a:solidFill>
+              </a:rPr>
+              <a:t>36 of 45 scripted turns passed on its first full batch (7 hit rate limits); all 45 pass only after re-running failures. Not yet run on these 36 questions: we will run it once and report that as first-pass.</a:t>
+            </a:r>
+            <a:endParaRPr lang="en-US" sz="1400" dirty="0"/>
+          </a:p>
+        </p:txBody>
+      </p:sp>
+      <p:sp>
+        <p:nvSpPr>
+          <p:cNvPr id="25" name="Slide Number Placeholder 0"/>
+          <p:cNvSpPr>
+            <a:spLocks noGrp="1"/>
+          </p:cNvSpPr>
+          <p:nvPr>
+            <p:ph type="sldNum" sz="quarter" idx="4294967295"/>
+          </p:nvPr>
+        </p:nvSpPr>
+        <p:spPr>
+          <a:xfrm>
+            <a:off x="11137392" y="6382512"/>
+            <a:ext cx="502920" cy="274320"/>
+          </a:xfrm>
+          <a:prstGeom prst="rect">
+            <a:avLst/>
+          </a:prstGeom>
+          <a:extLst>
+            <a:ext uri="{C572A759-6A51-4108-AA02-DFA0A04FC94B}">
+              <ma14:wrappingTextBoxFlag xmlns:ma14="http://schemas.microsoft.com/office/mac/drawingml/2011/main" val="0"/>
+            </a:ext>
+          </a:extLst>
+        </p:spPr>
+        <p:txBody>
+          <a:bodyPr/>
+          <a:lstStyle>
+            <a:lvl1pPr>
+              <a:defRPr sz="1000">
+                <a:solidFill>
+                  <a:schemeClr val="accent5"/>
+                </a:solidFill>
+              </a:defRPr>
+            </a:lvl1pPr>
+          </a:lstStyle>
+          <a:p>
+            <a:pPr algn="r"/>
+            <a:fld id="{F7021451-1387-4CA6-816F-3879F97B5CBC}" type="slidenum">
+              <a:rPr b="0" lang="en-US"/>
+              <a:t>6</a:t>
+            </a:fld>
+            <a:endParaRPr lang="en-US"/>
+          </a:p>
+        </p:txBody>
+      </p:sp>
+    </p:spTree>
+  </p:cSld>
+  <p:clrMapOvr>
+    <a:masterClrMapping/>
+  </p:clrMapOvr>
+</p:sld>
+</file>
+
+<file path=ppt/slides/slide7.xml><?xml version="1.0" encoding="utf-8"?>
+<p:sld xmlns:a="http://schemas.openxmlformats.org/drawingml/2006/main" xmlns:r="http://schemas.openxmlformats.org/officeDocument/2006/relationships" xmlns:p="http://schemas.openxmlformats.org/presentationml/2006/main">
+  <p:cSld name="Slide 7">
+    <p:spTree>
+      <p:nvGrpSpPr>
+        <p:cNvPr id="1" name=""/>
+        <p:cNvGrpSpPr/>
+        <p:nvPr/>
+      </p:nvGrpSpPr>
+      <p:grpSpPr>
+        <a:xfrm>
+          <a:off x="0" y="0"/>
+          <a:ext cx="0" cy="0"/>
+          <a:chOff x="0" y="0"/>
+          <a:chExt cx="0" cy="0"/>
+        </a:xfrm>
+      </p:grpSpPr>
+      <p:sp>
+        <p:nvSpPr>
+          <p:cNvPr id="2" name="Text 0"/>
+          <p:cNvSpPr/>
+          <p:nvPr>
+            <p:ph idx="100" type="title" hasCustomPrompt="1"/>
+          </p:nvPr>
+        </p:nvSpPr>
+        <p:spPr>
+          <a:xfrm>
+            <a:off x="548640" y="320040"/>
+            <a:ext cx="11091672" cy="822960"/>
+          </a:xfrm>
+          <a:prstGeom prst="rect">
+            <a:avLst/>
+          </a:prstGeom>
+          <a:noFill/>
+          <a:ln/>
+        </p:spPr>
+        <p:txBody>
+          <a:bodyPr wrap="square" lIns="0" tIns="0" rIns="0" bIns="0" rtlCol="0" anchor="ctr"/>
+          <a:lstStyle/>
+          <a:p>
+            <a:pPr algn="l" indent="0" marL="0">
+              <a:buNone/>
+            </a:pPr>
+            <a:r>
+              <a:rPr lang="en-US" sz="3200" b="1" dirty="0">
+                <a:solidFill>
+                  <a:schemeClr val="tx2"/>
+                </a:solidFill>
+              </a:rPr>
               <a:t>Where we are, and what comes next</a:t>
             </a:r>
-            <a:endParaRPr lang="en-US" sz="3400" dirty="0"/>
+            <a:endParaRPr lang="en-US" sz="3200" dirty="0"/>
           </a:p>
         </p:txBody>
       </p:sp>
@@ -5897,7 +5844,7 @@
         <p:spPr>
           <a:xfrm>
             <a:off x="548640" y="1828800"/>
-            <a:ext cx="5394960" cy="2651760"/>
+            <a:ext cx="5394960" cy="2743200"/>
           </a:xfrm>
           <a:prstGeom prst="rect">
             <a:avLst/>
@@ -5909,9 +5856,9 @@
           <a:bodyPr wrap="square" lIns="0" tIns="0" rIns="0" bIns="0" rtlCol="0" anchor="t"/>
           <a:lstStyle/>
           <a:p>
-            <a:pPr algn="l" marL="228600" indent="-228600">
+            <a:pPr algn="l" marL="203200" indent="-203200">
               <a:spcAft>
-                <a:spcPts val="1000"/>
+                <a:spcPts val="900"/>
               </a:spcAft>
               <a:buSzPct val="100000"/>
               <a:buChar char="•"/>
@@ -5927,9 +5874,9 @@
             <a:endParaRPr lang="en-US" sz="1500" dirty="0"/>
           </a:p>
           <a:p>
-            <a:pPr algn="l" marL="228600" indent="-228600">
+            <a:pPr algn="l" marL="203200" indent="-203200">
               <a:spcAft>
-                <a:spcPts val="1000"/>
+                <a:spcPts val="900"/>
               </a:spcAft>
               <a:buSzPct val="100000"/>
               <a:buChar char="•"/>
@@ -5945,9 +5892,9 @@
             <a:endParaRPr lang="en-US" sz="1500" dirty="0"/>
           </a:p>
           <a:p>
-            <a:pPr algn="l" marL="228600" indent="-228600">
+            <a:pPr algn="l" marL="203200" indent="-203200">
               <a:spcAft>
-                <a:spcPts val="1000"/>
+                <a:spcPts val="900"/>
               </a:spcAft>
               <a:buSzPct val="100000"/>
               <a:buChar char="•"/>
@@ -5958,7 +5905,25 @@
                   <a:schemeClr val="tx1"/>
                 </a:solidFill>
               </a:rPr>
-              <a:t>The data holds about 29 working days of work in progress against 12 to 30 days allowed, so almost every order is late and risk levels barely separate</a:t>
+              <a:t>27 of 34 orders are at risk and 6 are late: the data holds about 29 working days of work in progress against 12 to 30 days allowed</a:t>
+            </a:r>
+            <a:endParaRPr lang="en-US" sz="1500" dirty="0"/>
+          </a:p>
+          <a:p>
+            <a:pPr algn="l" marL="203200" indent="-203200">
+              <a:spcAft>
+                <a:spcPts val="900"/>
+              </a:spcAft>
+              <a:buSzPct val="100000"/>
+              <a:buChar char="•"/>
+            </a:pPr>
+            <a:r>
+              <a:rPr lang="en-US" sz="1500" dirty="0">
+                <a:solidFill>
+                  <a:schemeClr val="tx1"/>
+                </a:solidFill>
+              </a:rPr>
+              <a:t>No real general manager has used it yet, so no time saved is measured</a:t>
             </a:r>
             <a:endParaRPr lang="en-US" sz="1500" dirty="0"/>
           </a:p>
@@ -6804,7 +6769,415 @@
             <a:pPr algn="r"/>
             <a:fld id="{F7021451-1387-4CA6-816F-3879F97B5CBC}" type="slidenum">
               <a:rPr b="0" lang="en-US"/>
-              <a:t>6</a:t>
+              <a:t>7</a:t>
+            </a:fld>
+            <a:endParaRPr lang="en-US"/>
+          </a:p>
+        </p:txBody>
+      </p:sp>
+    </p:spTree>
+  </p:cSld>
+  <p:clrMapOvr>
+    <a:masterClrMapping/>
+  </p:clrMapOvr>
+</p:sld>
+</file>
+
+<file path=ppt/slides/slide8.xml><?xml version="1.0" encoding="utf-8"?>
+<p:sld xmlns:a="http://schemas.openxmlformats.org/drawingml/2006/main" xmlns:r="http://schemas.openxmlformats.org/officeDocument/2006/relationships" xmlns:p="http://schemas.openxmlformats.org/presentationml/2006/main">
+  <p:cSld name="Slide 8">
+    <p:spTree>
+      <p:nvGrpSpPr>
+        <p:cNvPr id="1" name=""/>
+        <p:cNvGrpSpPr/>
+        <p:nvPr/>
+      </p:nvGrpSpPr>
+      <p:grpSpPr>
+        <a:xfrm>
+          <a:off x="0" y="0"/>
+          <a:ext cx="0" cy="0"/>
+          <a:chOff x="0" y="0"/>
+          <a:chExt cx="0" cy="0"/>
+        </a:xfrm>
+      </p:grpSpPr>
+      <p:sp>
+        <p:nvSpPr>
+          <p:cNvPr id="2" name="Text 0"/>
+          <p:cNvSpPr/>
+          <p:nvPr>
+            <p:ph idx="100" type="title" hasCustomPrompt="1"/>
+          </p:nvPr>
+        </p:nvSpPr>
+        <p:spPr>
+          <a:xfrm>
+            <a:off x="548640" y="320040"/>
+            <a:ext cx="11091672" cy="822960"/>
+          </a:xfrm>
+          <a:prstGeom prst="rect">
+            <a:avLst/>
+          </a:prstGeom>
+          <a:noFill/>
+          <a:ln/>
+        </p:spPr>
+        <p:txBody>
+          <a:bodyPr wrap="square" lIns="0" tIns="0" rIns="0" bIns="0" rtlCol="0" anchor="ctr"/>
+          <a:lstStyle/>
+          <a:p>
+            <a:pPr algn="l" indent="0" marL="0">
+              <a:buNone/>
+            </a:pPr>
+            <a:r>
+              <a:rPr lang="en-US" sz="3200" b="1" dirty="0">
+                <a:solidFill>
+                  <a:schemeClr val="tx2"/>
+                </a:solidFill>
+              </a:rPr>
+              <a:t>Backup: an estimate, and a watch that fires</a:t>
+            </a:r>
+            <a:endParaRPr lang="en-US" sz="3200" dirty="0"/>
+          </a:p>
+        </p:txBody>
+      </p:sp>
+      <p:sp>
+        <p:nvSpPr>
+          <p:cNvPr id="3" name="Backup tag"/>
+          <p:cNvSpPr txBox="1"/>
+          <p:nvPr/>
+        </p:nvSpPr>
+        <p:spPr>
+          <a:xfrm>
+            <a:off x="10515600" y="566928"/>
+            <a:ext cx="1124712" cy="292608"/>
+          </a:xfrm>
+          <a:prstGeom prst="roundRect">
+            <a:avLst>
+              <a:gd name="adj" fmla="val 31250"/>
+            </a:avLst>
+          </a:prstGeom>
+          <a:solidFill>
+            <a:schemeClr val="accent5"/>
+          </a:solidFill>
+          <a:ln/>
+        </p:spPr>
+        <p:txBody>
+          <a:bodyPr wrap="square" lIns="0" tIns="0" rIns="0" bIns="0" rtlCol="0" anchor="ctr"/>
+          <a:lstStyle/>
+          <a:p>
+            <a:pPr algn="ctr" indent="0" marL="0">
+              <a:buNone/>
+            </a:pPr>
+            <a:r>
+              <a:rPr lang="en-US" sz="1100" b="1" dirty="0">
+                <a:solidFill>
+                  <a:schemeClr val="bg1"/>
+                </a:solidFill>
+              </a:rPr>
+              <a:t>BACKUP</a:t>
+            </a:r>
+            <a:endParaRPr lang="en-US" sz="1100" dirty="0"/>
+          </a:p>
+        </p:txBody>
+      </p:sp>
+      <p:sp>
+        <p:nvSpPr>
+          <p:cNvPr id="4" name="Label"/>
+          <p:cNvSpPr txBox="1"/>
+          <p:nvPr/>
+        </p:nvSpPr>
+        <p:spPr>
+          <a:xfrm>
+            <a:off x="548640" y="1234440"/>
+            <a:ext cx="4297680" cy="411480"/>
+          </a:xfrm>
+          <a:prstGeom prst="rect">
+            <a:avLst/>
+          </a:prstGeom>
+          <a:noFill/>
+          <a:ln/>
+        </p:spPr>
+        <p:txBody>
+          <a:bodyPr wrap="square" lIns="0" tIns="0" rIns="0" bIns="0" rtlCol="0" anchor="ctr"/>
+          <a:lstStyle/>
+          <a:p>
+            <a:pPr algn="l" indent="0" marL="0">
+              <a:buNone/>
+            </a:pPr>
+            <a:r>
+              <a:rPr lang="en-US" sz="1500" b="1" dirty="0">
+                <a:solidFill>
+                  <a:schemeClr val="tx2"/>
+                </a:solidFill>
+              </a:rPr>
+              <a:t>“Can we take 800 hoodies by the 25th?”</a:t>
+            </a:r>
+            <a:endParaRPr lang="en-US" sz="1500" dirty="0"/>
+          </a:p>
+        </p:txBody>
+      </p:sp>
+      <p:sp>
+        <p:nvSpPr>
+          <p:cNvPr id="5" name="Feasibility screenshot frame"/>
+          <p:cNvSpPr/>
+          <p:nvPr/>
+        </p:nvSpPr>
+        <p:spPr>
+          <a:xfrm>
+            <a:off x="502920" y="1737360"/>
+            <a:ext cx="4335258" cy="3611880"/>
+          </a:xfrm>
+          <a:prstGeom prst="roundRect">
+            <a:avLst>
+              <a:gd name="adj" fmla="val 1519"/>
+            </a:avLst>
+          </a:prstGeom>
+          <a:solidFill>
+            <a:schemeClr val="bg1"/>
+          </a:solidFill>
+          <a:ln w="12700">
+            <a:solidFill>
+              <a:schemeClr val="bg2"/>
+            </a:solidFill>
+            <a:prstDash val="solid"/>
+          </a:ln>
+          <a:effectLst>
+            <a:outerShdw sx="100000" sy="100000" kx="0" ky="0" algn="bl" rotWithShape="0" blurRad="101600" dist="25400" dir="5400000">
+              <a:srgbClr val="000000">
+                <a:alpha val="16000"/>
+              </a:srgbClr>
+            </a:outerShdw>
+          </a:effectLst>
+        </p:spPr>
+      </p:sp>
+      <p:pic>
+        <p:nvPicPr>
+          <p:cNvPr id="6" name="Feasibility screenshot" descr="Chat: a feasibility answer with a date range, the bottleneck stage and the assumptions">    </p:cNvPr>
+          <p:cNvPicPr>
+            <a:picLocks noChangeAspect="1"/>
+          </p:cNvPicPr>
+          <p:nvPr/>
+        </p:nvPicPr>
+        <p:blipFill>
+          <a:blip r:embed="rId1"/>
+          <a:stretch>
+            <a:fillRect/>
+          </a:stretch>
+        </p:blipFill>
+        <p:spPr>
+          <a:xfrm>
+            <a:off x="548640" y="1783080"/>
+            <a:ext cx="4243818" cy="3520440"/>
+          </a:xfrm>
+          <a:prstGeom prst="rect">
+            <a:avLst/>
+          </a:prstGeom>
+        </p:spPr>
+      </p:pic>
+      <p:sp>
+        <p:nvSpPr>
+          <p:cNvPr id="7" name="Label"/>
+          <p:cNvSpPr txBox="1"/>
+          <p:nvPr/>
+        </p:nvSpPr>
+        <p:spPr>
+          <a:xfrm>
+            <a:off x="5203938" y="1234440"/>
+            <a:ext cx="6436374" cy="411480"/>
+          </a:xfrm>
+          <a:prstGeom prst="rect">
+            <a:avLst/>
+          </a:prstGeom>
+          <a:noFill/>
+          <a:ln/>
+        </p:spPr>
+        <p:txBody>
+          <a:bodyPr wrap="square" lIns="0" tIns="0" rIns="0" bIns="0" rtlCol="0" anchor="ctr"/>
+          <a:lstStyle/>
+          <a:p>
+            <a:pPr algn="l" indent="0" marL="0">
+              <a:buNone/>
+            </a:pPr>
+            <a:r>
+              <a:rPr lang="en-US" sz="1500" b="1" dirty="0">
+                <a:solidFill>
+                  <a:schemeClr val="tx2"/>
+                </a:solidFill>
+              </a:rPr>
+              <a:t>A watch set yesterday fires in the next morning's briefing</a:t>
+            </a:r>
+            <a:endParaRPr lang="en-US" sz="1500" dirty="0"/>
+          </a:p>
+        </p:txBody>
+      </p:sp>
+      <p:sp>
+        <p:nvSpPr>
+          <p:cNvPr id="8" name="Watch fired screenshot frame"/>
+          <p:cNvSpPr/>
+          <p:nvPr/>
+        </p:nvSpPr>
+        <p:spPr>
+          <a:xfrm>
+            <a:off x="5158218" y="1737360"/>
+            <a:ext cx="5331165" cy="3611880"/>
+          </a:xfrm>
+          <a:prstGeom prst="roundRect">
+            <a:avLst>
+              <a:gd name="adj" fmla="val 1519"/>
+            </a:avLst>
+          </a:prstGeom>
+          <a:solidFill>
+            <a:schemeClr val="bg1"/>
+          </a:solidFill>
+          <a:ln w="12700">
+            <a:solidFill>
+              <a:schemeClr val="bg2"/>
+            </a:solidFill>
+            <a:prstDash val="solid"/>
+          </a:ln>
+          <a:effectLst>
+            <a:outerShdw sx="100000" sy="100000" kx="0" ky="0" algn="bl" rotWithShape="0" blurRad="101600" dist="25400" dir="5400000">
+              <a:srgbClr val="000000">
+                <a:alpha val="16000"/>
+              </a:srgbClr>
+            </a:outerShdw>
+          </a:effectLst>
+        </p:spPr>
+      </p:sp>
+      <p:pic>
+        <p:nvPicPr>
+          <p:cNvPr id="9" name="Watch fired screenshot" descr="The morning page on Friday 10 April with a 'Watch fired' notice and the chat showing the alert for ORD-120">    </p:cNvPr>
+          <p:cNvPicPr>
+            <a:picLocks noChangeAspect="1"/>
+          </p:cNvPicPr>
+          <p:nvPr/>
+        </p:nvPicPr>
+        <p:blipFill>
+          <a:blip r:embed="rId2"/>
+          <a:stretch>
+            <a:fillRect/>
+          </a:stretch>
+        </p:blipFill>
+        <p:spPr>
+          <a:xfrm>
+            <a:off x="5203938" y="1783080"/>
+            <a:ext cx="5239725" cy="3520440"/>
+          </a:xfrm>
+          <a:prstGeom prst="rect">
+            <a:avLst/>
+          </a:prstGeom>
+        </p:spPr>
+      </p:pic>
+      <p:sp>
+        <p:nvSpPr>
+          <p:cNvPr id="10" name="Note"/>
+          <p:cNvSpPr txBox="1"/>
+          <p:nvPr/>
+        </p:nvSpPr>
+        <p:spPr>
+          <a:xfrm>
+            <a:off x="548640" y="5486400"/>
+            <a:ext cx="4243818" cy="731520"/>
+          </a:xfrm>
+          <a:prstGeom prst="rect">
+            <a:avLst/>
+          </a:prstGeom>
+          <a:noFill/>
+          <a:ln/>
+        </p:spPr>
+        <p:txBody>
+          <a:bodyPr wrap="square" lIns="0" tIns="0" rIns="0" bIns="0" rtlCol="0" anchor="t"/>
+          <a:lstStyle/>
+          <a:p>
+            <a:pPr algn="l" indent="0" marL="0">
+              <a:buNone/>
+            </a:pPr>
+            <a:r>
+              <a:rPr lang="en-US" sz="1200" dirty="0">
+                <a:solidFill>
+                  <a:schemeClr val="tx1"/>
+                </a:solidFill>
+              </a:rPr>
+              <a:t>Unlikely by Sat 25 Apr: finishes between Fri 1 May and Fri 8 May. Bottleneck: Packing. An estimate with assumptions, not a commitment.</a:t>
+            </a:r>
+            <a:endParaRPr lang="en-US" sz="1200" dirty="0"/>
+          </a:p>
+        </p:txBody>
+      </p:sp>
+      <p:sp>
+        <p:nvSpPr>
+          <p:cNvPr id="11" name="Note"/>
+          <p:cNvSpPr txBox="1"/>
+          <p:nvPr/>
+        </p:nvSpPr>
+        <p:spPr>
+          <a:xfrm>
+            <a:off x="5203938" y="5486400"/>
+            <a:ext cx="5239725" cy="731520"/>
+          </a:xfrm>
+          <a:prstGeom prst="rect">
+            <a:avLst/>
+          </a:prstGeom>
+          <a:noFill/>
+          <a:ln/>
+        </p:spPr>
+        <p:txBody>
+          <a:bodyPr wrap="square" lIns="0" tIns="0" rIns="0" bIns="0" rtlCol="0" anchor="t"/>
+          <a:lstStyle/>
+          <a:p>
+            <a:pPr algn="l" indent="0" marL="0">
+              <a:buNone/>
+            </a:pPr>
+            <a:r>
+              <a:rPr lang="en-US" sz="1200" dirty="0">
+                <a:solidFill>
+                  <a:schemeClr val="tx1"/>
+                </a:solidFill>
+              </a:rPr>
+              <a:t>Confirmed on 9 April. On 10 April the briefing re-checks the data, finds no activity since 3 April and raises the alert. Nothing is sent outside the system.</a:t>
+            </a:r>
+            <a:endParaRPr lang="en-US" sz="1200" dirty="0"/>
+          </a:p>
+        </p:txBody>
+      </p:sp>
+      <p:sp>
+        <p:nvSpPr>
+          <p:cNvPr id="25" name="Slide Number Placeholder 0"/>
+          <p:cNvSpPr>
+            <a:spLocks noGrp="1"/>
+          </p:cNvSpPr>
+          <p:nvPr>
+            <p:ph type="sldNum" sz="quarter" idx="4294967295"/>
+          </p:nvPr>
+        </p:nvSpPr>
+        <p:spPr>
+          <a:xfrm>
+            <a:off x="11137392" y="6382512"/>
+            <a:ext cx="502920" cy="274320"/>
+          </a:xfrm>
+          <a:prstGeom prst="rect">
+            <a:avLst/>
+          </a:prstGeom>
+          <a:extLst>
+            <a:ext uri="{C572A759-6A51-4108-AA02-DFA0A04FC94B}">
+              <ma14:wrappingTextBoxFlag xmlns:ma14="http://schemas.microsoft.com/office/mac/drawingml/2011/main" val="0"/>
+            </a:ext>
+          </a:extLst>
+        </p:spPr>
+        <p:txBody>
+          <a:bodyPr/>
+          <a:lstStyle>
+            <a:lvl1pPr>
+              <a:defRPr sz="1000">
+                <a:solidFill>
+                  <a:schemeClr val="accent5"/>
+                </a:solidFill>
+              </a:defRPr>
+            </a:lvl1pPr>
+          </a:lstStyle>
+          <a:p>
+            <a:pPr algn="r"/>
+            <a:fld id="{F7021451-1387-4CA6-816F-3879F97B5CBC}" type="slidenum">
+              <a:rPr b="0" lang="en-US"/>
+              <a:t>8</a:t>
             </a:fld>
             <a:endParaRPr lang="en-US"/>
           </a:p>
